--- a/lectures/05_lln-clt-itmo.pptx
+++ b/lectures/05_lln-clt-itmo.pptx
@@ -44,6 +44,10 @@
     <p:sldId id="292" r:id="rId4"/>
     <p:sldId id="293" r:id="rId3"/>
     <p:sldId id="294" r:id="rId2"/>
+    <p:sldId id="295" r:id="rId46"/>
+    <p:sldId id="296" r:id="rId47"/>
+    <p:sldId id="297" r:id="rId48"/>
+    <p:sldId id="298" r:id="rId49"/>
   </p:sldIdLst>
   <p:notesMasterIdLst>
     <p:notesMasterId r:id="rId41"/>
@@ -11265,7 +11269,7 @@
                 </a:solidFill>
                 <a:latin typeface="Arial"/>
               </a:rPr>
-              <a:t>A/B: конверсия 5 % → 5,5 % — около 15 000 на группу только для точности, ~30 000 с учётом мощности.</a:t>
+              <a:t>Время ответа, σ ≈ 80 мс: для ±5 мс нужно около 1 000 запросов, для ±1 мс — около 25 000.</a:t>
             </a:r>
           </a:p>
         </p:txBody>
@@ -12923,7 +12927,7 @@
                 </a:solidFill>
                 <a:latin typeface="Arial"/>
               </a:rPr>
-              <a:t>Когда ЗБЧ и ЦПТ подводят</a:t>
+              <a:t>Бутстреп</a:t>
             </a:r>
           </a:p>
         </p:txBody>
@@ -12962,7 +12966,7 @@
                 </a:solidFill>
                 <a:latin typeface="Arial"/>
               </a:rPr>
-              <a:t>Зависимость, тяжёлые хвосты, смещённые выборки</a:t>
+              <a:t>Погрешность любой статистики по одной выборке</a:t>
             </a:r>
           </a:p>
         </p:txBody>
@@ -13007,7 +13011,7 @@
                 </a:solidFill>
                 <a:latin typeface="Arial"/>
               </a:rPr>
-              <a:t>Зависимые наблюдения: данные стоят меньше</a:t>
+              <a:t>Идея бутстрепа</a:t>
             </a:r>
           </a:p>
         </p:txBody>
@@ -13051,220 +13055,16 @@
           </a:p>
         </p:txBody>
       </p:sp>
-      <p:pic>
-        <p:nvPicPr>
-          <p:cNvPr id="4" name="Picture 3" descr="05-dependence.png"/>
-          <p:cNvPicPr>
-            <a:picLocks noChangeAspect="1"/>
-          </p:cNvPicPr>
-          <p:nvPr/>
-        </p:nvPicPr>
-        <p:blipFill>
-          <a:blip r:embed="rId2"/>
-          <a:stretch>
-            <a:fillRect/>
-          </a:stretch>
-        </p:blipFill>
-        <p:spPr>
-          <a:xfrm>
-            <a:off x="548640" y="1188720"/>
-            <a:ext cx="6766560" cy="2986620"/>
-          </a:xfrm>
-          <a:prstGeom prst="rect">
-            <a:avLst/>
-          </a:prstGeom>
-        </p:spPr>
-      </p:pic>
-      <p:pic>
-        <p:nvPicPr>
-          <p:cNvPr id="5" name="Picture 4" descr="f_5566577be55bf047.png"/>
-          <p:cNvPicPr>
-            <a:picLocks noChangeAspect="1"/>
-          </p:cNvPicPr>
-          <p:nvPr/>
-        </p:nvPicPr>
-        <p:blipFill>
-          <a:blip r:embed="rId3"/>
-          <a:stretch>
-            <a:fillRect/>
-          </a:stretch>
-        </p:blipFill>
-        <p:spPr>
-          <a:xfrm>
-            <a:off x="7589520" y="1325880"/>
-            <a:ext cx="2127504" cy="637032"/>
-          </a:xfrm>
-          <a:prstGeom prst="rect">
-            <a:avLst/>
-          </a:prstGeom>
-        </p:spPr>
-      </p:pic>
-      <p:sp>
-        <p:nvSpPr>
-          <p:cNvPr id="6" name="Rectangle 5"/>
+      <p:sp>
+        <p:nvSpPr>
+          <p:cNvPr id="4" name="Rectangle 3"/>
           <p:cNvSpPr/>
           <p:nvPr/>
         </p:nvSpPr>
         <p:spPr>
           <a:xfrm>
-            <a:off x="7589520" y="2286000"/>
-            <a:ext cx="4050791" cy="2651760"/>
-          </a:xfrm>
-          <a:prstGeom prst="rect">
-            <a:avLst/>
-          </a:prstGeom>
-          <a:solidFill>
-            <a:srgbClr val="FDE9D3"/>
-          </a:solidFill>
-          <a:ln w="6350">
-            <a:solidFill>
-              <a:srgbClr val="FDE9D3"/>
-            </a:solidFill>
-          </a:ln>
-          <a:effectLst/>
-        </p:spPr>
-        <p:style>
-          <a:lnRef idx="1">
-            <a:schemeClr val="accent1"/>
-          </a:lnRef>
-          <a:fillRef idx="3">
-            <a:schemeClr val="accent1"/>
-          </a:fillRef>
-          <a:effectRef idx="2">
-            <a:schemeClr val="accent1"/>
-          </a:effectRef>
-          <a:fontRef idx="minor">
-            <a:schemeClr val="lt1"/>
-          </a:fontRef>
-        </p:style>
-        <p:txBody>
-          <a:bodyPr rtlCol="0" anchor="ctr"/>
-          <a:lstStyle/>
-          <a:p>
-            <a:pPr algn="ctr"/>
-          </a:p>
-        </p:txBody>
-      </p:sp>
-      <p:sp>
-        <p:nvSpPr>
-          <p:cNvPr id="7" name="TextBox 6"/>
-          <p:cNvSpPr txBox="1"/>
-          <p:nvPr/>
-        </p:nvSpPr>
-        <p:spPr>
-          <a:xfrm>
-            <a:off x="7818120" y="2468880"/>
-            <a:ext cx="3593591" cy="365760"/>
-          </a:xfrm>
-          <a:prstGeom prst="rect">
-            <a:avLst/>
-          </a:prstGeom>
-          <a:noFill/>
-        </p:spPr>
-        <p:txBody>
-          <a:bodyPr wrap="square" lIns="0" rIns="0" tIns="0" bIns="0" anchor="t">
-            <a:spAutoFit/>
-          </a:bodyPr>
-          <a:lstStyle/>
-          <a:p>
-            <a:pPr>
-              <a:spcAft>
-                <a:spcPts val="400"/>
-              </a:spcAft>
-            </a:pPr>
-            <a:r>
-              <a:rPr sz="1500" b="1">
-                <a:solidFill>
-                  <a:srgbClr val="1F2937"/>
-                </a:solidFill>
-                <a:latin typeface="Arial"/>
-              </a:rPr>
-              <a:t>A/B-тест по просмотрам</a:t>
-            </a:r>
-          </a:p>
-        </p:txBody>
-      </p:sp>
-      <p:sp>
-        <p:nvSpPr>
-          <p:cNvPr id="8" name="TextBox 7"/>
-          <p:cNvSpPr txBox="1"/>
-          <p:nvPr/>
-        </p:nvSpPr>
-        <p:spPr>
-          <a:xfrm>
-            <a:off x="7818120" y="2852928"/>
-            <a:ext cx="3593591" cy="1965960"/>
-          </a:xfrm>
-          <a:prstGeom prst="rect">
-            <a:avLst/>
-          </a:prstGeom>
-          <a:noFill/>
-        </p:spPr>
-        <p:txBody>
-          <a:bodyPr wrap="square" lIns="0" rIns="0" tIns="0" bIns="0" anchor="t">
-            <a:spAutoFit/>
-          </a:bodyPr>
-          <a:lstStyle/>
-          <a:p>
-            <a:pPr>
-              <a:spcAft>
-                <a:spcPts val="400"/>
-              </a:spcAft>
-            </a:pPr>
-            <a:r>
-              <a:rPr sz="1300" b="0">
-                <a:solidFill>
-                  <a:srgbClr val="6B7280"/>
-                </a:solidFill>
-                <a:latin typeface="Arial"/>
-              </a:rPr>
-              <a:t>CTR = клики / просмотры. Просмотры одного пользователя зависимы.</a:t>
-            </a:r>
-          </a:p>
-          <a:p>
-            <a:pPr>
-              <a:spcAft>
-                <a:spcPts val="400"/>
-              </a:spcAft>
-            </a:pPr>
-            <a:r>
-              <a:rPr sz="1300" b="0">
-                <a:solidFill>
-                  <a:srgbClr val="6B7280"/>
-                </a:solidFill>
-                <a:latin typeface="Arial"/>
-              </a:rPr>
-              <a:t/>
-            </a:r>
-          </a:p>
-          <a:p>
-            <a:pPr>
-              <a:spcAft>
-                <a:spcPts val="400"/>
-              </a:spcAft>
-            </a:pPr>
-            <a:r>
-              <a:rPr sz="1300" b="0">
-                <a:solidFill>
-                  <a:srgbClr val="6B7280"/>
-                </a:solidFill>
-                <a:latin typeface="Arial"/>
-              </a:rPr>
-              <a:t>SE по просмотрам занижена в разы → «находим» несуществующие эффекты. Считайте по пользователям.</a:t>
-            </a:r>
-          </a:p>
-        </p:txBody>
-      </p:sp>
-      <p:sp>
-        <p:nvSpPr>
-          <p:cNvPr id="9" name="Rectangle 8"/>
-          <p:cNvSpPr/>
-          <p:nvPr/>
-        </p:nvSpPr>
-        <p:spPr>
-          <a:xfrm>
-            <a:off x="548640" y="5257800"/>
-            <a:ext cx="11094415" cy="502920"/>
+            <a:off x="548640" y="1280160"/>
+            <a:ext cx="4206240" cy="3611880"/>
           </a:xfrm>
           <a:prstGeom prst="rect">
             <a:avLst/>
@@ -13303,13 +13103,248 @@
       </p:sp>
       <p:sp>
         <p:nvSpPr>
+          <p:cNvPr id="5" name="TextBox 4"/>
+          <p:cNvSpPr txBox="1"/>
+          <p:nvPr/>
+        </p:nvSpPr>
+        <p:spPr>
+          <a:xfrm>
+            <a:off x="777240" y="1463039"/>
+            <a:ext cx="3749039" cy="365760"/>
+          </a:xfrm>
+          <a:prstGeom prst="rect">
+            <a:avLst/>
+          </a:prstGeom>
+          <a:noFill/>
+        </p:spPr>
+        <p:txBody>
+          <a:bodyPr wrap="square" lIns="0" rIns="0" tIns="0" bIns="0" anchor="t">
+            <a:spAutoFit/>
+          </a:bodyPr>
+          <a:lstStyle/>
+          <a:p>
+            <a:pPr>
+              <a:spcAft>
+                <a:spcPts val="400"/>
+              </a:spcAft>
+            </a:pPr>
+            <a:r>
+              <a:rPr sz="1500" b="1">
+                <a:solidFill>
+                  <a:srgbClr val="1F2937"/>
+                </a:solidFill>
+                <a:latin typeface="Arial"/>
+              </a:rPr>
+              <a:t>Алгоритм</a:t>
+            </a:r>
+          </a:p>
+        </p:txBody>
+      </p:sp>
+      <p:sp>
+        <p:nvSpPr>
+          <p:cNvPr id="6" name="TextBox 5"/>
+          <p:cNvSpPr txBox="1"/>
+          <p:nvPr/>
+        </p:nvSpPr>
+        <p:spPr>
+          <a:xfrm>
+            <a:off x="777240" y="1847088"/>
+            <a:ext cx="3749039" cy="2926080"/>
+          </a:xfrm>
+          <a:prstGeom prst="rect">
+            <a:avLst/>
+          </a:prstGeom>
+          <a:noFill/>
+        </p:spPr>
+        <p:txBody>
+          <a:bodyPr wrap="square" lIns="0" rIns="0" tIns="0" bIns="0" anchor="t">
+            <a:spAutoFit/>
+          </a:bodyPr>
+          <a:lstStyle/>
+          <a:p>
+            <a:pPr>
+              <a:spcAft>
+                <a:spcPts val="400"/>
+              </a:spcAft>
+            </a:pPr>
+            <a:r>
+              <a:rPr sz="1300" b="0">
+                <a:solidFill>
+                  <a:srgbClr val="1F2937"/>
+                </a:solidFill>
+                <a:latin typeface="Arial"/>
+              </a:rPr>
+              <a:t>1. Из выборки x извлечь n значений с возвращением: x*.</a:t>
+            </a:r>
+          </a:p>
+          <a:p>
+            <a:pPr>
+              <a:spcAft>
+                <a:spcPts val="400"/>
+              </a:spcAft>
+            </a:pPr>
+            <a:r>
+              <a:rPr sz="1300" b="0">
+                <a:solidFill>
+                  <a:srgbClr val="1F2937"/>
+                </a:solidFill>
+                <a:latin typeface="Arial"/>
+              </a:rPr>
+              <a:t>2. Посчитать T* = T(x*).</a:t>
+            </a:r>
+          </a:p>
+          <a:p>
+            <a:pPr>
+              <a:spcAft>
+                <a:spcPts val="400"/>
+              </a:spcAft>
+            </a:pPr>
+            <a:r>
+              <a:rPr sz="1300" b="0">
+                <a:solidFill>
+                  <a:srgbClr val="1F2937"/>
+                </a:solidFill>
+                <a:latin typeface="Arial"/>
+              </a:rPr>
+              <a:t>3. Повторить B = 2 000–10 000 раз.</a:t>
+            </a:r>
+          </a:p>
+          <a:p>
+            <a:pPr>
+              <a:spcAft>
+                <a:spcPts val="400"/>
+              </a:spcAft>
+            </a:pPr>
+            <a:r>
+              <a:rPr sz="1300" b="0">
+                <a:solidFill>
+                  <a:srgbClr val="1F2937"/>
+                </a:solidFill>
+                <a:latin typeface="Arial"/>
+              </a:rPr>
+              <a:t>4. SE ≈ std(T*); интервал 95 % — квантили 2,5 % и 97,5 % чисел T*.</a:t>
+            </a:r>
+          </a:p>
+        </p:txBody>
+      </p:sp>
+      <p:pic>
+        <p:nvPicPr>
+          <p:cNvPr id="7" name="Picture 6" descr="05-bootstrap.png"/>
+          <p:cNvPicPr>
+            <a:picLocks noChangeAspect="1"/>
+          </p:cNvPicPr>
+          <p:nvPr/>
+        </p:nvPicPr>
+        <p:blipFill>
+          <a:blip r:embed="rId2"/>
+          <a:stretch>
+            <a:fillRect/>
+          </a:stretch>
+        </p:blipFill>
+        <p:spPr>
+          <a:xfrm>
+            <a:off x="4800600" y="1234440"/>
+            <a:ext cx="6839712" cy="2694027"/>
+          </a:xfrm>
+          <a:prstGeom prst="rect">
+            <a:avLst/>
+          </a:prstGeom>
+        </p:spPr>
+      </p:pic>
+      <p:sp>
+        <p:nvSpPr>
+          <p:cNvPr id="8" name="TextBox 7"/>
+          <p:cNvSpPr txBox="1"/>
+          <p:nvPr/>
+        </p:nvSpPr>
+        <p:spPr>
+          <a:xfrm>
+            <a:off x="4800600" y="4023360"/>
+            <a:ext cx="6839712" cy="914400"/>
+          </a:xfrm>
+          <a:prstGeom prst="rect">
+            <a:avLst/>
+          </a:prstGeom>
+          <a:noFill/>
+        </p:spPr>
+        <p:txBody>
+          <a:bodyPr wrap="square" lIns="0" rIns="0" tIns="0" bIns="0" anchor="t">
+            <a:spAutoFit/>
+          </a:bodyPr>
+          <a:lstStyle/>
+          <a:p>
+            <a:pPr>
+              <a:spcAft>
+                <a:spcPts val="400"/>
+              </a:spcAft>
+            </a:pPr>
+            <a:r>
+              <a:rPr sz="1300" b="0">
+                <a:solidFill>
+                  <a:srgbClr val="6B7280"/>
+                </a:solidFill>
+                <a:latin typeface="Arial"/>
+              </a:rPr>
+              <a:t>Неизвестное F заменяем на F̂ₙ — саму выборку. Бутстреп-распределение стоит в выборочной медиане, но его ширина того же порядка, что у настоящего.</a:t>
+            </a:r>
+          </a:p>
+        </p:txBody>
+      </p:sp>
+      <p:sp>
+        <p:nvSpPr>
+          <p:cNvPr id="9" name="Rectangle 8"/>
+          <p:cNvSpPr/>
+          <p:nvPr/>
+        </p:nvSpPr>
+        <p:spPr>
+          <a:xfrm>
+            <a:off x="548640" y="5120640"/>
+            <a:ext cx="11094415" cy="502920"/>
+          </a:xfrm>
+          <a:prstGeom prst="rect">
+            <a:avLst/>
+          </a:prstGeom>
+          <a:solidFill>
+            <a:srgbClr val="D6EEF8"/>
+          </a:solidFill>
+          <a:ln w="6350">
+            <a:solidFill>
+              <a:srgbClr val="D6EEF8"/>
+            </a:solidFill>
+          </a:ln>
+          <a:effectLst/>
+        </p:spPr>
+        <p:style>
+          <a:lnRef idx="1">
+            <a:schemeClr val="accent1"/>
+          </a:lnRef>
+          <a:fillRef idx="3">
+            <a:schemeClr val="accent1"/>
+          </a:fillRef>
+          <a:effectRef idx="2">
+            <a:schemeClr val="accent1"/>
+          </a:effectRef>
+          <a:fontRef idx="minor">
+            <a:schemeClr val="lt1"/>
+          </a:fontRef>
+        </p:style>
+        <p:txBody>
+          <a:bodyPr rtlCol="0" anchor="ctr"/>
+          <a:lstStyle/>
+          <a:p>
+            <a:pPr algn="ctr"/>
+          </a:p>
+        </p:txBody>
+      </p:sp>
+      <p:sp>
+        <p:nvSpPr>
           <p:cNvPr id="10" name="TextBox 9"/>
           <p:cNvSpPr txBox="1"/>
           <p:nvPr/>
         </p:nvSpPr>
         <p:spPr>
           <a:xfrm>
-            <a:off x="777240" y="5257800"/>
+            <a:off x="777240" y="5120640"/>
             <a:ext cx="10637215" cy="502920"/>
           </a:xfrm>
           <a:prstGeom prst="rect">
@@ -13335,7 +13370,7 @@
                 </a:solidFill>
                 <a:latin typeface="Arial"/>
               </a:rPr>
-              <a:t>Временные ряды, сессии пользователя, ученики одного класса: s/√n недооценивает погрешность.</a:t>
+              <a:t>idx = rng.integers(0, n, size=(B, n));  med_star = np.median(x[idx], axis=1)</a:t>
             </a:r>
           </a:p>
         </p:txBody>
@@ -13380,7 +13415,7 @@
                 </a:solidFill>
                 <a:latin typeface="Arial"/>
               </a:rPr>
-              <a:t>Тяжёлые хвосты</a:t>
+              <a:t>Почему работает и насколько точно</a:t>
             </a:r>
           </a:p>
         </p:txBody>
@@ -13426,7 +13461,7 @@
       </p:sp>
       <p:pic>
         <p:nvPicPr>
-          <p:cNvPr id="4" name="Picture 3" descr="05-heavy-tails.png"/>
+          <p:cNvPr id="4" name="Picture 3" descr="f_7c94f1263571ede8.png"/>
           <p:cNvPicPr>
             <a:picLocks noChangeAspect="1"/>
           </p:cNvPicPr>
@@ -13440,8 +13475,8 @@
         </p:blipFill>
         <p:spPr>
           <a:xfrm>
-            <a:off x="548640" y="1188720"/>
-            <a:ext cx="6949440" cy="3134061"/>
+            <a:off x="548640" y="1325880"/>
+            <a:ext cx="6504432" cy="551688"/>
           </a:xfrm>
           <a:prstGeom prst="rect">
             <a:avLst/>
@@ -13456,8 +13491,132 @@
         </p:nvSpPr>
         <p:spPr>
           <a:xfrm>
-            <a:off x="7726679" y="1280160"/>
-            <a:ext cx="3913632" cy="1600200"/>
+            <a:off x="548640" y="2331720"/>
+            <a:ext cx="3566160" cy="2377440"/>
+          </a:xfrm>
+          <a:prstGeom prst="rect">
+            <a:avLst/>
+          </a:prstGeom>
+          <a:solidFill>
+            <a:srgbClr val="D6EEF8"/>
+          </a:solidFill>
+          <a:ln w="6350">
+            <a:solidFill>
+              <a:srgbClr val="D6EEF8"/>
+            </a:solidFill>
+          </a:ln>
+          <a:effectLst/>
+        </p:spPr>
+        <p:style>
+          <a:lnRef idx="1">
+            <a:schemeClr val="accent1"/>
+          </a:lnRef>
+          <a:fillRef idx="3">
+            <a:schemeClr val="accent1"/>
+          </a:fillRef>
+          <a:effectRef idx="2">
+            <a:schemeClr val="accent1"/>
+          </a:effectRef>
+          <a:fontRef idx="minor">
+            <a:schemeClr val="lt1"/>
+          </a:fontRef>
+        </p:style>
+        <p:txBody>
+          <a:bodyPr rtlCol="0" anchor="ctr"/>
+          <a:lstStyle/>
+          <a:p>
+            <a:pPr algn="ctr"/>
+          </a:p>
+        </p:txBody>
+      </p:sp>
+      <p:sp>
+        <p:nvSpPr>
+          <p:cNvPr id="6" name="TextBox 5"/>
+          <p:cNvSpPr txBox="1"/>
+          <p:nvPr/>
+        </p:nvSpPr>
+        <p:spPr>
+          <a:xfrm>
+            <a:off x="777240" y="2514600"/>
+            <a:ext cx="3108960" cy="365760"/>
+          </a:xfrm>
+          <a:prstGeom prst="rect">
+            <a:avLst/>
+          </a:prstGeom>
+          <a:noFill/>
+        </p:spPr>
+        <p:txBody>
+          <a:bodyPr wrap="square" lIns="0" rIns="0" tIns="0" bIns="0" anchor="t">
+            <a:spAutoFit/>
+          </a:bodyPr>
+          <a:lstStyle/>
+          <a:p>
+            <a:pPr>
+              <a:spcAft>
+                <a:spcPts val="400"/>
+              </a:spcAft>
+            </a:pPr>
+            <a:r>
+              <a:rPr sz="1500" b="1">
+                <a:solidFill>
+                  <a:srgbClr val="1F2937"/>
+                </a:solidFill>
+                <a:latin typeface="Arial"/>
+              </a:rPr>
+              <a:t>Гливенко — Кантелли</a:t>
+            </a:r>
+          </a:p>
+        </p:txBody>
+      </p:sp>
+      <p:sp>
+        <p:nvSpPr>
+          <p:cNvPr id="7" name="TextBox 6"/>
+          <p:cNvSpPr txBox="1"/>
+          <p:nvPr/>
+        </p:nvSpPr>
+        <p:spPr>
+          <a:xfrm>
+            <a:off x="777240" y="2898648"/>
+            <a:ext cx="3108960" cy="1691640"/>
+          </a:xfrm>
+          <a:prstGeom prst="rect">
+            <a:avLst/>
+          </a:prstGeom>
+          <a:noFill/>
+        </p:spPr>
+        <p:txBody>
+          <a:bodyPr wrap="square" lIns="0" rIns="0" tIns="0" bIns="0" anchor="t">
+            <a:spAutoFit/>
+          </a:bodyPr>
+          <a:lstStyle/>
+          <a:p>
+            <a:pPr>
+              <a:spcAft>
+                <a:spcPts val="400"/>
+              </a:spcAft>
+            </a:pPr>
+            <a:r>
+              <a:rPr sz="1300" b="0">
+                <a:solidFill>
+                  <a:srgbClr val="1F2937"/>
+                </a:solidFill>
+                <a:latin typeface="Arial"/>
+              </a:rPr>
+              <a:t>F̂ₙ → F, поэтому SE(F̂ₙ) → SE(F) для гладких статистик: средние, квантили, корреляции.</a:t>
+            </a:r>
+          </a:p>
+        </p:txBody>
+      </p:sp>
+      <p:sp>
+        <p:nvSpPr>
+          <p:cNvPr id="8" name="Rectangle 7"/>
+          <p:cNvSpPr/>
+          <p:nvPr/>
+        </p:nvSpPr>
+        <p:spPr>
+          <a:xfrm>
+            <a:off x="4297679" y="2331720"/>
+            <a:ext cx="3566160" cy="2377440"/>
           </a:xfrm>
           <a:prstGeom prst="rect">
             <a:avLst/>
@@ -13496,14 +13655,14 @@
       </p:sp>
       <p:sp>
         <p:nvSpPr>
-          <p:cNvPr id="6" name="TextBox 5"/>
-          <p:cNvSpPr txBox="1"/>
-          <p:nvPr/>
-        </p:nvSpPr>
-        <p:spPr>
-          <a:xfrm>
-            <a:off x="7955279" y="1463039"/>
-            <a:ext cx="3456432" cy="365760"/>
+          <p:cNvPr id="9" name="TextBox 8"/>
+          <p:cNvSpPr txBox="1"/>
+          <p:nvPr/>
+        </p:nvSpPr>
+        <p:spPr>
+          <a:xfrm>
+            <a:off x="4526279" y="2514600"/>
+            <a:ext cx="3108960" cy="365760"/>
           </a:xfrm>
           <a:prstGeom prst="rect">
             <a:avLst/>
@@ -13528,21 +13687,21 @@
                 </a:solidFill>
                 <a:latin typeface="Arial"/>
               </a:rPr>
-              <a:t>EX = ∞ (Коши)</a:t>
-            </a:r>
-          </a:p>
-        </p:txBody>
-      </p:sp>
-      <p:sp>
-        <p:nvSpPr>
-          <p:cNvPr id="7" name="TextBox 6"/>
-          <p:cNvSpPr txBox="1"/>
-          <p:nvPr/>
-        </p:nvSpPr>
-        <p:spPr>
-          <a:xfrm>
-            <a:off x="7955279" y="1847088"/>
-            <a:ext cx="3456432" cy="914400"/>
+              <a:t>63 % разных точек</a:t>
+            </a:r>
+          </a:p>
+        </p:txBody>
+      </p:sp>
+      <p:sp>
+        <p:nvSpPr>
+          <p:cNvPr id="10" name="TextBox 9"/>
+          <p:cNvSpPr txBox="1"/>
+          <p:nvPr/>
+        </p:nvSpPr>
+        <p:spPr>
+          <a:xfrm>
+            <a:off x="4526279" y="2898648"/>
+            <a:ext cx="3108960" cy="1691640"/>
           </a:xfrm>
           <a:prstGeom prst="rect">
             <a:avLst/>
@@ -13567,21 +13726,21 @@
                 </a:solidFill>
                 <a:latin typeface="Arial"/>
               </a:rPr>
-              <a:t>среднее не сходится вообще</a:t>
-            </a:r>
-          </a:p>
-        </p:txBody>
-      </p:sp>
-      <p:sp>
-        <p:nvSpPr>
-          <p:cNvPr id="8" name="Rectangle 7"/>
+              <a:t>В бутстреп-выборке около 63 % исходных наблюдений, остальное повторы. Отсюда out-of-bag в случайном лесе.</a:t>
+            </a:r>
+          </a:p>
+        </p:txBody>
+      </p:sp>
+      <p:sp>
+        <p:nvSpPr>
+          <p:cNvPr id="11" name="Rectangle 10"/>
           <p:cNvSpPr/>
           <p:nvPr/>
         </p:nvSpPr>
         <p:spPr>
           <a:xfrm>
-            <a:off x="7726679" y="3017520"/>
-            <a:ext cx="3913632" cy="1920240"/>
+            <a:off x="8046719" y="2331720"/>
+            <a:ext cx="3593592" cy="2377440"/>
           </a:xfrm>
           <a:prstGeom prst="rect">
             <a:avLst/>
@@ -13620,14 +13779,14 @@
       </p:sp>
       <p:sp>
         <p:nvSpPr>
-          <p:cNvPr id="9" name="TextBox 8"/>
-          <p:cNvSpPr txBox="1"/>
-          <p:nvPr/>
-        </p:nvSpPr>
-        <p:spPr>
-          <a:xfrm>
-            <a:off x="7955279" y="3200400"/>
-            <a:ext cx="3456432" cy="365760"/>
+          <p:cNvPr id="12" name="TextBox 11"/>
+          <p:cNvSpPr txBox="1"/>
+          <p:nvPr/>
+        </p:nvSpPr>
+        <p:spPr>
+          <a:xfrm>
+            <a:off x="8275319" y="2514600"/>
+            <a:ext cx="3136392" cy="365760"/>
           </a:xfrm>
           <a:prstGeom prst="rect">
             <a:avLst/>
@@ -13652,21 +13811,21 @@
                 </a:solidFill>
                 <a:latin typeface="Arial"/>
               </a:rPr>
-              <a:t>EX &lt; ∞, DX = ∞ (Парето α ≤ 2)</a:t>
-            </a:r>
-          </a:p>
-        </p:txBody>
-      </p:sp>
-      <p:sp>
-        <p:nvSpPr>
-          <p:cNvPr id="10" name="TextBox 9"/>
-          <p:cNvSpPr txBox="1"/>
-          <p:nvPr/>
-        </p:nvSpPr>
-        <p:spPr>
-          <a:xfrm>
-            <a:off x="7955279" y="3584448"/>
-            <a:ext cx="3456432" cy="1234440"/>
+              <a:t>B и n</a:t>
+            </a:r>
+          </a:p>
+        </p:txBody>
+      </p:sp>
+      <p:sp>
+        <p:nvSpPr>
+          <p:cNvPr id="13" name="TextBox 12"/>
+          <p:cNvSpPr txBox="1"/>
+          <p:nvPr/>
+        </p:nvSpPr>
+        <p:spPr>
+          <a:xfrm>
+            <a:off x="8275319" y="2898648"/>
+            <a:ext cx="3136392" cy="1691640"/>
           </a:xfrm>
           <a:prstGeom prst="rect">
             <a:avLst/>
@@ -13691,20 +13850,20 @@
                 </a:solidFill>
                 <a:latin typeface="Arial"/>
               </a:rPr>
-              <a:t>ЗБЧ есть, но медленный; ЦПТ нет — средние остаются скошенными</a:t>
-            </a:r>
-          </a:p>
-        </p:txBody>
-      </p:sp>
-      <p:sp>
-        <p:nvSpPr>
-          <p:cNvPr id="11" name="Rectangle 10"/>
+              <a:t>B отвечает только за шум симуляции. Точность ограничена исходным n: новых данных бутстреп не создаёт.</a:t>
+            </a:r>
+          </a:p>
+        </p:txBody>
+      </p:sp>
+      <p:sp>
+        <p:nvSpPr>
+          <p:cNvPr id="14" name="Rectangle 13"/>
           <p:cNvSpPr/>
           <p:nvPr/>
         </p:nvSpPr>
         <p:spPr>
           <a:xfrm>
-            <a:off x="548640" y="5257800"/>
+            <a:off x="548640" y="5120640"/>
             <a:ext cx="11094415" cy="502920"/>
           </a:xfrm>
           <a:prstGeom prst="rect">
@@ -13744,13 +13903,13 @@
       </p:sp>
       <p:sp>
         <p:nvSpPr>
-          <p:cNvPr id="12" name="TextBox 11"/>
-          <p:cNvSpPr txBox="1"/>
-          <p:nvPr/>
-        </p:nvSpPr>
-        <p:spPr>
-          <a:xfrm>
-            <a:off x="777240" y="5257800"/>
+          <p:cNvPr id="15" name="TextBox 14"/>
+          <p:cNvSpPr txBox="1"/>
+          <p:nvPr/>
+        </p:nvSpPr>
+        <p:spPr>
+          <a:xfrm>
+            <a:off x="777240" y="5120640"/>
             <a:ext cx="10637215" cy="502920"/>
           </a:xfrm>
           <a:prstGeom prst="rect">
@@ -13776,7 +13935,7 @@
                 </a:solidFill>
                 <a:latin typeface="Arial"/>
               </a:rPr>
-              <a:t>Доходы, размеры файлов, подписчики, страховые убытки: смотрите медиану и квантили, логарифмируйте.</a:t>
+              <a:t>Семинар, n = 60: бутстреп-интервал для медианы накрывает истину в 94 % случаев.</a:t>
             </a:r>
           </a:p>
         </p:txBody>
@@ -13821,7 +13980,7 @@
                 </a:solidFill>
                 <a:latin typeface="Arial"/>
               </a:rPr>
-              <a:t>Не средние и смещённые выборки</a:t>
+              <a:t>Где бутстреп ломается</a:t>
             </a:r>
           </a:p>
         </p:txBody>
@@ -13865,16 +14024,288 @@
           </a:p>
         </p:txBody>
       </p:sp>
-      <p:sp>
-        <p:nvSpPr>
-          <p:cNvPr id="4" name="Rectangle 3"/>
+      <p:pic>
+        <p:nvPicPr>
+          <p:cNvPr id="4" name="Picture 3" descr="05-bootstrap-max.png"/>
+          <p:cNvPicPr>
+            <a:picLocks noChangeAspect="1"/>
+          </p:cNvPicPr>
+          <p:nvPr/>
+        </p:nvPicPr>
+        <p:blipFill>
+          <a:blip r:embed="rId2"/>
+          <a:stretch>
+            <a:fillRect/>
+          </a:stretch>
+        </p:blipFill>
+        <p:spPr>
+          <a:xfrm>
+            <a:off x="548640" y="1188720"/>
+            <a:ext cx="6675120" cy="2981899"/>
+          </a:xfrm>
+          <a:prstGeom prst="rect">
+            <a:avLst/>
+          </a:prstGeom>
+        </p:spPr>
+      </p:pic>
+      <p:sp>
+        <p:nvSpPr>
+          <p:cNvPr id="5" name="Rectangle 4"/>
           <p:cNvSpPr/>
           <p:nvPr/>
         </p:nvSpPr>
         <p:spPr>
           <a:xfrm>
-            <a:off x="548640" y="1280160"/>
-            <a:ext cx="5394960" cy="2194560"/>
+            <a:off x="7498079" y="1280160"/>
+            <a:ext cx="4142232" cy="1188720"/>
+          </a:xfrm>
+          <a:prstGeom prst="rect">
+            <a:avLst/>
+          </a:prstGeom>
+          <a:solidFill>
+            <a:srgbClr val="FDE9D3"/>
+          </a:solidFill>
+          <a:ln w="6350">
+            <a:solidFill>
+              <a:srgbClr val="FDE9D3"/>
+            </a:solidFill>
+          </a:ln>
+          <a:effectLst/>
+        </p:spPr>
+        <p:style>
+          <a:lnRef idx="1">
+            <a:schemeClr val="accent1"/>
+          </a:lnRef>
+          <a:fillRef idx="3">
+            <a:schemeClr val="accent1"/>
+          </a:fillRef>
+          <a:effectRef idx="2">
+            <a:schemeClr val="accent1"/>
+          </a:effectRef>
+          <a:fontRef idx="minor">
+            <a:schemeClr val="lt1"/>
+          </a:fontRef>
+        </p:style>
+        <p:txBody>
+          <a:bodyPr rtlCol="0" anchor="ctr"/>
+          <a:lstStyle/>
+          <a:p>
+            <a:pPr algn="ctr"/>
+          </a:p>
+        </p:txBody>
+      </p:sp>
+      <p:sp>
+        <p:nvSpPr>
+          <p:cNvPr id="6" name="TextBox 5"/>
+          <p:cNvSpPr txBox="1"/>
+          <p:nvPr/>
+        </p:nvSpPr>
+        <p:spPr>
+          <a:xfrm>
+            <a:off x="7726679" y="1463039"/>
+            <a:ext cx="3685032" cy="365760"/>
+          </a:xfrm>
+          <a:prstGeom prst="rect">
+            <a:avLst/>
+          </a:prstGeom>
+          <a:noFill/>
+        </p:spPr>
+        <p:txBody>
+          <a:bodyPr wrap="square" lIns="0" rIns="0" tIns="0" bIns="0" anchor="t">
+            <a:spAutoFit/>
+          </a:bodyPr>
+          <a:lstStyle/>
+          <a:p>
+            <a:pPr>
+              <a:spcAft>
+                <a:spcPts val="400"/>
+              </a:spcAft>
+            </a:pPr>
+            <a:r>
+              <a:rPr sz="1500" b="1">
+                <a:solidFill>
+                  <a:srgbClr val="1F2937"/>
+                </a:solidFill>
+                <a:latin typeface="Arial"/>
+              </a:rPr>
+              <a:t>Максимум, минимум</a:t>
+            </a:r>
+          </a:p>
+        </p:txBody>
+      </p:sp>
+      <p:sp>
+        <p:nvSpPr>
+          <p:cNvPr id="7" name="TextBox 6"/>
+          <p:cNvSpPr txBox="1"/>
+          <p:nvPr/>
+        </p:nvSpPr>
+        <p:spPr>
+          <a:xfrm>
+            <a:off x="7726679" y="1847088"/>
+            <a:ext cx="3685032" cy="502920"/>
+          </a:xfrm>
+          <a:prstGeom prst="rect">
+            <a:avLst/>
+          </a:prstGeom>
+          <a:noFill/>
+        </p:spPr>
+        <p:txBody>
+          <a:bodyPr wrap="square" lIns="0" rIns="0" tIns="0" bIns="0" anchor="t">
+            <a:spAutoFit/>
+          </a:bodyPr>
+          <a:lstStyle/>
+          <a:p>
+            <a:pPr>
+              <a:spcAft>
+                <a:spcPts val="400"/>
+              </a:spcAft>
+            </a:pPr>
+            <a:r>
+              <a:rPr sz="1300" b="0">
+                <a:solidFill>
+                  <a:srgbClr val="6B7280"/>
+                </a:solidFill>
+                <a:latin typeface="Arial"/>
+              </a:rPr>
+              <a:t>max* ≤ max: в 63 % выборок max* = max</a:t>
+            </a:r>
+          </a:p>
+        </p:txBody>
+      </p:sp>
+      <p:sp>
+        <p:nvSpPr>
+          <p:cNvPr id="8" name="Rectangle 7"/>
+          <p:cNvSpPr/>
+          <p:nvPr/>
+        </p:nvSpPr>
+        <p:spPr>
+          <a:xfrm>
+            <a:off x="7498079" y="2606040"/>
+            <a:ext cx="4142232" cy="1188720"/>
+          </a:xfrm>
+          <a:prstGeom prst="rect">
+            <a:avLst/>
+          </a:prstGeom>
+          <a:solidFill>
+            <a:srgbClr val="FDE9D3"/>
+          </a:solidFill>
+          <a:ln w="6350">
+            <a:solidFill>
+              <a:srgbClr val="FDE9D3"/>
+            </a:solidFill>
+          </a:ln>
+          <a:effectLst/>
+        </p:spPr>
+        <p:style>
+          <a:lnRef idx="1">
+            <a:schemeClr val="accent1"/>
+          </a:lnRef>
+          <a:fillRef idx="3">
+            <a:schemeClr val="accent1"/>
+          </a:fillRef>
+          <a:effectRef idx="2">
+            <a:schemeClr val="accent1"/>
+          </a:effectRef>
+          <a:fontRef idx="minor">
+            <a:schemeClr val="lt1"/>
+          </a:fontRef>
+        </p:style>
+        <p:txBody>
+          <a:bodyPr rtlCol="0" anchor="ctr"/>
+          <a:lstStyle/>
+          <a:p>
+            <a:pPr algn="ctr"/>
+          </a:p>
+        </p:txBody>
+      </p:sp>
+      <p:sp>
+        <p:nvSpPr>
+          <p:cNvPr id="9" name="TextBox 8"/>
+          <p:cNvSpPr txBox="1"/>
+          <p:nvPr/>
+        </p:nvSpPr>
+        <p:spPr>
+          <a:xfrm>
+            <a:off x="7726679" y="2788920"/>
+            <a:ext cx="3685032" cy="365760"/>
+          </a:xfrm>
+          <a:prstGeom prst="rect">
+            <a:avLst/>
+          </a:prstGeom>
+          <a:noFill/>
+        </p:spPr>
+        <p:txBody>
+          <a:bodyPr wrap="square" lIns="0" rIns="0" tIns="0" bIns="0" anchor="t">
+            <a:spAutoFit/>
+          </a:bodyPr>
+          <a:lstStyle/>
+          <a:p>
+            <a:pPr>
+              <a:spcAft>
+                <a:spcPts val="400"/>
+              </a:spcAft>
+            </a:pPr>
+            <a:r>
+              <a:rPr sz="1500" b="1">
+                <a:solidFill>
+                  <a:srgbClr val="1F2937"/>
+                </a:solidFill>
+                <a:latin typeface="Arial"/>
+              </a:rPr>
+              <a:t>Зависимые данные</a:t>
+            </a:r>
+          </a:p>
+        </p:txBody>
+      </p:sp>
+      <p:sp>
+        <p:nvSpPr>
+          <p:cNvPr id="10" name="TextBox 9"/>
+          <p:cNvSpPr txBox="1"/>
+          <p:nvPr/>
+        </p:nvSpPr>
+        <p:spPr>
+          <a:xfrm>
+            <a:off x="7726679" y="3172968"/>
+            <a:ext cx="3685032" cy="502920"/>
+          </a:xfrm>
+          <a:prstGeom prst="rect">
+            <a:avLst/>
+          </a:prstGeom>
+          <a:noFill/>
+        </p:spPr>
+        <p:txBody>
+          <a:bodyPr wrap="square" lIns="0" rIns="0" tIns="0" bIns="0" anchor="t">
+            <a:spAutoFit/>
+          </a:bodyPr>
+          <a:lstStyle/>
+          <a:p>
+            <a:pPr>
+              <a:spcAft>
+                <a:spcPts val="400"/>
+              </a:spcAft>
+            </a:pPr>
+            <a:r>
+              <a:rPr sz="1300" b="0">
+                <a:solidFill>
+                  <a:srgbClr val="6B7280"/>
+                </a:solidFill>
+                <a:latin typeface="Arial"/>
+              </a:rPr>
+              <a:t>выбирать блоки, пользователей, классы, а не отдельные строки</a:t>
+            </a:r>
+          </a:p>
+        </p:txBody>
+      </p:sp>
+      <p:sp>
+        <p:nvSpPr>
+          <p:cNvPr id="11" name="Rectangle 10"/>
+          <p:cNvSpPr/>
+          <p:nvPr/>
+        </p:nvSpPr>
+        <p:spPr>
+          <a:xfrm>
+            <a:off x="7498079" y="3931920"/>
+            <a:ext cx="4142232" cy="1188720"/>
           </a:xfrm>
           <a:prstGeom prst="rect">
             <a:avLst/>
@@ -13913,14 +14344,14 @@
       </p:sp>
       <p:sp>
         <p:nvSpPr>
-          <p:cNvPr id="5" name="TextBox 4"/>
-          <p:cNvSpPr txBox="1"/>
-          <p:nvPr/>
-        </p:nvSpPr>
-        <p:spPr>
-          <a:xfrm>
-            <a:off x="777240" y="1463039"/>
-            <a:ext cx="4937760" cy="365760"/>
+          <p:cNvPr id="12" name="TextBox 11"/>
+          <p:cNvSpPr txBox="1"/>
+          <p:nvPr/>
+        </p:nvSpPr>
+        <p:spPr>
+          <a:xfrm>
+            <a:off x="7726679" y="4114800"/>
+            <a:ext cx="3685032" cy="365760"/>
           </a:xfrm>
           <a:prstGeom prst="rect">
             <a:avLst/>
@@ -13945,21 +14376,21 @@
                 </a:solidFill>
                 <a:latin typeface="Arial"/>
               </a:rPr>
-              <a:t>Максимум — не сумма</a:t>
-            </a:r>
-          </a:p>
-        </p:txBody>
-      </p:sp>
-      <p:sp>
-        <p:nvSpPr>
-          <p:cNvPr id="6" name="TextBox 5"/>
-          <p:cNvSpPr txBox="1"/>
-          <p:nvPr/>
-        </p:nvSpPr>
-        <p:spPr>
-          <a:xfrm>
-            <a:off x="777240" y="1847088"/>
-            <a:ext cx="4937760" cy="1508760"/>
+              <a:t>Тяжёлые хвосты, смещение</a:t>
+            </a:r>
+          </a:p>
+        </p:txBody>
+      </p:sp>
+      <p:sp>
+        <p:nvSpPr>
+          <p:cNvPr id="13" name="TextBox 12"/>
+          <p:cNvSpPr txBox="1"/>
+          <p:nvPr/>
+        </p:nvSpPr>
+        <p:spPr>
+          <a:xfrm>
+            <a:off x="7726679" y="4498848"/>
+            <a:ext cx="3685032" cy="502920"/>
           </a:xfrm>
           <a:prstGeom prst="rect">
             <a:avLst/>
@@ -13978,183 +14409,27 @@
               </a:spcAft>
             </a:pPr>
             <a:r>
-              <a:rPr sz="1400" b="0">
+              <a:rPr sz="1300" b="0">
                 <a:solidFill>
                   <a:srgbClr val="6B7280"/>
                 </a:solidFill>
                 <a:latin typeface="Arial"/>
               </a:rPr>
-              <a:t>Максимум n показательных растёт как ln n и сходится к распределению Гумбеля.</a:t>
-            </a:r>
-          </a:p>
-          <a:p>
-            <a:pPr>
-              <a:spcAft>
-                <a:spcPts val="400"/>
-              </a:spcAft>
-            </a:pPr>
-            <a:r>
-              <a:rPr sz="1400" b="0">
-                <a:solidFill>
-                  <a:srgbClr val="6B7280"/>
-                </a:solidFill>
-                <a:latin typeface="Arial"/>
-              </a:rPr>
-              <a:t/>
-            </a:r>
-          </a:p>
-          <a:p>
-            <a:pPr>
-              <a:spcAft>
-                <a:spcPts val="400"/>
-              </a:spcAft>
-            </a:pPr>
-            <a:r>
-              <a:rPr sz="1400" b="0">
-                <a:solidFill>
-                  <a:srgbClr val="6B7280"/>
-                </a:solidFill>
-                <a:latin typeface="Arial"/>
-              </a:rPr>
-              <a:t>Пиковая нагрузка, «наводнение раз в 100 лет» — теория экстремальных значений.</a:t>
-            </a:r>
-          </a:p>
-        </p:txBody>
-      </p:sp>
-      <p:sp>
-        <p:nvSpPr>
-          <p:cNvPr id="7" name="Rectangle 6"/>
+              <a:t>DX = ∞ или смещённая выборка: бутстреп повторит ошибку</a:t>
+            </a:r>
+          </a:p>
+        </p:txBody>
+      </p:sp>
+      <p:sp>
+        <p:nvSpPr>
+          <p:cNvPr id="14" name="Rectangle 13"/>
           <p:cNvSpPr/>
           <p:nvPr/>
         </p:nvSpPr>
         <p:spPr>
           <a:xfrm>
-            <a:off x="6245352" y="1280160"/>
-            <a:ext cx="5394960" cy="2194560"/>
-          </a:xfrm>
-          <a:prstGeom prst="rect">
-            <a:avLst/>
-          </a:prstGeom>
-          <a:solidFill>
-            <a:srgbClr val="FDE9D3"/>
-          </a:solidFill>
-          <a:ln w="6350">
-            <a:solidFill>
-              <a:srgbClr val="FDE9D3"/>
-            </a:solidFill>
-          </a:ln>
-          <a:effectLst/>
-        </p:spPr>
-        <p:style>
-          <a:lnRef idx="1">
-            <a:schemeClr val="accent1"/>
-          </a:lnRef>
-          <a:fillRef idx="3">
-            <a:schemeClr val="accent1"/>
-          </a:fillRef>
-          <a:effectRef idx="2">
-            <a:schemeClr val="accent1"/>
-          </a:effectRef>
-          <a:fontRef idx="minor">
-            <a:schemeClr val="lt1"/>
-          </a:fontRef>
-        </p:style>
-        <p:txBody>
-          <a:bodyPr rtlCol="0" anchor="ctr"/>
-          <a:lstStyle/>
-          <a:p>
-            <a:pPr algn="ctr"/>
-          </a:p>
-        </p:txBody>
-      </p:sp>
-      <p:sp>
-        <p:nvSpPr>
-          <p:cNvPr id="8" name="TextBox 7"/>
-          <p:cNvSpPr txBox="1"/>
-          <p:nvPr/>
-        </p:nvSpPr>
-        <p:spPr>
-          <a:xfrm>
-            <a:off x="6473952" y="1463039"/>
-            <a:ext cx="4937760" cy="365760"/>
-          </a:xfrm>
-          <a:prstGeom prst="rect">
-            <a:avLst/>
-          </a:prstGeom>
-          <a:noFill/>
-        </p:spPr>
-        <p:txBody>
-          <a:bodyPr wrap="square" lIns="0" rIns="0" tIns="0" bIns="0" anchor="t">
-            <a:spAutoFit/>
-          </a:bodyPr>
-          <a:lstStyle/>
-          <a:p>
-            <a:pPr>
-              <a:spcAft>
-                <a:spcPts val="400"/>
-              </a:spcAft>
-            </a:pPr>
-            <a:r>
-              <a:rPr sz="1500" b="1">
-                <a:solidFill>
-                  <a:srgbClr val="1F2937"/>
-                </a:solidFill>
-                <a:latin typeface="Arial"/>
-              </a:rPr>
-              <a:t>ЗБЧ сходится к «не тому»</a:t>
-            </a:r>
-          </a:p>
-        </p:txBody>
-      </p:sp>
-      <p:sp>
-        <p:nvSpPr>
-          <p:cNvPr id="9" name="TextBox 8"/>
-          <p:cNvSpPr txBox="1"/>
-          <p:nvPr/>
-        </p:nvSpPr>
-        <p:spPr>
-          <a:xfrm>
-            <a:off x="6473952" y="1847088"/>
-            <a:ext cx="4937760" cy="1508760"/>
-          </a:xfrm>
-          <a:prstGeom prst="rect">
-            <a:avLst/>
-          </a:prstGeom>
-          <a:noFill/>
-        </p:spPr>
-        <p:txBody>
-          <a:bodyPr wrap="square" lIns="0" rIns="0" tIns="0" bIns="0" anchor="t">
-            <a:spAutoFit/>
-          </a:bodyPr>
-          <a:lstStyle/>
-          <a:p>
-            <a:pPr>
-              <a:spcAft>
-                <a:spcPts val="400"/>
-              </a:spcAft>
-            </a:pPr>
-            <a:r>
-              <a:rPr sz="1400" b="0">
-                <a:solidFill>
-                  <a:srgbClr val="6B7280"/>
-                </a:solidFill>
-                <a:latin typeface="Arial"/>
-              </a:rPr>
-              <a:t>Если выборка смещена, большое n даёт узкий интервал вокруг неверного ответа.</a:t>
-            </a:r>
-          </a:p>
-        </p:txBody>
-      </p:sp>
-      <p:sp>
-        <p:nvSpPr>
-          <p:cNvPr id="10" name="Rectangle 9"/>
-          <p:cNvSpPr/>
-          <p:nvPr/>
-        </p:nvSpPr>
-        <p:spPr>
-          <a:xfrm>
-            <a:off x="548640" y="3703320"/>
-            <a:ext cx="11094415" cy="1463040"/>
+            <a:off x="548640" y="5349240"/>
+            <a:ext cx="11094415" cy="457200"/>
           </a:xfrm>
           <a:prstGeom prst="rect">
             <a:avLst/>
@@ -14193,22 +14468,22 @@
       </p:sp>
       <p:sp>
         <p:nvSpPr>
-          <p:cNvPr id="11" name="TextBox 10"/>
-          <p:cNvSpPr txBox="1"/>
-          <p:nvPr/>
-        </p:nvSpPr>
-        <p:spPr>
-          <a:xfrm>
-            <a:off x="777240" y="3886200"/>
-            <a:ext cx="10637215" cy="365760"/>
-          </a:xfrm>
-          <a:prstGeom prst="rect">
-            <a:avLst/>
-          </a:prstGeom>
-          <a:noFill/>
-        </p:spPr>
-        <p:txBody>
-          <a:bodyPr wrap="square" lIns="0" rIns="0" tIns="0" bIns="0" anchor="t">
+          <p:cNvPr id="15" name="TextBox 14"/>
+          <p:cNvSpPr txBox="1"/>
+          <p:nvPr/>
+        </p:nvSpPr>
+        <p:spPr>
+          <a:xfrm>
+            <a:off x="777240" y="5349240"/>
+            <a:ext cx="10637215" cy="457200"/>
+          </a:xfrm>
+          <a:prstGeom prst="rect">
+            <a:avLst/>
+          </a:prstGeom>
+          <a:noFill/>
+        </p:spPr>
+        <p:txBody>
+          <a:bodyPr wrap="square" lIns="0" rIns="0" tIns="0" bIns="0" anchor="ctr">
             <a:spAutoFit/>
           </a:bodyPr>
           <a:lstStyle/>
@@ -14225,46 +14500,7 @@
                 </a:solidFill>
                 <a:latin typeface="Arial"/>
               </a:rPr>
-              <a:t>Literary Digest, 1936</a:t>
-            </a:r>
-          </a:p>
-        </p:txBody>
-      </p:sp>
-      <p:sp>
-        <p:nvSpPr>
-          <p:cNvPr id="12" name="TextBox 11"/>
-          <p:cNvSpPr txBox="1"/>
-          <p:nvPr/>
-        </p:nvSpPr>
-        <p:spPr>
-          <a:xfrm>
-            <a:off x="777240" y="4270248"/>
-            <a:ext cx="10637215" cy="777240"/>
-          </a:xfrm>
-          <a:prstGeom prst="rect">
-            <a:avLst/>
-          </a:prstGeom>
-          <a:noFill/>
-        </p:spPr>
-        <p:txBody>
-          <a:bodyPr wrap="square" lIns="0" rIns="0" tIns="0" bIns="0" anchor="t">
-            <a:spAutoFit/>
-          </a:bodyPr>
-          <a:lstStyle/>
-          <a:p>
-            <a:pPr>
-              <a:spcAft>
-                <a:spcPts val="400"/>
-              </a:spcAft>
-            </a:pPr>
-            <a:r>
-              <a:rPr sz="1400" b="0">
-                <a:solidFill>
-                  <a:srgbClr val="1F2937"/>
-                </a:solidFill>
-                <a:latin typeface="Arial"/>
-              </a:rPr>
-              <a:t>2,4 млн анкет читателей: Лэндон выиграет с отрывом 14 п. п. Итог: Рузвельт +24 п. п. Гэллап по случайной выборке ~50 000 человек угадал.</a:t>
+              <a:t>Бутстреп воспроизводит выборку со всеми её особенностями и не знает того, чего в ней нет.</a:t>
             </a:r>
           </a:p>
         </p:txBody>
@@ -14309,7 +14545,7 @@
                 </a:solidFill>
                 <a:latin typeface="Arial"/>
               </a:rPr>
-              <a:t>ЗБЧ и ЦПТ в ML</a:t>
+              <a:t>Когда ЗБЧ и ЦПТ подводят</a:t>
             </a:r>
           </a:p>
         </p:txBody>
@@ -14348,7 +14584,7 @@
                 </a:solidFill>
                 <a:latin typeface="Arial"/>
               </a:rPr>
-              <a:t>Где эти теоремы работают каждый день</a:t>
+              <a:t>Зависимость, тяжёлые хвосты, смещённые выборки</a:t>
             </a:r>
           </a:p>
         </p:txBody>
@@ -14393,7 +14629,7 @@
                 </a:solidFill>
                 <a:latin typeface="Arial"/>
               </a:rPr>
-              <a:t>Где это встречается в машинном обучении</a:t>
+              <a:t>Зависимые наблюдения: данные стоят меньше</a:t>
             </a:r>
           </a:p>
         </p:txBody>
@@ -14437,16 +14673,220 @@
           </a:p>
         </p:txBody>
       </p:sp>
-      <p:sp>
-        <p:nvSpPr>
-          <p:cNvPr id="4" name="Rectangle 3"/>
+      <p:pic>
+        <p:nvPicPr>
+          <p:cNvPr id="4" name="Picture 3" descr="05-dependence.png"/>
+          <p:cNvPicPr>
+            <a:picLocks noChangeAspect="1"/>
+          </p:cNvPicPr>
+          <p:nvPr/>
+        </p:nvPicPr>
+        <p:blipFill>
+          <a:blip r:embed="rId2"/>
+          <a:stretch>
+            <a:fillRect/>
+          </a:stretch>
+        </p:blipFill>
+        <p:spPr>
+          <a:xfrm>
+            <a:off x="548640" y="1188720"/>
+            <a:ext cx="6766560" cy="2986620"/>
+          </a:xfrm>
+          <a:prstGeom prst="rect">
+            <a:avLst/>
+          </a:prstGeom>
+        </p:spPr>
+      </p:pic>
+      <p:pic>
+        <p:nvPicPr>
+          <p:cNvPr id="5" name="Picture 4" descr="f_5566577be55bf047.png"/>
+          <p:cNvPicPr>
+            <a:picLocks noChangeAspect="1"/>
+          </p:cNvPicPr>
+          <p:nvPr/>
+        </p:nvPicPr>
+        <p:blipFill>
+          <a:blip r:embed="rId3"/>
+          <a:stretch>
+            <a:fillRect/>
+          </a:stretch>
+        </p:blipFill>
+        <p:spPr>
+          <a:xfrm>
+            <a:off x="7589520" y="1325880"/>
+            <a:ext cx="2127504" cy="637032"/>
+          </a:xfrm>
+          <a:prstGeom prst="rect">
+            <a:avLst/>
+          </a:prstGeom>
+        </p:spPr>
+      </p:pic>
+      <p:sp>
+        <p:nvSpPr>
+          <p:cNvPr id="6" name="Rectangle 5"/>
           <p:cNvSpPr/>
           <p:nvPr/>
         </p:nvSpPr>
         <p:spPr>
           <a:xfrm>
-            <a:off x="548640" y="1280160"/>
-            <a:ext cx="5486400" cy="1234440"/>
+            <a:off x="7589520" y="2286000"/>
+            <a:ext cx="4050791" cy="2651760"/>
+          </a:xfrm>
+          <a:prstGeom prst="rect">
+            <a:avLst/>
+          </a:prstGeom>
+          <a:solidFill>
+            <a:srgbClr val="FDE9D3"/>
+          </a:solidFill>
+          <a:ln w="6350">
+            <a:solidFill>
+              <a:srgbClr val="FDE9D3"/>
+            </a:solidFill>
+          </a:ln>
+          <a:effectLst/>
+        </p:spPr>
+        <p:style>
+          <a:lnRef idx="1">
+            <a:schemeClr val="accent1"/>
+          </a:lnRef>
+          <a:fillRef idx="3">
+            <a:schemeClr val="accent1"/>
+          </a:fillRef>
+          <a:effectRef idx="2">
+            <a:schemeClr val="accent1"/>
+          </a:effectRef>
+          <a:fontRef idx="minor">
+            <a:schemeClr val="lt1"/>
+          </a:fontRef>
+        </p:style>
+        <p:txBody>
+          <a:bodyPr rtlCol="0" anchor="ctr"/>
+          <a:lstStyle/>
+          <a:p>
+            <a:pPr algn="ctr"/>
+          </a:p>
+        </p:txBody>
+      </p:sp>
+      <p:sp>
+        <p:nvSpPr>
+          <p:cNvPr id="7" name="TextBox 6"/>
+          <p:cNvSpPr txBox="1"/>
+          <p:nvPr/>
+        </p:nvSpPr>
+        <p:spPr>
+          <a:xfrm>
+            <a:off x="7818120" y="2468880"/>
+            <a:ext cx="3593591" cy="365760"/>
+          </a:xfrm>
+          <a:prstGeom prst="rect">
+            <a:avLst/>
+          </a:prstGeom>
+          <a:noFill/>
+        </p:spPr>
+        <p:txBody>
+          <a:bodyPr wrap="square" lIns="0" rIns="0" tIns="0" bIns="0" anchor="t">
+            <a:spAutoFit/>
+          </a:bodyPr>
+          <a:lstStyle/>
+          <a:p>
+            <a:pPr>
+              <a:spcAft>
+                <a:spcPts val="400"/>
+              </a:spcAft>
+            </a:pPr>
+            <a:r>
+              <a:rPr sz="1500" b="1">
+                <a:solidFill>
+                  <a:srgbClr val="1F2937"/>
+                </a:solidFill>
+                <a:latin typeface="Arial"/>
+              </a:rPr>
+              <a:t>Ученики одного класса</a:t>
+            </a:r>
+          </a:p>
+        </p:txBody>
+      </p:sp>
+      <p:sp>
+        <p:nvSpPr>
+          <p:cNvPr id="8" name="TextBox 7"/>
+          <p:cNvSpPr txBox="1"/>
+          <p:nvPr/>
+        </p:nvSpPr>
+        <p:spPr>
+          <a:xfrm>
+            <a:off x="7818120" y="2852928"/>
+            <a:ext cx="3593591" cy="1965960"/>
+          </a:xfrm>
+          <a:prstGeom prst="rect">
+            <a:avLst/>
+          </a:prstGeom>
+          <a:noFill/>
+        </p:spPr>
+        <p:txBody>
+          <a:bodyPr wrap="square" lIns="0" rIns="0" tIns="0" bIns="0" anchor="t">
+            <a:spAutoFit/>
+          </a:bodyPr>
+          <a:lstStyle/>
+          <a:p>
+            <a:pPr>
+              <a:spcAft>
+                <a:spcPts val="400"/>
+              </a:spcAft>
+            </a:pPr>
+            <a:r>
+              <a:rPr sz="1300" b="0">
+                <a:solidFill>
+                  <a:srgbClr val="6B7280"/>
+                </a:solidFill>
+                <a:latin typeface="Arial"/>
+              </a:rPr>
+              <a:t>2 000 школьников из 40 классов: ответы одноклассников похожи.</a:t>
+            </a:r>
+          </a:p>
+          <a:p>
+            <a:pPr>
+              <a:spcAft>
+                <a:spcPts val="400"/>
+              </a:spcAft>
+            </a:pPr>
+            <a:r>
+              <a:rPr sz="1300" b="0">
+                <a:solidFill>
+                  <a:srgbClr val="6B7280"/>
+                </a:solidFill>
+                <a:latin typeface="Arial"/>
+              </a:rPr>
+              <a:t/>
+            </a:r>
+          </a:p>
+          <a:p>
+            <a:pPr>
+              <a:spcAft>
+                <a:spcPts val="400"/>
+              </a:spcAft>
+            </a:pPr>
+            <a:r>
+              <a:rPr sz="1300" b="0">
+                <a:solidFill>
+                  <a:srgbClr val="6B7280"/>
+                </a:solidFill>
+                <a:latin typeface="Arial"/>
+              </a:rPr>
+              <a:t>SE по ученикам занижена в разы. Считайте по классам: 40 средних или бутстреп по классам.</a:t>
+            </a:r>
+          </a:p>
+        </p:txBody>
+      </p:sp>
+      <p:sp>
+        <p:nvSpPr>
+          <p:cNvPr id="9" name="Rectangle 8"/>
+          <p:cNvSpPr/>
+          <p:nvPr/>
+        </p:nvSpPr>
+        <p:spPr>
+          <a:xfrm>
+            <a:off x="548640" y="5257800"/>
+            <a:ext cx="11094415" cy="502920"/>
           </a:xfrm>
           <a:prstGeom prst="rect">
             <a:avLst/>
@@ -14485,22 +14925,22 @@
       </p:sp>
       <p:sp>
         <p:nvSpPr>
-          <p:cNvPr id="5" name="TextBox 4"/>
-          <p:cNvSpPr txBox="1"/>
-          <p:nvPr/>
-        </p:nvSpPr>
-        <p:spPr>
-          <a:xfrm>
-            <a:off x="777240" y="1463039"/>
-            <a:ext cx="5029200" cy="365760"/>
-          </a:xfrm>
-          <a:prstGeom prst="rect">
-            <a:avLst/>
-          </a:prstGeom>
-          <a:noFill/>
-        </p:spPr>
-        <p:txBody>
-          <a:bodyPr wrap="square" lIns="0" rIns="0" tIns="0" bIns="0" anchor="t">
+          <p:cNvPr id="10" name="TextBox 9"/>
+          <p:cNvSpPr txBox="1"/>
+          <p:nvPr/>
+        </p:nvSpPr>
+        <p:spPr>
+          <a:xfrm>
+            <a:off x="777240" y="5257800"/>
+            <a:ext cx="10637215" cy="502920"/>
+          </a:xfrm>
+          <a:prstGeom prst="rect">
+            <a:avLst/>
+          </a:prstGeom>
+          <a:noFill/>
+        </p:spPr>
+        <p:txBody>
+          <a:bodyPr wrap="square" lIns="0" rIns="0" tIns="0" bIns="0" anchor="ctr">
             <a:spAutoFit/>
           </a:bodyPr>
           <a:lstStyle/>
@@ -14517,666 +14957,7 @@
                 </a:solidFill>
                 <a:latin typeface="Arial"/>
               </a:rPr>
-              <a:t>Эмпирический риск</a:t>
-            </a:r>
-          </a:p>
-        </p:txBody>
-      </p:sp>
-      <p:sp>
-        <p:nvSpPr>
-          <p:cNvPr id="6" name="TextBox 5"/>
-          <p:cNvSpPr txBox="1"/>
-          <p:nvPr/>
-        </p:nvSpPr>
-        <p:spPr>
-          <a:xfrm>
-            <a:off x="777240" y="1847088"/>
-            <a:ext cx="5029200" cy="548640"/>
-          </a:xfrm>
-          <a:prstGeom prst="rect">
-            <a:avLst/>
-          </a:prstGeom>
-          <a:noFill/>
-        </p:spPr>
-        <p:txBody>
-          <a:bodyPr wrap="square" lIns="0" rIns="0" tIns="0" bIns="0" anchor="t">
-            <a:spAutoFit/>
-          </a:bodyPr>
-          <a:lstStyle/>
-          <a:p>
-            <a:pPr>
-              <a:spcAft>
-                <a:spcPts val="400"/>
-              </a:spcAft>
-            </a:pPr>
-            <a:r>
-              <a:rPr sz="1300" b="0">
-                <a:solidFill>
-                  <a:srgbClr val="1F2937"/>
-                </a:solidFill>
-                <a:latin typeface="Arial"/>
-              </a:rPr>
-              <a:t>средняя ошибка на обучении ≈ ожидаемая ошибка; тест из 1 000 объектов — точность ±1–2 п. п.</a:t>
-            </a:r>
-          </a:p>
-        </p:txBody>
-      </p:sp>
-      <p:sp>
-        <p:nvSpPr>
-          <p:cNvPr id="7" name="Rectangle 6"/>
-          <p:cNvSpPr/>
-          <p:nvPr/>
-        </p:nvSpPr>
-        <p:spPr>
-          <a:xfrm>
-            <a:off x="6153912" y="1280160"/>
-            <a:ext cx="5486400" cy="1234440"/>
-          </a:xfrm>
-          <a:prstGeom prst="rect">
-            <a:avLst/>
-          </a:prstGeom>
-          <a:solidFill>
-            <a:srgbClr val="F5F7FA"/>
-          </a:solidFill>
-          <a:ln w="6350">
-            <a:solidFill>
-              <a:srgbClr val="D1D5DB"/>
-            </a:solidFill>
-          </a:ln>
-          <a:effectLst/>
-        </p:spPr>
-        <p:style>
-          <a:lnRef idx="1">
-            <a:schemeClr val="accent1"/>
-          </a:lnRef>
-          <a:fillRef idx="3">
-            <a:schemeClr val="accent1"/>
-          </a:fillRef>
-          <a:effectRef idx="2">
-            <a:schemeClr val="accent1"/>
-          </a:effectRef>
-          <a:fontRef idx="minor">
-            <a:schemeClr val="lt1"/>
-          </a:fontRef>
-        </p:style>
-        <p:txBody>
-          <a:bodyPr rtlCol="0" anchor="ctr"/>
-          <a:lstStyle/>
-          <a:p>
-            <a:pPr algn="ctr"/>
-          </a:p>
-        </p:txBody>
-      </p:sp>
-      <p:sp>
-        <p:nvSpPr>
-          <p:cNvPr id="8" name="TextBox 7"/>
-          <p:cNvSpPr txBox="1"/>
-          <p:nvPr/>
-        </p:nvSpPr>
-        <p:spPr>
-          <a:xfrm>
-            <a:off x="6382512" y="1463039"/>
-            <a:ext cx="5029200" cy="365760"/>
-          </a:xfrm>
-          <a:prstGeom prst="rect">
-            <a:avLst/>
-          </a:prstGeom>
-          <a:noFill/>
-        </p:spPr>
-        <p:txBody>
-          <a:bodyPr wrap="square" lIns="0" rIns="0" tIns="0" bIns="0" anchor="t">
-            <a:spAutoFit/>
-          </a:bodyPr>
-          <a:lstStyle/>
-          <a:p>
-            <a:pPr>
-              <a:spcAft>
-                <a:spcPts val="400"/>
-              </a:spcAft>
-            </a:pPr>
-            <a:r>
-              <a:rPr sz="1500" b="1">
-                <a:solidFill>
-                  <a:srgbClr val="1F2937"/>
-                </a:solidFill>
-                <a:latin typeface="Arial"/>
-              </a:rPr>
-              <a:t>SGD и мини-батчи</a:t>
-            </a:r>
-          </a:p>
-        </p:txBody>
-      </p:sp>
-      <p:sp>
-        <p:nvSpPr>
-          <p:cNvPr id="9" name="TextBox 8"/>
-          <p:cNvSpPr txBox="1"/>
-          <p:nvPr/>
-        </p:nvSpPr>
-        <p:spPr>
-          <a:xfrm>
-            <a:off x="6382512" y="1847088"/>
-            <a:ext cx="5029200" cy="548640"/>
-          </a:xfrm>
-          <a:prstGeom prst="rect">
-            <a:avLst/>
-          </a:prstGeom>
-          <a:noFill/>
-        </p:spPr>
-        <p:txBody>
-          <a:bodyPr wrap="square" lIns="0" rIns="0" tIns="0" bIns="0" anchor="t">
-            <a:spAutoFit/>
-          </a:bodyPr>
-          <a:lstStyle/>
-          <a:p>
-            <a:pPr>
-              <a:spcAft>
-                <a:spcPts val="400"/>
-              </a:spcAft>
-            </a:pPr>
-            <a:r>
-              <a:rPr sz="1300" b="0">
-                <a:solidFill>
-                  <a:srgbClr val="6B7280"/>
-                </a:solidFill>
-                <a:latin typeface="Arial"/>
-              </a:rPr>
-              <a:t>градиент по батчу — выборочное среднее: шум ∝ 1/√B</a:t>
-            </a:r>
-          </a:p>
-        </p:txBody>
-      </p:sp>
-      <p:sp>
-        <p:nvSpPr>
-          <p:cNvPr id="10" name="Rectangle 9"/>
-          <p:cNvSpPr/>
-          <p:nvPr/>
-        </p:nvSpPr>
-        <p:spPr>
-          <a:xfrm>
-            <a:off x="548640" y="2651760"/>
-            <a:ext cx="5486400" cy="1234440"/>
-          </a:xfrm>
-          <a:prstGeom prst="rect">
-            <a:avLst/>
-          </a:prstGeom>
-          <a:solidFill>
-            <a:srgbClr val="F5F7FA"/>
-          </a:solidFill>
-          <a:ln w="6350">
-            <a:solidFill>
-              <a:srgbClr val="D1D5DB"/>
-            </a:solidFill>
-          </a:ln>
-          <a:effectLst/>
-        </p:spPr>
-        <p:style>
-          <a:lnRef idx="1">
-            <a:schemeClr val="accent1"/>
-          </a:lnRef>
-          <a:fillRef idx="3">
-            <a:schemeClr val="accent1"/>
-          </a:fillRef>
-          <a:effectRef idx="2">
-            <a:schemeClr val="accent1"/>
-          </a:effectRef>
-          <a:fontRef idx="minor">
-            <a:schemeClr val="lt1"/>
-          </a:fontRef>
-        </p:style>
-        <p:txBody>
-          <a:bodyPr rtlCol="0" anchor="ctr"/>
-          <a:lstStyle/>
-          <a:p>
-            <a:pPr algn="ctr"/>
-          </a:p>
-        </p:txBody>
-      </p:sp>
-      <p:sp>
-        <p:nvSpPr>
-          <p:cNvPr id="11" name="TextBox 10"/>
-          <p:cNvSpPr txBox="1"/>
-          <p:nvPr/>
-        </p:nvSpPr>
-        <p:spPr>
-          <a:xfrm>
-            <a:off x="777240" y="2834640"/>
-            <a:ext cx="5029200" cy="365760"/>
-          </a:xfrm>
-          <a:prstGeom prst="rect">
-            <a:avLst/>
-          </a:prstGeom>
-          <a:noFill/>
-        </p:spPr>
-        <p:txBody>
-          <a:bodyPr wrap="square" lIns="0" rIns="0" tIns="0" bIns="0" anchor="t">
-            <a:spAutoFit/>
-          </a:bodyPr>
-          <a:lstStyle/>
-          <a:p>
-            <a:pPr>
-              <a:spcAft>
-                <a:spcPts val="400"/>
-              </a:spcAft>
-            </a:pPr>
-            <a:r>
-              <a:rPr sz="1500" b="1">
-                <a:solidFill>
-                  <a:srgbClr val="1F2937"/>
-                </a:solidFill>
-                <a:latin typeface="Arial"/>
-              </a:rPr>
-              <a:t>Бутстреп</a:t>
-            </a:r>
-          </a:p>
-        </p:txBody>
-      </p:sp>
-      <p:sp>
-        <p:nvSpPr>
-          <p:cNvPr id="12" name="TextBox 11"/>
-          <p:cNvSpPr txBox="1"/>
-          <p:nvPr/>
-        </p:nvSpPr>
-        <p:spPr>
-          <a:xfrm>
-            <a:off x="777240" y="3218688"/>
-            <a:ext cx="5029200" cy="548640"/>
-          </a:xfrm>
-          <a:prstGeom prst="rect">
-            <a:avLst/>
-          </a:prstGeom>
-          <a:noFill/>
-        </p:spPr>
-        <p:txBody>
-          <a:bodyPr wrap="square" lIns="0" rIns="0" tIns="0" bIns="0" anchor="t">
-            <a:spAutoFit/>
-          </a:bodyPr>
-          <a:lstStyle/>
-          <a:p>
-            <a:pPr>
-              <a:spcAft>
-                <a:spcPts val="400"/>
-              </a:spcAft>
-            </a:pPr>
-            <a:r>
-              <a:rPr sz="1300" b="0">
-                <a:solidFill>
-                  <a:srgbClr val="6B7280"/>
-                </a:solidFill>
-                <a:latin typeface="Arial"/>
-              </a:rPr>
-              <a:t>симуляция выборочного распределения: F заменили на F̂ₙ</a:t>
-            </a:r>
-          </a:p>
-        </p:txBody>
-      </p:sp>
-      <p:sp>
-        <p:nvSpPr>
-          <p:cNvPr id="13" name="Rectangle 12"/>
-          <p:cNvSpPr/>
-          <p:nvPr/>
-        </p:nvSpPr>
-        <p:spPr>
-          <a:xfrm>
-            <a:off x="6153912" y="2651760"/>
-            <a:ext cx="5486400" cy="1234440"/>
-          </a:xfrm>
-          <a:prstGeom prst="rect">
-            <a:avLst/>
-          </a:prstGeom>
-          <a:solidFill>
-            <a:srgbClr val="D6EEF8"/>
-          </a:solidFill>
-          <a:ln w="6350">
-            <a:solidFill>
-              <a:srgbClr val="D6EEF8"/>
-            </a:solidFill>
-          </a:ln>
-          <a:effectLst/>
-        </p:spPr>
-        <p:style>
-          <a:lnRef idx="1">
-            <a:schemeClr val="accent1"/>
-          </a:lnRef>
-          <a:fillRef idx="3">
-            <a:schemeClr val="accent1"/>
-          </a:fillRef>
-          <a:effectRef idx="2">
-            <a:schemeClr val="accent1"/>
-          </a:effectRef>
-          <a:fontRef idx="minor">
-            <a:schemeClr val="lt1"/>
-          </a:fontRef>
-        </p:style>
-        <p:txBody>
-          <a:bodyPr rtlCol="0" anchor="ctr"/>
-          <a:lstStyle/>
-          <a:p>
-            <a:pPr algn="ctr"/>
-          </a:p>
-        </p:txBody>
-      </p:sp>
-      <p:sp>
-        <p:nvSpPr>
-          <p:cNvPr id="14" name="TextBox 13"/>
-          <p:cNvSpPr txBox="1"/>
-          <p:nvPr/>
-        </p:nvSpPr>
-        <p:spPr>
-          <a:xfrm>
-            <a:off x="6382512" y="2834640"/>
-            <a:ext cx="5029200" cy="365760"/>
-          </a:xfrm>
-          <a:prstGeom prst="rect">
-            <a:avLst/>
-          </a:prstGeom>
-          <a:noFill/>
-        </p:spPr>
-        <p:txBody>
-          <a:bodyPr wrap="square" lIns="0" rIns="0" tIns="0" bIns="0" anchor="t">
-            <a:spAutoFit/>
-          </a:bodyPr>
-          <a:lstStyle/>
-          <a:p>
-            <a:pPr>
-              <a:spcAft>
-                <a:spcPts val="400"/>
-              </a:spcAft>
-            </a:pPr>
-            <a:r>
-              <a:rPr sz="1500" b="1">
-                <a:solidFill>
-                  <a:srgbClr val="1F2937"/>
-                </a:solidFill>
-                <a:latin typeface="Arial"/>
-              </a:rPr>
-              <a:t>Ансамбли, бэггинг</a:t>
-            </a:r>
-          </a:p>
-        </p:txBody>
-      </p:sp>
-      <p:sp>
-        <p:nvSpPr>
-          <p:cNvPr id="15" name="TextBox 14"/>
-          <p:cNvSpPr txBox="1"/>
-          <p:nvPr/>
-        </p:nvSpPr>
-        <p:spPr>
-          <a:xfrm>
-            <a:off x="6382512" y="3218688"/>
-            <a:ext cx="5029200" cy="548640"/>
-          </a:xfrm>
-          <a:prstGeom prst="rect">
-            <a:avLst/>
-          </a:prstGeom>
-          <a:noFill/>
-        </p:spPr>
-        <p:txBody>
-          <a:bodyPr wrap="square" lIns="0" rIns="0" tIns="0" bIns="0" anchor="t">
-            <a:spAutoFit/>
-          </a:bodyPr>
-          <a:lstStyle/>
-          <a:p>
-            <a:pPr>
-              <a:spcAft>
-                <a:spcPts val="400"/>
-              </a:spcAft>
-            </a:pPr>
-            <a:r>
-              <a:rPr sz="1300" b="0">
-                <a:solidFill>
-                  <a:srgbClr val="1F2937"/>
-                </a:solidFill>
-                <a:latin typeface="Arial"/>
-              </a:rPr>
-              <a:t>среднее слабо коррелированных моделей — меньше дисперсия</a:t>
-            </a:r>
-          </a:p>
-        </p:txBody>
-      </p:sp>
-      <p:sp>
-        <p:nvSpPr>
-          <p:cNvPr id="16" name="Rectangle 15"/>
-          <p:cNvSpPr/>
-          <p:nvPr/>
-        </p:nvSpPr>
-        <p:spPr>
-          <a:xfrm>
-            <a:off x="548640" y="4023360"/>
-            <a:ext cx="5486400" cy="1234440"/>
-          </a:xfrm>
-          <a:prstGeom prst="rect">
-            <a:avLst/>
-          </a:prstGeom>
-          <a:solidFill>
-            <a:srgbClr val="D6EEF8"/>
-          </a:solidFill>
-          <a:ln w="6350">
-            <a:solidFill>
-              <a:srgbClr val="D6EEF8"/>
-            </a:solidFill>
-          </a:ln>
-          <a:effectLst/>
-        </p:spPr>
-        <p:style>
-          <a:lnRef idx="1">
-            <a:schemeClr val="accent1"/>
-          </a:lnRef>
-          <a:fillRef idx="3">
-            <a:schemeClr val="accent1"/>
-          </a:fillRef>
-          <a:effectRef idx="2">
-            <a:schemeClr val="accent1"/>
-          </a:effectRef>
-          <a:fontRef idx="minor">
-            <a:schemeClr val="lt1"/>
-          </a:fontRef>
-        </p:style>
-        <p:txBody>
-          <a:bodyPr rtlCol="0" anchor="ctr"/>
-          <a:lstStyle/>
-          <a:p>
-            <a:pPr algn="ctr"/>
-          </a:p>
-        </p:txBody>
-      </p:sp>
-      <p:sp>
-        <p:nvSpPr>
-          <p:cNvPr id="17" name="TextBox 16"/>
-          <p:cNvSpPr txBox="1"/>
-          <p:nvPr/>
-        </p:nvSpPr>
-        <p:spPr>
-          <a:xfrm>
-            <a:off x="777240" y="4206240"/>
-            <a:ext cx="5029200" cy="365760"/>
-          </a:xfrm>
-          <a:prstGeom prst="rect">
-            <a:avLst/>
-          </a:prstGeom>
-          <a:noFill/>
-        </p:spPr>
-        <p:txBody>
-          <a:bodyPr wrap="square" lIns="0" rIns="0" tIns="0" bIns="0" anchor="t">
-            <a:spAutoFit/>
-          </a:bodyPr>
-          <a:lstStyle/>
-          <a:p>
-            <a:pPr>
-              <a:spcAft>
-                <a:spcPts val="400"/>
-              </a:spcAft>
-            </a:pPr>
-            <a:r>
-              <a:rPr sz="1500" b="1">
-                <a:solidFill>
-                  <a:srgbClr val="1F2937"/>
-                </a:solidFill>
-                <a:latin typeface="Arial"/>
-              </a:rPr>
-              <a:t>Монте-Карло</a:t>
-            </a:r>
-          </a:p>
-        </p:txBody>
-      </p:sp>
-      <p:sp>
-        <p:nvSpPr>
-          <p:cNvPr id="18" name="TextBox 17"/>
-          <p:cNvSpPr txBox="1"/>
-          <p:nvPr/>
-        </p:nvSpPr>
-        <p:spPr>
-          <a:xfrm>
-            <a:off x="777240" y="4590288"/>
-            <a:ext cx="5029200" cy="548640"/>
-          </a:xfrm>
-          <a:prstGeom prst="rect">
-            <a:avLst/>
-          </a:prstGeom>
-          <a:noFill/>
-        </p:spPr>
-        <p:txBody>
-          <a:bodyPr wrap="square" lIns="0" rIns="0" tIns="0" bIns="0" anchor="t">
-            <a:spAutoFit/>
-          </a:bodyPr>
-          <a:lstStyle/>
-          <a:p>
-            <a:pPr>
-              <a:spcAft>
-                <a:spcPts val="400"/>
-              </a:spcAft>
-            </a:pPr>
-            <a:r>
-              <a:rPr sz="1300" b="0">
-                <a:solidFill>
-                  <a:srgbClr val="1F2937"/>
-                </a:solidFill>
-                <a:latin typeface="Arial"/>
-              </a:rPr>
-              <a:t>ELBO в VAE, награда в RL, байесовские апостериорные</a:t>
-            </a:r>
-          </a:p>
-        </p:txBody>
-      </p:sp>
-      <p:sp>
-        <p:nvSpPr>
-          <p:cNvPr id="19" name="Rectangle 18"/>
-          <p:cNvSpPr/>
-          <p:nvPr/>
-        </p:nvSpPr>
-        <p:spPr>
-          <a:xfrm>
-            <a:off x="6153912" y="4023360"/>
-            <a:ext cx="5486400" cy="1234440"/>
-          </a:xfrm>
-          <a:prstGeom prst="rect">
-            <a:avLst/>
-          </a:prstGeom>
-          <a:solidFill>
-            <a:srgbClr val="F5F7FA"/>
-          </a:solidFill>
-          <a:ln w="6350">
-            <a:solidFill>
-              <a:srgbClr val="D1D5DB"/>
-            </a:solidFill>
-          </a:ln>
-          <a:effectLst/>
-        </p:spPr>
-        <p:style>
-          <a:lnRef idx="1">
-            <a:schemeClr val="accent1"/>
-          </a:lnRef>
-          <a:fillRef idx="3">
-            <a:schemeClr val="accent1"/>
-          </a:fillRef>
-          <a:effectRef idx="2">
-            <a:schemeClr val="accent1"/>
-          </a:effectRef>
-          <a:fontRef idx="minor">
-            <a:schemeClr val="lt1"/>
-          </a:fontRef>
-        </p:style>
-        <p:txBody>
-          <a:bodyPr rtlCol="0" anchor="ctr"/>
-          <a:lstStyle/>
-          <a:p>
-            <a:pPr algn="ctr"/>
-          </a:p>
-        </p:txBody>
-      </p:sp>
-      <p:sp>
-        <p:nvSpPr>
-          <p:cNvPr id="20" name="TextBox 19"/>
-          <p:cNvSpPr txBox="1"/>
-          <p:nvPr/>
-        </p:nvSpPr>
-        <p:spPr>
-          <a:xfrm>
-            <a:off x="6382512" y="4206240"/>
-            <a:ext cx="5029200" cy="365760"/>
-          </a:xfrm>
-          <a:prstGeom prst="rect">
-            <a:avLst/>
-          </a:prstGeom>
-          <a:noFill/>
-        </p:spPr>
-        <p:txBody>
-          <a:bodyPr wrap="square" lIns="0" rIns="0" tIns="0" bIns="0" anchor="t">
-            <a:spAutoFit/>
-          </a:bodyPr>
-          <a:lstStyle/>
-          <a:p>
-            <a:pPr>
-              <a:spcAft>
-                <a:spcPts val="400"/>
-              </a:spcAft>
-            </a:pPr>
-            <a:r>
-              <a:rPr sz="1500" b="1">
-                <a:solidFill>
-                  <a:srgbClr val="1F2937"/>
-                </a:solidFill>
-                <a:latin typeface="Arial"/>
-              </a:rPr>
-              <a:t>Инициализация весов</a:t>
-            </a:r>
-          </a:p>
-        </p:txBody>
-      </p:sp>
-      <p:sp>
-        <p:nvSpPr>
-          <p:cNvPr id="21" name="TextBox 20"/>
-          <p:cNvSpPr txBox="1"/>
-          <p:nvPr/>
-        </p:nvSpPr>
-        <p:spPr>
-          <a:xfrm>
-            <a:off x="6382512" y="4590288"/>
-            <a:ext cx="5029200" cy="548640"/>
-          </a:xfrm>
-          <a:prstGeom prst="rect">
-            <a:avLst/>
-          </a:prstGeom>
-          <a:noFill/>
-        </p:spPr>
-        <p:txBody>
-          <a:bodyPr wrap="square" lIns="0" rIns="0" tIns="0" bIns="0" anchor="t">
-            <a:spAutoFit/>
-          </a:bodyPr>
-          <a:lstStyle/>
-          <a:p>
-            <a:pPr>
-              <a:spcAft>
-                <a:spcPts val="400"/>
-              </a:spcAft>
-            </a:pPr>
-            <a:r>
-              <a:rPr sz="1300" b="0">
-                <a:solidFill>
-                  <a:srgbClr val="6B7280"/>
-                </a:solidFill>
-                <a:latin typeface="Arial"/>
-              </a:rPr>
-              <a:t>предактивация Σ wᵢxᵢ почти нормальна → схемы Ксавье и Хе</a:t>
+              <a:t>Временные ряды, сессии пользователя, ученики одного класса: s/√n недооценивает погрешность.</a:t>
             </a:r>
           </a:p>
         </p:txBody>
@@ -15221,7 +15002,7 @@
                 </a:solidFill>
                 <a:latin typeface="Arial"/>
               </a:rPr>
-              <a:t>Сквозной пример: какая модель лучше?</a:t>
+              <a:t>Тяжёлые хвосты</a:t>
             </a:r>
           </a:p>
         </p:txBody>
@@ -15265,45 +15046,30 @@
           </a:p>
         </p:txBody>
       </p:sp>
-      <p:sp>
-        <p:nvSpPr>
-          <p:cNvPr id="4" name="TextBox 3"/>
-          <p:cNvSpPr txBox="1"/>
-          <p:nvPr/>
-        </p:nvSpPr>
-        <p:spPr>
-          <a:xfrm>
-            <a:off x="548640" y="1280160"/>
-            <a:ext cx="11094415" cy="457200"/>
-          </a:xfrm>
-          <a:prstGeom prst="rect">
-            <a:avLst/>
-          </a:prstGeom>
-          <a:noFill/>
-        </p:spPr>
-        <p:txBody>
-          <a:bodyPr wrap="square" lIns="0" rIns="0" tIns="0" bIns="0" anchor="t">
-            <a:spAutoFit/>
-          </a:bodyPr>
-          <a:lstStyle/>
-          <a:p>
-            <a:pPr>
-              <a:spcAft>
-                <a:spcPts val="400"/>
-              </a:spcAft>
-            </a:pPr>
-            <a:r>
-              <a:rPr sz="1700" b="1">
-                <a:solidFill>
-                  <a:srgbClr val="1F2937"/>
-                </a:solidFill>
-                <a:latin typeface="Arial"/>
-              </a:rPr>
-              <a:t>Тест из 2 000 объектов: модель A — точность 91,2 %, модель B — 90,6 %.</a:t>
-            </a:r>
-          </a:p>
-        </p:txBody>
-      </p:sp>
+      <p:pic>
+        <p:nvPicPr>
+          <p:cNvPr id="4" name="Picture 3" descr="05-heavy-tails.png"/>
+          <p:cNvPicPr>
+            <a:picLocks noChangeAspect="1"/>
+          </p:cNvPicPr>
+          <p:nvPr/>
+        </p:nvPicPr>
+        <p:blipFill>
+          <a:blip r:embed="rId2"/>
+          <a:stretch>
+            <a:fillRect/>
+          </a:stretch>
+        </p:blipFill>
+        <p:spPr>
+          <a:xfrm>
+            <a:off x="548640" y="1188720"/>
+            <a:ext cx="6949440" cy="3134061"/>
+          </a:xfrm>
+          <a:prstGeom prst="rect">
+            <a:avLst/>
+          </a:prstGeom>
+        </p:spPr>
+      </p:pic>
       <p:sp>
         <p:nvSpPr>
           <p:cNvPr id="5" name="Rectangle 4"/>
@@ -15312,8 +15078,256 @@
         </p:nvSpPr>
         <p:spPr>
           <a:xfrm>
-            <a:off x="548640" y="1920240"/>
-            <a:ext cx="3566160" cy="2286000"/>
+            <a:off x="7726679" y="1280160"/>
+            <a:ext cx="3913632" cy="1600200"/>
+          </a:xfrm>
+          <a:prstGeom prst="rect">
+            <a:avLst/>
+          </a:prstGeom>
+          <a:solidFill>
+            <a:srgbClr val="F5F7FA"/>
+          </a:solidFill>
+          <a:ln w="6350">
+            <a:solidFill>
+              <a:srgbClr val="D1D5DB"/>
+            </a:solidFill>
+          </a:ln>
+          <a:effectLst/>
+        </p:spPr>
+        <p:style>
+          <a:lnRef idx="1">
+            <a:schemeClr val="accent1"/>
+          </a:lnRef>
+          <a:fillRef idx="3">
+            <a:schemeClr val="accent1"/>
+          </a:fillRef>
+          <a:effectRef idx="2">
+            <a:schemeClr val="accent1"/>
+          </a:effectRef>
+          <a:fontRef idx="minor">
+            <a:schemeClr val="lt1"/>
+          </a:fontRef>
+        </p:style>
+        <p:txBody>
+          <a:bodyPr rtlCol="0" anchor="ctr"/>
+          <a:lstStyle/>
+          <a:p>
+            <a:pPr algn="ctr"/>
+          </a:p>
+        </p:txBody>
+      </p:sp>
+      <p:sp>
+        <p:nvSpPr>
+          <p:cNvPr id="6" name="TextBox 5"/>
+          <p:cNvSpPr txBox="1"/>
+          <p:nvPr/>
+        </p:nvSpPr>
+        <p:spPr>
+          <a:xfrm>
+            <a:off x="7955279" y="1463039"/>
+            <a:ext cx="3456432" cy="365760"/>
+          </a:xfrm>
+          <a:prstGeom prst="rect">
+            <a:avLst/>
+          </a:prstGeom>
+          <a:noFill/>
+        </p:spPr>
+        <p:txBody>
+          <a:bodyPr wrap="square" lIns="0" rIns="0" tIns="0" bIns="0" anchor="t">
+            <a:spAutoFit/>
+          </a:bodyPr>
+          <a:lstStyle/>
+          <a:p>
+            <a:pPr>
+              <a:spcAft>
+                <a:spcPts val="400"/>
+              </a:spcAft>
+            </a:pPr>
+            <a:r>
+              <a:rPr sz="1500" b="1">
+                <a:solidFill>
+                  <a:srgbClr val="1F2937"/>
+                </a:solidFill>
+                <a:latin typeface="Arial"/>
+              </a:rPr>
+              <a:t>EX = ∞ (Коши)</a:t>
+            </a:r>
+          </a:p>
+        </p:txBody>
+      </p:sp>
+      <p:sp>
+        <p:nvSpPr>
+          <p:cNvPr id="7" name="TextBox 6"/>
+          <p:cNvSpPr txBox="1"/>
+          <p:nvPr/>
+        </p:nvSpPr>
+        <p:spPr>
+          <a:xfrm>
+            <a:off x="7955279" y="1847088"/>
+            <a:ext cx="3456432" cy="914400"/>
+          </a:xfrm>
+          <a:prstGeom prst="rect">
+            <a:avLst/>
+          </a:prstGeom>
+          <a:noFill/>
+        </p:spPr>
+        <p:txBody>
+          <a:bodyPr wrap="square" lIns="0" rIns="0" tIns="0" bIns="0" anchor="t">
+            <a:spAutoFit/>
+          </a:bodyPr>
+          <a:lstStyle/>
+          <a:p>
+            <a:pPr>
+              <a:spcAft>
+                <a:spcPts val="400"/>
+              </a:spcAft>
+            </a:pPr>
+            <a:r>
+              <a:rPr sz="1300" b="0">
+                <a:solidFill>
+                  <a:srgbClr val="6B7280"/>
+                </a:solidFill>
+                <a:latin typeface="Arial"/>
+              </a:rPr>
+              <a:t>среднее не сходится вообще</a:t>
+            </a:r>
+          </a:p>
+        </p:txBody>
+      </p:sp>
+      <p:sp>
+        <p:nvSpPr>
+          <p:cNvPr id="8" name="Rectangle 7"/>
+          <p:cNvSpPr/>
+          <p:nvPr/>
+        </p:nvSpPr>
+        <p:spPr>
+          <a:xfrm>
+            <a:off x="7726679" y="3017520"/>
+            <a:ext cx="3913632" cy="1920240"/>
+          </a:xfrm>
+          <a:prstGeom prst="rect">
+            <a:avLst/>
+          </a:prstGeom>
+          <a:solidFill>
+            <a:srgbClr val="FDE9D3"/>
+          </a:solidFill>
+          <a:ln w="6350">
+            <a:solidFill>
+              <a:srgbClr val="FDE9D3"/>
+            </a:solidFill>
+          </a:ln>
+          <a:effectLst/>
+        </p:spPr>
+        <p:style>
+          <a:lnRef idx="1">
+            <a:schemeClr val="accent1"/>
+          </a:lnRef>
+          <a:fillRef idx="3">
+            <a:schemeClr val="accent1"/>
+          </a:fillRef>
+          <a:effectRef idx="2">
+            <a:schemeClr val="accent1"/>
+          </a:effectRef>
+          <a:fontRef idx="minor">
+            <a:schemeClr val="lt1"/>
+          </a:fontRef>
+        </p:style>
+        <p:txBody>
+          <a:bodyPr rtlCol="0" anchor="ctr"/>
+          <a:lstStyle/>
+          <a:p>
+            <a:pPr algn="ctr"/>
+          </a:p>
+        </p:txBody>
+      </p:sp>
+      <p:sp>
+        <p:nvSpPr>
+          <p:cNvPr id="9" name="TextBox 8"/>
+          <p:cNvSpPr txBox="1"/>
+          <p:nvPr/>
+        </p:nvSpPr>
+        <p:spPr>
+          <a:xfrm>
+            <a:off x="7955279" y="3200400"/>
+            <a:ext cx="3456432" cy="365760"/>
+          </a:xfrm>
+          <a:prstGeom prst="rect">
+            <a:avLst/>
+          </a:prstGeom>
+          <a:noFill/>
+        </p:spPr>
+        <p:txBody>
+          <a:bodyPr wrap="square" lIns="0" rIns="0" tIns="0" bIns="0" anchor="t">
+            <a:spAutoFit/>
+          </a:bodyPr>
+          <a:lstStyle/>
+          <a:p>
+            <a:pPr>
+              <a:spcAft>
+                <a:spcPts val="400"/>
+              </a:spcAft>
+            </a:pPr>
+            <a:r>
+              <a:rPr sz="1500" b="1">
+                <a:solidFill>
+                  <a:srgbClr val="1F2937"/>
+                </a:solidFill>
+                <a:latin typeface="Arial"/>
+              </a:rPr>
+              <a:t>EX &lt; ∞, DX = ∞ (Парето α ≤ 2)</a:t>
+            </a:r>
+          </a:p>
+        </p:txBody>
+      </p:sp>
+      <p:sp>
+        <p:nvSpPr>
+          <p:cNvPr id="10" name="TextBox 9"/>
+          <p:cNvSpPr txBox="1"/>
+          <p:nvPr/>
+        </p:nvSpPr>
+        <p:spPr>
+          <a:xfrm>
+            <a:off x="7955279" y="3584448"/>
+            <a:ext cx="3456432" cy="1234440"/>
+          </a:xfrm>
+          <a:prstGeom prst="rect">
+            <a:avLst/>
+          </a:prstGeom>
+          <a:noFill/>
+        </p:spPr>
+        <p:txBody>
+          <a:bodyPr wrap="square" lIns="0" rIns="0" tIns="0" bIns="0" anchor="t">
+            <a:spAutoFit/>
+          </a:bodyPr>
+          <a:lstStyle/>
+          <a:p>
+            <a:pPr>
+              <a:spcAft>
+                <a:spcPts val="400"/>
+              </a:spcAft>
+            </a:pPr>
+            <a:r>
+              <a:rPr sz="1300" b="0">
+                <a:solidFill>
+                  <a:srgbClr val="6B7280"/>
+                </a:solidFill>
+                <a:latin typeface="Arial"/>
+              </a:rPr>
+              <a:t>ЗБЧ есть, но медленный; ЦПТ нет — средние остаются скошенными</a:t>
+            </a:r>
+          </a:p>
+        </p:txBody>
+      </p:sp>
+      <p:sp>
+        <p:nvSpPr>
+          <p:cNvPr id="11" name="Rectangle 10"/>
+          <p:cNvSpPr/>
+          <p:nvPr/>
+        </p:nvSpPr>
+        <p:spPr>
+          <a:xfrm>
+            <a:off x="548640" y="5257800"/>
+            <a:ext cx="11094415" cy="502920"/>
           </a:xfrm>
           <a:prstGeom prst="rect">
             <a:avLst/>
@@ -15352,22 +15366,22 @@
       </p:sp>
       <p:sp>
         <p:nvSpPr>
-          <p:cNvPr id="6" name="TextBox 5"/>
-          <p:cNvSpPr txBox="1"/>
-          <p:nvPr/>
-        </p:nvSpPr>
-        <p:spPr>
-          <a:xfrm>
-            <a:off x="777240" y="2103120"/>
-            <a:ext cx="3108960" cy="365760"/>
-          </a:xfrm>
-          <a:prstGeom prst="rect">
-            <a:avLst/>
-          </a:prstGeom>
-          <a:noFill/>
-        </p:spPr>
-        <p:txBody>
-          <a:bodyPr wrap="square" lIns="0" rIns="0" tIns="0" bIns="0" anchor="t">
+          <p:cNvPr id="12" name="TextBox 11"/>
+          <p:cNvSpPr txBox="1"/>
+          <p:nvPr/>
+        </p:nvSpPr>
+        <p:spPr>
+          <a:xfrm>
+            <a:off x="777240" y="5257800"/>
+            <a:ext cx="10637215" cy="502920"/>
+          </a:xfrm>
+          <a:prstGeom prst="rect">
+            <a:avLst/>
+          </a:prstGeom>
+          <a:noFill/>
+        </p:spPr>
+        <p:txBody>
+          <a:bodyPr wrap="square" lIns="0" rIns="0" tIns="0" bIns="0" anchor="ctr">
             <a:spAutoFit/>
           </a:bodyPr>
           <a:lstStyle/>
@@ -15384,411 +15398,7 @@
                 </a:solidFill>
                 <a:latin typeface="Arial"/>
               </a:rPr>
-              <a:t>SE точности</a:t>
-            </a:r>
-          </a:p>
-        </p:txBody>
-      </p:sp>
-      <p:sp>
-        <p:nvSpPr>
-          <p:cNvPr id="7" name="TextBox 6"/>
-          <p:cNvSpPr txBox="1"/>
-          <p:nvPr/>
-        </p:nvSpPr>
-        <p:spPr>
-          <a:xfrm>
-            <a:off x="777240" y="2487168"/>
-            <a:ext cx="3108960" cy="1600200"/>
-          </a:xfrm>
-          <a:prstGeom prst="rect">
-            <a:avLst/>
-          </a:prstGeom>
-          <a:noFill/>
-        </p:spPr>
-        <p:txBody>
-          <a:bodyPr wrap="square" lIns="0" rIns="0" tIns="0" bIns="0" anchor="t">
-            <a:spAutoFit/>
-          </a:bodyPr>
-          <a:lstStyle/>
-          <a:p>
-            <a:pPr>
-              <a:spcAft>
-                <a:spcPts val="400"/>
-              </a:spcAft>
-            </a:pPr>
-            <a:r>
-              <a:rPr sz="1400" b="0">
-                <a:solidFill>
-                  <a:srgbClr val="1F2937"/>
-                </a:solidFill>
-                <a:latin typeface="Arial"/>
-              </a:rPr>
-              <a:t>√(0,91·0,09/2000) ≈ 0,64 п. п.</a:t>
-            </a:r>
-          </a:p>
-          <a:p>
-            <a:pPr>
-              <a:spcAft>
-                <a:spcPts val="400"/>
-              </a:spcAft>
-            </a:pPr>
-            <a:r>
-              <a:rPr sz="1400" b="0">
-                <a:solidFill>
-                  <a:srgbClr val="1F2937"/>
-                </a:solidFill>
-                <a:latin typeface="Arial"/>
-              </a:rPr>
-              <a:t/>
-            </a:r>
-          </a:p>
-          <a:p>
-            <a:pPr>
-              <a:spcAft>
-                <a:spcPts val="400"/>
-              </a:spcAft>
-            </a:pPr>
-            <a:r>
-              <a:rPr sz="1400" b="0">
-                <a:solidFill>
-                  <a:srgbClr val="1F2937"/>
-                </a:solidFill>
-                <a:latin typeface="Arial"/>
-              </a:rPr>
-              <a:t>Интервал A: 91,2 ± 1,25 %</a:t>
-            </a:r>
-          </a:p>
-        </p:txBody>
-      </p:sp>
-      <p:sp>
-        <p:nvSpPr>
-          <p:cNvPr id="8" name="Rectangle 7"/>
-          <p:cNvSpPr/>
-          <p:nvPr/>
-        </p:nvSpPr>
-        <p:spPr>
-          <a:xfrm>
-            <a:off x="4297679" y="1920240"/>
-            <a:ext cx="3566160" cy="2286000"/>
-          </a:xfrm>
-          <a:prstGeom prst="rect">
-            <a:avLst/>
-          </a:prstGeom>
-          <a:solidFill>
-            <a:srgbClr val="FDE9D3"/>
-          </a:solidFill>
-          <a:ln w="6350">
-            <a:solidFill>
-              <a:srgbClr val="FDE9D3"/>
-            </a:solidFill>
-          </a:ln>
-          <a:effectLst/>
-        </p:spPr>
-        <p:style>
-          <a:lnRef idx="1">
-            <a:schemeClr val="accent1"/>
-          </a:lnRef>
-          <a:fillRef idx="3">
-            <a:schemeClr val="accent1"/>
-          </a:fillRef>
-          <a:effectRef idx="2">
-            <a:schemeClr val="accent1"/>
-          </a:effectRef>
-          <a:fontRef idx="minor">
-            <a:schemeClr val="lt1"/>
-          </a:fontRef>
-        </p:style>
-        <p:txBody>
-          <a:bodyPr rtlCol="0" anchor="ctr"/>
-          <a:lstStyle/>
-          <a:p>
-            <a:pPr algn="ctr"/>
-          </a:p>
-        </p:txBody>
-      </p:sp>
-      <p:sp>
-        <p:nvSpPr>
-          <p:cNvPr id="9" name="TextBox 8"/>
-          <p:cNvSpPr txBox="1"/>
-          <p:nvPr/>
-        </p:nvSpPr>
-        <p:spPr>
-          <a:xfrm>
-            <a:off x="4526279" y="2103120"/>
-            <a:ext cx="3108960" cy="365760"/>
-          </a:xfrm>
-          <a:prstGeom prst="rect">
-            <a:avLst/>
-          </a:prstGeom>
-          <a:noFill/>
-        </p:spPr>
-        <p:txBody>
-          <a:bodyPr wrap="square" lIns="0" rIns="0" tIns="0" bIns="0" anchor="t">
-            <a:spAutoFit/>
-          </a:bodyPr>
-          <a:lstStyle/>
-          <a:p>
-            <a:pPr>
-              <a:spcAft>
-                <a:spcPts val="400"/>
-              </a:spcAft>
-            </a:pPr>
-            <a:r>
-              <a:rPr sz="1500" b="1">
-                <a:solidFill>
-                  <a:srgbClr val="1F2937"/>
-                </a:solidFill>
-                <a:latin typeface="Arial"/>
-              </a:rPr>
-              <a:t>Разница 0,6 п. п.</a:t>
-            </a:r>
-          </a:p>
-        </p:txBody>
-      </p:sp>
-      <p:sp>
-        <p:nvSpPr>
-          <p:cNvPr id="10" name="TextBox 9"/>
-          <p:cNvSpPr txBox="1"/>
-          <p:nvPr/>
-        </p:nvSpPr>
-        <p:spPr>
-          <a:xfrm>
-            <a:off x="4526279" y="2487168"/>
-            <a:ext cx="3108960" cy="1600200"/>
-          </a:xfrm>
-          <a:prstGeom prst="rect">
-            <a:avLst/>
-          </a:prstGeom>
-          <a:noFill/>
-        </p:spPr>
-        <p:txBody>
-          <a:bodyPr wrap="square" lIns="0" rIns="0" tIns="0" bIns="0" anchor="t">
-            <a:spAutoFit/>
-          </a:bodyPr>
-          <a:lstStyle/>
-          <a:p>
-            <a:pPr>
-              <a:spcAft>
-                <a:spcPts val="400"/>
-              </a:spcAft>
-            </a:pPr>
-            <a:r>
-              <a:rPr sz="1400" b="0">
-                <a:solidFill>
-                  <a:srgbClr val="6B7280"/>
-                </a:solidFill>
-                <a:latin typeface="Arial"/>
-              </a:rPr>
-              <a:t>меньше одной SE: по такому тесту сказать, что A лучше, нельзя</a:t>
-            </a:r>
-          </a:p>
-        </p:txBody>
-      </p:sp>
-      <p:sp>
-        <p:nvSpPr>
-          <p:cNvPr id="11" name="Rectangle 10"/>
-          <p:cNvSpPr/>
-          <p:nvPr/>
-        </p:nvSpPr>
-        <p:spPr>
-          <a:xfrm>
-            <a:off x="8046719" y="1920240"/>
-            <a:ext cx="3593592" cy="2286000"/>
-          </a:xfrm>
-          <a:prstGeom prst="rect">
-            <a:avLst/>
-          </a:prstGeom>
-          <a:solidFill>
-            <a:srgbClr val="F5F7FA"/>
-          </a:solidFill>
-          <a:ln w="6350">
-            <a:solidFill>
-              <a:srgbClr val="D1D5DB"/>
-            </a:solidFill>
-          </a:ln>
-          <a:effectLst/>
-        </p:spPr>
-        <p:style>
-          <a:lnRef idx="1">
-            <a:schemeClr val="accent1"/>
-          </a:lnRef>
-          <a:fillRef idx="3">
-            <a:schemeClr val="accent1"/>
-          </a:fillRef>
-          <a:effectRef idx="2">
-            <a:schemeClr val="accent1"/>
-          </a:effectRef>
-          <a:fontRef idx="minor">
-            <a:schemeClr val="lt1"/>
-          </a:fontRef>
-        </p:style>
-        <p:txBody>
-          <a:bodyPr rtlCol="0" anchor="ctr"/>
-          <a:lstStyle/>
-          <a:p>
-            <a:pPr algn="ctr"/>
-          </a:p>
-        </p:txBody>
-      </p:sp>
-      <p:sp>
-        <p:nvSpPr>
-          <p:cNvPr id="12" name="TextBox 11"/>
-          <p:cNvSpPr txBox="1"/>
-          <p:nvPr/>
-        </p:nvSpPr>
-        <p:spPr>
-          <a:xfrm>
-            <a:off x="8275319" y="2103120"/>
-            <a:ext cx="3136392" cy="365760"/>
-          </a:xfrm>
-          <a:prstGeom prst="rect">
-            <a:avLst/>
-          </a:prstGeom>
-          <a:noFill/>
-        </p:spPr>
-        <p:txBody>
-          <a:bodyPr wrap="square" lIns="0" rIns="0" tIns="0" bIns="0" anchor="t">
-            <a:spAutoFit/>
-          </a:bodyPr>
-          <a:lstStyle/>
-          <a:p>
-            <a:pPr>
-              <a:spcAft>
-                <a:spcPts val="400"/>
-              </a:spcAft>
-            </a:pPr>
-            <a:r>
-              <a:rPr sz="1500" b="1">
-                <a:solidFill>
-                  <a:srgbClr val="1F2937"/>
-                </a:solidFill>
-                <a:latin typeface="Arial"/>
-              </a:rPr>
-              <a:t>Что делать</a:t>
-            </a:r>
-          </a:p>
-        </p:txBody>
-      </p:sp>
-      <p:sp>
-        <p:nvSpPr>
-          <p:cNvPr id="13" name="TextBox 12"/>
-          <p:cNvSpPr txBox="1"/>
-          <p:nvPr/>
-        </p:nvSpPr>
-        <p:spPr>
-          <a:xfrm>
-            <a:off x="8275319" y="2487168"/>
-            <a:ext cx="3136392" cy="1600200"/>
-          </a:xfrm>
-          <a:prstGeom prst="rect">
-            <a:avLst/>
-          </a:prstGeom>
-          <a:noFill/>
-        </p:spPr>
-        <p:txBody>
-          <a:bodyPr wrap="square" lIns="0" rIns="0" tIns="0" bIns="0" anchor="t">
-            <a:spAutoFit/>
-          </a:bodyPr>
-          <a:lstStyle/>
-          <a:p>
-            <a:pPr>
-              <a:spcAft>
-                <a:spcPts val="400"/>
-              </a:spcAft>
-            </a:pPr>
-            <a:r>
-              <a:rPr sz="1400" b="0">
-                <a:solidFill>
-                  <a:srgbClr val="6B7280"/>
-                </a:solidFill>
-                <a:latin typeface="Arial"/>
-              </a:rPr>
-              <a:t>больше тестовых данных, парное сравнение на одних объектах, кросс-валидация</a:t>
-            </a:r>
-          </a:p>
-        </p:txBody>
-      </p:sp>
-      <p:sp>
-        <p:nvSpPr>
-          <p:cNvPr id="14" name="Rectangle 13"/>
-          <p:cNvSpPr/>
-          <p:nvPr/>
-        </p:nvSpPr>
-        <p:spPr>
-          <a:xfrm>
-            <a:off x="548640" y="4526280"/>
-            <a:ext cx="11094415" cy="502920"/>
-          </a:xfrm>
-          <a:prstGeom prst="rect">
-            <a:avLst/>
-          </a:prstGeom>
-          <a:solidFill>
-            <a:srgbClr val="D6EEF8"/>
-          </a:solidFill>
-          <a:ln w="6350">
-            <a:solidFill>
-              <a:srgbClr val="D6EEF8"/>
-            </a:solidFill>
-          </a:ln>
-          <a:effectLst/>
-        </p:spPr>
-        <p:style>
-          <a:lnRef idx="1">
-            <a:schemeClr val="accent1"/>
-          </a:lnRef>
-          <a:fillRef idx="3">
-            <a:schemeClr val="accent1"/>
-          </a:fillRef>
-          <a:effectRef idx="2">
-            <a:schemeClr val="accent1"/>
-          </a:effectRef>
-          <a:fontRef idx="minor">
-            <a:schemeClr val="lt1"/>
-          </a:fontRef>
-        </p:style>
-        <p:txBody>
-          <a:bodyPr rtlCol="0" anchor="ctr"/>
-          <a:lstStyle/>
-          <a:p>
-            <a:pPr algn="ctr"/>
-          </a:p>
-        </p:txBody>
-      </p:sp>
-      <p:sp>
-        <p:nvSpPr>
-          <p:cNvPr id="15" name="TextBox 14"/>
-          <p:cNvSpPr txBox="1"/>
-          <p:nvPr/>
-        </p:nvSpPr>
-        <p:spPr>
-          <a:xfrm>
-            <a:off x="777240" y="4526280"/>
-            <a:ext cx="10637215" cy="502920"/>
-          </a:xfrm>
-          <a:prstGeom prst="rect">
-            <a:avLst/>
-          </a:prstGeom>
-          <a:noFill/>
-        </p:spPr>
-        <p:txBody>
-          <a:bodyPr wrap="square" lIns="0" rIns="0" tIns="0" bIns="0" anchor="ctr">
-            <a:spAutoFit/>
-          </a:bodyPr>
-          <a:lstStyle/>
-          <a:p>
-            <a:pPr>
-              <a:spcAft>
-                <a:spcPts val="400"/>
-              </a:spcAft>
-            </a:pPr>
-            <a:r>
-              <a:rPr sz="1500" b="1">
-                <a:solidFill>
-                  <a:srgbClr val="1F2937"/>
-                </a:solidFill>
-                <a:latin typeface="Arial"/>
-              </a:rPr>
-              <a:t>Любая метрика на конечной выборке — случайная величина. Сначала SE, потом выводы.</a:t>
+              <a:t>Доходы, размеры файлов, подписчики, страховые убытки: смотрите медиану и квантили, логарифмируйте.</a:t>
             </a:r>
           </a:p>
         </p:txBody>
@@ -15833,7 +15443,7 @@
                 </a:solidFill>
                 <a:latin typeface="Arial"/>
               </a:rPr>
-              <a:t>Итоги</a:t>
+              <a:t>Не средние и смещённые выборки</a:t>
             </a:r>
           </a:p>
         </p:txBody>
@@ -15885,17 +15495,19 @@
         </p:nvSpPr>
         <p:spPr>
           <a:xfrm>
-            <a:off x="548640" y="1325880"/>
-            <a:ext cx="109728" cy="457200"/>
+            <a:off x="548640" y="1280160"/>
+            <a:ext cx="5394960" cy="2194560"/>
           </a:xfrm>
           <a:prstGeom prst="rect">
             <a:avLst/>
           </a:prstGeom>
           <a:solidFill>
-            <a:srgbClr val="3B82F6"/>
+            <a:srgbClr val="F5F7FA"/>
           </a:solidFill>
           <a:ln w="6350">
-            <a:noFill/>
+            <a:solidFill>
+              <a:srgbClr val="D1D5DB"/>
+            </a:solidFill>
           </a:ln>
           <a:effectLst/>
         </p:spPr>
@@ -15929,56 +15541,129 @@
         </p:nvSpPr>
         <p:spPr>
           <a:xfrm>
-            <a:off x="868680" y="1325880"/>
-            <a:ext cx="10728655" cy="457200"/>
-          </a:xfrm>
-          <a:prstGeom prst="rect">
-            <a:avLst/>
-          </a:prstGeom>
-          <a:noFill/>
-        </p:spPr>
-        <p:txBody>
-          <a:bodyPr wrap="square" lIns="0" rIns="0" tIns="0" bIns="0" anchor="ctr">
-            <a:spAutoFit/>
-          </a:bodyPr>
-          <a:lstStyle/>
-          <a:p>
-            <a:pPr>
-              <a:spcAft>
-                <a:spcPts val="400"/>
-              </a:spcAft>
-            </a:pPr>
-            <a:r>
-              <a:rPr sz="1500" b="0">
+            <a:off x="777240" y="1463039"/>
+            <a:ext cx="4937760" cy="365760"/>
+          </a:xfrm>
+          <a:prstGeom prst="rect">
+            <a:avLst/>
+          </a:prstGeom>
+          <a:noFill/>
+        </p:spPr>
+        <p:txBody>
+          <a:bodyPr wrap="square" lIns="0" rIns="0" tIns="0" bIns="0" anchor="t">
+            <a:spAutoFit/>
+          </a:bodyPr>
+          <a:lstStyle/>
+          <a:p>
+            <a:pPr>
+              <a:spcAft>
+                <a:spcPts val="400"/>
+              </a:spcAft>
+            </a:pPr>
+            <a:r>
+              <a:rPr sz="1500" b="1">
                 <a:solidFill>
                   <a:srgbClr val="1F2937"/>
                 </a:solidFill>
                 <a:latin typeface="Arial"/>
               </a:rPr>
-              <a:t>Статистика — случайная величина; её разброс — стандартная ошибка.</a:t>
-            </a:r>
-          </a:p>
-        </p:txBody>
-      </p:sp>
-      <p:sp>
-        <p:nvSpPr>
-          <p:cNvPr id="6" name="Rectangle 5"/>
+              <a:t>Максимум — не сумма</a:t>
+            </a:r>
+          </a:p>
+        </p:txBody>
+      </p:sp>
+      <p:sp>
+        <p:nvSpPr>
+          <p:cNvPr id="6" name="TextBox 5"/>
+          <p:cNvSpPr txBox="1"/>
+          <p:nvPr/>
+        </p:nvSpPr>
+        <p:spPr>
+          <a:xfrm>
+            <a:off x="777240" y="1847088"/>
+            <a:ext cx="4937760" cy="1508760"/>
+          </a:xfrm>
+          <a:prstGeom prst="rect">
+            <a:avLst/>
+          </a:prstGeom>
+          <a:noFill/>
+        </p:spPr>
+        <p:txBody>
+          <a:bodyPr wrap="square" lIns="0" rIns="0" tIns="0" bIns="0" anchor="t">
+            <a:spAutoFit/>
+          </a:bodyPr>
+          <a:lstStyle/>
+          <a:p>
+            <a:pPr>
+              <a:spcAft>
+                <a:spcPts val="400"/>
+              </a:spcAft>
+            </a:pPr>
+            <a:r>
+              <a:rPr sz="1400" b="0">
+                <a:solidFill>
+                  <a:srgbClr val="6B7280"/>
+                </a:solidFill>
+                <a:latin typeface="Arial"/>
+              </a:rPr>
+              <a:t>Максимум n показательных растёт как ln n и сходится к распределению Гумбеля.</a:t>
+            </a:r>
+          </a:p>
+          <a:p>
+            <a:pPr>
+              <a:spcAft>
+                <a:spcPts val="400"/>
+              </a:spcAft>
+            </a:pPr>
+            <a:r>
+              <a:rPr sz="1400" b="0">
+                <a:solidFill>
+                  <a:srgbClr val="6B7280"/>
+                </a:solidFill>
+                <a:latin typeface="Arial"/>
+              </a:rPr>
+              <a:t/>
+            </a:r>
+          </a:p>
+          <a:p>
+            <a:pPr>
+              <a:spcAft>
+                <a:spcPts val="400"/>
+              </a:spcAft>
+            </a:pPr>
+            <a:r>
+              <a:rPr sz="1400" b="0">
+                <a:solidFill>
+                  <a:srgbClr val="6B7280"/>
+                </a:solidFill>
+                <a:latin typeface="Arial"/>
+              </a:rPr>
+              <a:t>Пиковая нагрузка, «наводнение раз в 100 лет» — теория экстремальных значений.</a:t>
+            </a:r>
+          </a:p>
+        </p:txBody>
+      </p:sp>
+      <p:sp>
+        <p:nvSpPr>
+          <p:cNvPr id="7" name="Rectangle 6"/>
           <p:cNvSpPr/>
           <p:nvPr/>
         </p:nvSpPr>
         <p:spPr>
           <a:xfrm>
-            <a:off x="548640" y="2011680"/>
-            <a:ext cx="109728" cy="457200"/>
+            <a:off x="6245352" y="1280160"/>
+            <a:ext cx="5394960" cy="2194560"/>
           </a:xfrm>
           <a:prstGeom prst="rect">
             <a:avLst/>
           </a:prstGeom>
           <a:solidFill>
-            <a:srgbClr val="3B82F6"/>
+            <a:srgbClr val="FDE9D3"/>
           </a:solidFill>
           <a:ln w="6350">
-            <a:noFill/>
+            <a:solidFill>
+              <a:srgbClr val="FDE9D3"/>
+            </a:solidFill>
           </a:ln>
           <a:effectLst/>
         </p:spPr>
@@ -16006,62 +15691,103 @@
       </p:sp>
       <p:sp>
         <p:nvSpPr>
-          <p:cNvPr id="7" name="TextBox 6"/>
-          <p:cNvSpPr txBox="1"/>
-          <p:nvPr/>
-        </p:nvSpPr>
-        <p:spPr>
-          <a:xfrm>
-            <a:off x="868680" y="2011680"/>
-            <a:ext cx="10728655" cy="457200"/>
-          </a:xfrm>
-          <a:prstGeom prst="rect">
-            <a:avLst/>
-          </a:prstGeom>
-          <a:noFill/>
-        </p:spPr>
-        <p:txBody>
-          <a:bodyPr wrap="square" lIns="0" rIns="0" tIns="0" bIns="0" anchor="ctr">
-            <a:spAutoFit/>
-          </a:bodyPr>
-          <a:lstStyle/>
-          <a:p>
-            <a:pPr>
-              <a:spcAft>
-                <a:spcPts val="400"/>
-              </a:spcAft>
-            </a:pPr>
-            <a:r>
-              <a:rPr sz="1500" b="0">
+          <p:cNvPr id="8" name="TextBox 7"/>
+          <p:cNvSpPr txBox="1"/>
+          <p:nvPr/>
+        </p:nvSpPr>
+        <p:spPr>
+          <a:xfrm>
+            <a:off x="6473952" y="1463039"/>
+            <a:ext cx="4937760" cy="365760"/>
+          </a:xfrm>
+          <a:prstGeom prst="rect">
+            <a:avLst/>
+          </a:prstGeom>
+          <a:noFill/>
+        </p:spPr>
+        <p:txBody>
+          <a:bodyPr wrap="square" lIns="0" rIns="0" tIns="0" bIns="0" anchor="t">
+            <a:spAutoFit/>
+          </a:bodyPr>
+          <a:lstStyle/>
+          <a:p>
+            <a:pPr>
+              <a:spcAft>
+                <a:spcPts val="400"/>
+              </a:spcAft>
+            </a:pPr>
+            <a:r>
+              <a:rPr sz="1500" b="1">
                 <a:solidFill>
                   <a:srgbClr val="1F2937"/>
                 </a:solidFill>
                 <a:latin typeface="Arial"/>
               </a:rPr>
-              <a:t>ЗБЧ: среднее → EX, частота → вероятность; основа Монте-Карло. Отклонения разбавляются, а не компенсируются.</a:t>
-            </a:r>
-          </a:p>
-        </p:txBody>
-      </p:sp>
-      <p:sp>
-        <p:nvSpPr>
-          <p:cNvPr id="8" name="Rectangle 7"/>
+              <a:t>ЗБЧ сходится к «не тому»</a:t>
+            </a:r>
+          </a:p>
+        </p:txBody>
+      </p:sp>
+      <p:sp>
+        <p:nvSpPr>
+          <p:cNvPr id="9" name="TextBox 8"/>
+          <p:cNvSpPr txBox="1"/>
+          <p:nvPr/>
+        </p:nvSpPr>
+        <p:spPr>
+          <a:xfrm>
+            <a:off x="6473952" y="1847088"/>
+            <a:ext cx="4937760" cy="1508760"/>
+          </a:xfrm>
+          <a:prstGeom prst="rect">
+            <a:avLst/>
+          </a:prstGeom>
+          <a:noFill/>
+        </p:spPr>
+        <p:txBody>
+          <a:bodyPr wrap="square" lIns="0" rIns="0" tIns="0" bIns="0" anchor="t">
+            <a:spAutoFit/>
+          </a:bodyPr>
+          <a:lstStyle/>
+          <a:p>
+            <a:pPr>
+              <a:spcAft>
+                <a:spcPts val="400"/>
+              </a:spcAft>
+            </a:pPr>
+            <a:r>
+              <a:rPr sz="1400" b="0">
+                <a:solidFill>
+                  <a:srgbClr val="6B7280"/>
+                </a:solidFill>
+                <a:latin typeface="Arial"/>
+              </a:rPr>
+              <a:t>Если выборка смещена, большое n даёт узкий интервал вокруг неверного ответа.</a:t>
+            </a:r>
+          </a:p>
+        </p:txBody>
+      </p:sp>
+      <p:sp>
+        <p:nvSpPr>
+          <p:cNvPr id="10" name="Rectangle 9"/>
           <p:cNvSpPr/>
           <p:nvPr/>
         </p:nvSpPr>
         <p:spPr>
           <a:xfrm>
-            <a:off x="548640" y="2697480"/>
-            <a:ext cx="109728" cy="457200"/>
+            <a:off x="548640" y="3703320"/>
+            <a:ext cx="11094415" cy="1463040"/>
           </a:xfrm>
           <a:prstGeom prst="rect">
             <a:avLst/>
           </a:prstGeom>
           <a:solidFill>
-            <a:srgbClr val="3B82F6"/>
+            <a:srgbClr val="D6EEF8"/>
           </a:solidFill>
           <a:ln w="6350">
-            <a:noFill/>
+            <a:solidFill>
+              <a:srgbClr val="D6EEF8"/>
+            </a:solidFill>
           </a:ln>
           <a:effectLst/>
         </p:spPr>
@@ -16089,288 +15815,78 @@
       </p:sp>
       <p:sp>
         <p:nvSpPr>
-          <p:cNvPr id="9" name="TextBox 8"/>
-          <p:cNvSpPr txBox="1"/>
-          <p:nvPr/>
-        </p:nvSpPr>
-        <p:spPr>
-          <a:xfrm>
-            <a:off x="868680" y="2697480"/>
-            <a:ext cx="10728655" cy="457200"/>
-          </a:xfrm>
-          <a:prstGeom prst="rect">
-            <a:avLst/>
-          </a:prstGeom>
-          <a:noFill/>
-        </p:spPr>
-        <p:txBody>
-          <a:bodyPr wrap="square" lIns="0" rIns="0" tIns="0" bIns="0" anchor="ctr">
-            <a:spAutoFit/>
-          </a:bodyPr>
-          <a:lstStyle/>
-          <a:p>
-            <a:pPr>
-              <a:spcAft>
-                <a:spcPts val="400"/>
-              </a:spcAft>
-            </a:pPr>
-            <a:r>
-              <a:rPr sz="1500" b="0">
+          <p:cNvPr id="11" name="TextBox 10"/>
+          <p:cNvSpPr txBox="1"/>
+          <p:nvPr/>
+        </p:nvSpPr>
+        <p:spPr>
+          <a:xfrm>
+            <a:off x="777240" y="3886200"/>
+            <a:ext cx="10637215" cy="365760"/>
+          </a:xfrm>
+          <a:prstGeom prst="rect">
+            <a:avLst/>
+          </a:prstGeom>
+          <a:noFill/>
+        </p:spPr>
+        <p:txBody>
+          <a:bodyPr wrap="square" lIns="0" rIns="0" tIns="0" bIns="0" anchor="t">
+            <a:spAutoFit/>
+          </a:bodyPr>
+          <a:lstStyle/>
+          <a:p>
+            <a:pPr>
+              <a:spcAft>
+                <a:spcPts val="400"/>
+              </a:spcAft>
+            </a:pPr>
+            <a:r>
+              <a:rPr sz="1500" b="1">
                 <a:solidFill>
                   <a:srgbClr val="1F2937"/>
                 </a:solidFill>
                 <a:latin typeface="Arial"/>
               </a:rPr>
-              <a:t>x̄, p̂, s², F̂ₙ — состоятельные оценки; SE ∝ 1/√n.</a:t>
-            </a:r>
-          </a:p>
-        </p:txBody>
-      </p:sp>
-      <p:sp>
-        <p:nvSpPr>
-          <p:cNvPr id="10" name="Rectangle 9"/>
-          <p:cNvSpPr/>
-          <p:nvPr/>
-        </p:nvSpPr>
-        <p:spPr>
-          <a:xfrm>
-            <a:off x="548640" y="3383280"/>
-            <a:ext cx="109728" cy="457200"/>
-          </a:xfrm>
-          <a:prstGeom prst="rect">
-            <a:avLst/>
-          </a:prstGeom>
-          <a:solidFill>
-            <a:srgbClr val="3B82F6"/>
-          </a:solidFill>
-          <a:ln w="6350">
-            <a:noFill/>
-          </a:ln>
-          <a:effectLst/>
-        </p:spPr>
-        <p:style>
-          <a:lnRef idx="1">
-            <a:schemeClr val="accent1"/>
-          </a:lnRef>
-          <a:fillRef idx="3">
-            <a:schemeClr val="accent1"/>
-          </a:fillRef>
-          <a:effectRef idx="2">
-            <a:schemeClr val="accent1"/>
-          </a:effectRef>
-          <a:fontRef idx="minor">
-            <a:schemeClr val="lt1"/>
-          </a:fontRef>
-        </p:style>
-        <p:txBody>
-          <a:bodyPr rtlCol="0" anchor="ctr"/>
-          <a:lstStyle/>
-          <a:p>
-            <a:pPr algn="ctr"/>
-          </a:p>
-        </p:txBody>
-      </p:sp>
-      <p:sp>
-        <p:nvSpPr>
-          <p:cNvPr id="11" name="TextBox 10"/>
-          <p:cNvSpPr txBox="1"/>
-          <p:nvPr/>
-        </p:nvSpPr>
-        <p:spPr>
-          <a:xfrm>
-            <a:off x="868680" y="3383280"/>
-            <a:ext cx="10728655" cy="457200"/>
-          </a:xfrm>
-          <a:prstGeom prst="rect">
-            <a:avLst/>
-          </a:prstGeom>
-          <a:noFill/>
-        </p:spPr>
-        <p:txBody>
-          <a:bodyPr wrap="square" lIns="0" rIns="0" tIns="0" bIns="0" anchor="ctr">
-            <a:spAutoFit/>
-          </a:bodyPr>
-          <a:lstStyle/>
-          <a:p>
-            <a:pPr>
-              <a:spcAft>
-                <a:spcPts val="400"/>
-              </a:spcAft>
-            </a:pPr>
-            <a:r>
-              <a:rPr sz="1500" b="0">
+              <a:t>Literary Digest, 1936</a:t>
+            </a:r>
+          </a:p>
+        </p:txBody>
+      </p:sp>
+      <p:sp>
+        <p:nvSpPr>
+          <p:cNvPr id="12" name="TextBox 11"/>
+          <p:cNvSpPr txBox="1"/>
+          <p:nvPr/>
+        </p:nvSpPr>
+        <p:spPr>
+          <a:xfrm>
+            <a:off x="777240" y="4270248"/>
+            <a:ext cx="10637215" cy="777240"/>
+          </a:xfrm>
+          <a:prstGeom prst="rect">
+            <a:avLst/>
+          </a:prstGeom>
+          <a:noFill/>
+        </p:spPr>
+        <p:txBody>
+          <a:bodyPr wrap="square" lIns="0" rIns="0" tIns="0" bIns="0" anchor="t">
+            <a:spAutoFit/>
+          </a:bodyPr>
+          <a:lstStyle/>
+          <a:p>
+            <a:pPr>
+              <a:spcAft>
+                <a:spcPts val="400"/>
+              </a:spcAft>
+            </a:pPr>
+            <a:r>
+              <a:rPr sz="1400" b="0">
                 <a:solidFill>
                   <a:srgbClr val="1F2937"/>
                 </a:solidFill>
                 <a:latin typeface="Arial"/>
               </a:rPr>
-              <a:t>ЦПТ: сумма многих независимых слагаемых ≈ N(nμ, nσ²); Муавр — Лаплас с поправкой ±0,5.</a:t>
-            </a:r>
-          </a:p>
-        </p:txBody>
-      </p:sp>
-      <p:sp>
-        <p:nvSpPr>
-          <p:cNvPr id="12" name="Rectangle 11"/>
-          <p:cNvSpPr/>
-          <p:nvPr/>
-        </p:nvSpPr>
-        <p:spPr>
-          <a:xfrm>
-            <a:off x="548640" y="4069080"/>
-            <a:ext cx="109728" cy="457200"/>
-          </a:xfrm>
-          <a:prstGeom prst="rect">
-            <a:avLst/>
-          </a:prstGeom>
-          <a:solidFill>
-            <a:srgbClr val="3B82F6"/>
-          </a:solidFill>
-          <a:ln w="6350">
-            <a:noFill/>
-          </a:ln>
-          <a:effectLst/>
-        </p:spPr>
-        <p:style>
-          <a:lnRef idx="1">
-            <a:schemeClr val="accent1"/>
-          </a:lnRef>
-          <a:fillRef idx="3">
-            <a:schemeClr val="accent1"/>
-          </a:fillRef>
-          <a:effectRef idx="2">
-            <a:schemeClr val="accent1"/>
-          </a:effectRef>
-          <a:fontRef idx="minor">
-            <a:schemeClr val="lt1"/>
-          </a:fontRef>
-        </p:style>
-        <p:txBody>
-          <a:bodyPr rtlCol="0" anchor="ctr"/>
-          <a:lstStyle/>
-          <a:p>
-            <a:pPr algn="ctr"/>
-          </a:p>
-        </p:txBody>
-      </p:sp>
-      <p:sp>
-        <p:nvSpPr>
-          <p:cNvPr id="13" name="TextBox 12"/>
-          <p:cNvSpPr txBox="1"/>
-          <p:nvPr/>
-        </p:nvSpPr>
-        <p:spPr>
-          <a:xfrm>
-            <a:off x="868680" y="4069080"/>
-            <a:ext cx="10728655" cy="457200"/>
-          </a:xfrm>
-          <a:prstGeom prst="rect">
-            <a:avLst/>
-          </a:prstGeom>
-          <a:noFill/>
-        </p:spPr>
-        <p:txBody>
-          <a:bodyPr wrap="square" lIns="0" rIns="0" tIns="0" bIns="0" anchor="ctr">
-            <a:spAutoFit/>
-          </a:bodyPr>
-          <a:lstStyle/>
-          <a:p>
-            <a:pPr>
-              <a:spcAft>
-                <a:spcPts val="400"/>
-              </a:spcAft>
-            </a:pPr>
-            <a:r>
-              <a:rPr sz="1500" b="0">
-                <a:solidFill>
-                  <a:srgbClr val="1F2937"/>
-                </a:solidFill>
-                <a:latin typeface="Arial"/>
-              </a:rPr>
-              <a:t>Интервал x̄ ± 1,96·s/√n; объём n ≥ (zσ/ε)²; ±3 п. п. — около 1 000 человек.</a:t>
-            </a:r>
-          </a:p>
-        </p:txBody>
-      </p:sp>
-      <p:sp>
-        <p:nvSpPr>
-          <p:cNvPr id="14" name="Rectangle 13"/>
-          <p:cNvSpPr/>
-          <p:nvPr/>
-        </p:nvSpPr>
-        <p:spPr>
-          <a:xfrm>
-            <a:off x="548640" y="4754880"/>
-            <a:ext cx="109728" cy="457200"/>
-          </a:xfrm>
-          <a:prstGeom prst="rect">
-            <a:avLst/>
-          </a:prstGeom>
-          <a:solidFill>
-            <a:srgbClr val="3B82F6"/>
-          </a:solidFill>
-          <a:ln w="6350">
-            <a:noFill/>
-          </a:ln>
-          <a:effectLst/>
-        </p:spPr>
-        <p:style>
-          <a:lnRef idx="1">
-            <a:schemeClr val="accent1"/>
-          </a:lnRef>
-          <a:fillRef idx="3">
-            <a:schemeClr val="accent1"/>
-          </a:fillRef>
-          <a:effectRef idx="2">
-            <a:schemeClr val="accent1"/>
-          </a:effectRef>
-          <a:fontRef idx="minor">
-            <a:schemeClr val="lt1"/>
-          </a:fontRef>
-        </p:style>
-        <p:txBody>
-          <a:bodyPr rtlCol="0" anchor="ctr"/>
-          <a:lstStyle/>
-          <a:p>
-            <a:pPr algn="ctr"/>
-          </a:p>
-        </p:txBody>
-      </p:sp>
-      <p:sp>
-        <p:nvSpPr>
-          <p:cNvPr id="15" name="TextBox 14"/>
-          <p:cNvSpPr txBox="1"/>
-          <p:nvPr/>
-        </p:nvSpPr>
-        <p:spPr>
-          <a:xfrm>
-            <a:off x="868680" y="4754880"/>
-            <a:ext cx="10728655" cy="457200"/>
-          </a:xfrm>
-          <a:prstGeom prst="rect">
-            <a:avLst/>
-          </a:prstGeom>
-          <a:noFill/>
-        </p:spPr>
-        <p:txBody>
-          <a:bodyPr wrap="square" lIns="0" rIns="0" tIns="0" bIns="0" anchor="ctr">
-            <a:spAutoFit/>
-          </a:bodyPr>
-          <a:lstStyle/>
-          <a:p>
-            <a:pPr>
-              <a:spcAft>
-                <a:spcPts val="400"/>
-              </a:spcAft>
-            </a:pPr>
-            <a:r>
-              <a:rPr sz="1500" b="0">
-                <a:solidFill>
-                  <a:srgbClr val="1F2937"/>
-                </a:solidFill>
-                <a:latin typeface="Arial"/>
-              </a:rPr>
-              <a:t>Малые выборки дают крайние значения; зависимость и тяжёлые хвосты ломают формулы.</a:t>
+              <a:t>2,4 млн анкет читателей: Лэндон выиграет с отрывом 14 п. п. Итог: Рузвельт +24 п. п. Гэллап по случайной выборке ~50 000 человек угадал.</a:t>
             </a:r>
           </a:p>
         </p:txBody>
@@ -16400,7 +15916,7 @@
             <a:spLocks noGrp="1"/>
           </p:cNvSpPr>
           <p:nvPr>
-            <p:ph type="title" idx="101"/>
+            <p:ph type="title" idx="100"/>
           </p:nvPr>
         </p:nvSpPr>
         <p:spPr/>
@@ -16409,13 +15925,13 @@
           <a:lstStyle/>
           <a:p>
             <a:r>
-              <a:rPr sz="2600" b="1">
+              <a:rPr sz="3600" b="1">
                 <a:solidFill>
                   <a:srgbClr val="1F2937"/>
                 </a:solidFill>
                 <a:latin typeface="Arial"/>
               </a:rPr>
-              <a:t>Литература</a:t>
+              <a:t>ЗБЧ и ЦПТ в ML</a:t>
             </a:r>
           </a:p>
         </p:txBody>
@@ -16428,8 +15944,8 @@
         </p:nvSpPr>
         <p:spPr>
           <a:xfrm>
-            <a:off x="11292840" y="6400800"/>
-            <a:ext cx="457200" cy="274320"/>
+            <a:off x="548640" y="3794760"/>
+            <a:ext cx="8229600" cy="548640"/>
           </a:xfrm>
           <a:prstGeom prst="rect">
             <a:avLst/>
@@ -16448,171 +15964,13 @@
               </a:spcAft>
             </a:pPr>
             <a:r>
-              <a:rPr sz="1000" b="0">
+              <a:rPr sz="1800" b="0">
                 <a:solidFill>
                   <a:srgbClr val="6B7280"/>
                 </a:solidFill>
                 <a:latin typeface="Arial"/>
               </a:rPr>
-              <a:t>39</a:t>
-            </a:r>
-          </a:p>
-        </p:txBody>
-      </p:sp>
-      <p:sp>
-        <p:nvSpPr>
-          <p:cNvPr id="4" name="TextBox 3"/>
-          <p:cNvSpPr txBox="1"/>
-          <p:nvPr/>
-        </p:nvSpPr>
-        <p:spPr>
-          <a:xfrm>
-            <a:off x="548640" y="1371600"/>
-            <a:ext cx="11094415" cy="3291840"/>
-          </a:xfrm>
-          <a:prstGeom prst="rect">
-            <a:avLst/>
-          </a:prstGeom>
-          <a:noFill/>
-        </p:spPr>
-        <p:txBody>
-          <a:bodyPr wrap="square" lIns="0" rIns="0" tIns="0" bIns="0" anchor="t">
-            <a:spAutoFit/>
-          </a:bodyPr>
-          <a:lstStyle/>
-          <a:p>
-            <a:pPr>
-              <a:spcAft>
-                <a:spcPts val="1000"/>
-              </a:spcAft>
-            </a:pPr>
-            <a:r>
-              <a:rPr sz="1700" b="0">
-                <a:solidFill>
-                  <a:srgbClr val="1F2937"/>
-                </a:solidFill>
-                <a:latin typeface="Arial"/>
-              </a:rPr>
-              <a:t>Гмурман В. Е. Теория вероятностей и математическая статистика — гл. 4, 9, 12, 15–16</a:t>
-            </a:r>
-          </a:p>
-          <a:p>
-            <a:pPr>
-              <a:spcAft>
-                <a:spcPts val="1000"/>
-              </a:spcAft>
-            </a:pPr>
-            <a:r>
-              <a:rPr sz="1700" b="0">
-                <a:solidFill>
-                  <a:srgbClr val="1F2937"/>
-                </a:solidFill>
-                <a:latin typeface="Arial"/>
-              </a:rPr>
-              <a:t>Мёрфи К. П. Вероятностное машинное обучение: введение — разд. 2.8, 4.7</a:t>
-            </a:r>
-          </a:p>
-          <a:p>
-            <a:pPr>
-              <a:spcAft>
-                <a:spcPts val="1000"/>
-              </a:spcAft>
-            </a:pPr>
-            <a:r>
-              <a:rPr sz="1700" b="0">
-                <a:solidFill>
-                  <a:srgbClr val="1F2937"/>
-                </a:solidFill>
-                <a:latin typeface="Arial"/>
-              </a:rPr>
-              <a:t>Дайзенрот М. П. и др. Математика для машинного обучения — разд. 6.4, 6.5, 8.2</a:t>
-            </a:r>
-          </a:p>
-          <a:p>
-            <a:pPr>
-              <a:spcAft>
-                <a:spcPts val="1000"/>
-              </a:spcAft>
-            </a:pPr>
-            <a:r>
-              <a:rPr sz="1700" b="0">
-                <a:solidFill>
-                  <a:srgbClr val="1F2937"/>
-                </a:solidFill>
-                <a:latin typeface="Arial"/>
-              </a:rPr>
-              <a:t>Николенко С. и др. Глубокое обучение — SGD и мини-батчи, инициализация весов</a:t>
-            </a:r>
-          </a:p>
-          <a:p>
-            <a:pPr>
-              <a:spcAft>
-                <a:spcPts val="1000"/>
-              </a:spcAft>
-            </a:pPr>
-            <a:r>
-              <a:rPr sz="1700" b="0">
-                <a:solidFill>
-                  <a:srgbClr val="1F2937"/>
-                </a:solidFill>
-                <a:latin typeface="Arial"/>
-              </a:rPr>
-              <a:t>Савелова Т. И. Метод Монте-Карло</a:t>
-            </a:r>
-          </a:p>
-          <a:p>
-            <a:pPr>
-              <a:spcAft>
-                <a:spcPts val="1000"/>
-              </a:spcAft>
-            </a:pPr>
-            <a:r>
-              <a:rPr sz="1700" b="0">
-                <a:solidFill>
-                  <a:srgbClr val="1F2937"/>
-                </a:solidFill>
-                <a:latin typeface="Arial"/>
-              </a:rPr>
-              <a:t>Wainer H. The Most Dangerous Equation // American Scientist, 2007</a:t>
-            </a:r>
-          </a:p>
-        </p:txBody>
-      </p:sp>
-      <p:sp>
-        <p:nvSpPr>
-          <p:cNvPr id="5" name="TextBox 4"/>
-          <p:cNvSpPr txBox="1"/>
-          <p:nvPr/>
-        </p:nvSpPr>
-        <p:spPr>
-          <a:xfrm>
-            <a:off x="548640" y="5120640"/>
-            <a:ext cx="11094415" cy="365760"/>
-          </a:xfrm>
-          <a:prstGeom prst="rect">
-            <a:avLst/>
-          </a:prstGeom>
-          <a:noFill/>
-        </p:spPr>
-        <p:txBody>
-          <a:bodyPr wrap="square" lIns="0" rIns="0" tIns="0" bIns="0" anchor="t">
-            <a:spAutoFit/>
-          </a:bodyPr>
-          <a:lstStyle/>
-          <a:p>
-            <a:pPr>
-              <a:spcAft>
-                <a:spcPts val="400"/>
-              </a:spcAft>
-            </a:pPr>
-            <a:r>
-              <a:rPr sz="1500" b="0">
-                <a:solidFill>
-                  <a:srgbClr val="6B7280"/>
-                </a:solidFill>
-                <a:latin typeface="Arial"/>
-              </a:rPr>
-              <a:t>Конспект с полными формулировками и доказательствами: 05_lln-clt-itmo.md</a:t>
+              <a:t>Где эти теоремы работают каждый день</a:t>
             </a:r>
           </a:p>
         </p:txBody>
@@ -16697,6 +16055,2286 @@
                 <a:latin typeface="Arial"/>
               </a:rPr>
               <a:t>Почему частота превращается в вероятность</a:t>
+            </a:r>
+          </a:p>
+        </p:txBody>
+      </p:sp>
+    </p:spTree>
+  </p:cSld>
+  <p:clrMapOvr>
+    <a:masterClrMapping/>
+  </p:clrMapOvr>
+</p:sld>
+</file>
+
+<file path=ppt/slides/slide40.xml><?xml version="1.0" encoding="utf-8"?>
+<p:sld xmlns:a="http://schemas.openxmlformats.org/drawingml/2006/main" xmlns:p="http://schemas.openxmlformats.org/presentationml/2006/main" xmlns:r="http://schemas.openxmlformats.org/officeDocument/2006/relationships">
+  <p:cSld>
+    <p:spTree>
+      <p:nvGrpSpPr>
+        <p:cNvPr id="1" name=""/>
+        <p:cNvGrpSpPr/>
+        <p:nvPr/>
+      </p:nvGrpSpPr>
+      <p:grpSpPr/>
+      <p:sp>
+        <p:nvSpPr>
+          <p:cNvPr id="2" name="Title 1"/>
+          <p:cNvSpPr>
+            <a:spLocks noGrp="1"/>
+          </p:cNvSpPr>
+          <p:nvPr>
+            <p:ph type="title" idx="101"/>
+          </p:nvPr>
+        </p:nvSpPr>
+        <p:spPr/>
+        <p:txBody>
+          <a:bodyPr/>
+          <a:lstStyle/>
+          <a:p>
+            <a:r>
+              <a:rPr sz="2600" b="1">
+                <a:solidFill>
+                  <a:srgbClr val="1F2937"/>
+                </a:solidFill>
+                <a:latin typeface="Arial"/>
+              </a:rPr>
+              <a:t>Где это встречается в машинном обучении</a:t>
+            </a:r>
+          </a:p>
+        </p:txBody>
+      </p:sp>
+      <p:sp>
+        <p:nvSpPr>
+          <p:cNvPr id="3" name="TextBox 2"/>
+          <p:cNvSpPr txBox="1"/>
+          <p:nvPr/>
+        </p:nvSpPr>
+        <p:spPr>
+          <a:xfrm>
+            <a:off x="11292840" y="6400800"/>
+            <a:ext cx="457200" cy="274320"/>
+          </a:xfrm>
+          <a:prstGeom prst="rect">
+            <a:avLst/>
+          </a:prstGeom>
+          <a:noFill/>
+        </p:spPr>
+        <p:txBody>
+          <a:bodyPr wrap="square" lIns="0" rIns="0" tIns="0" bIns="0" anchor="t">
+            <a:spAutoFit/>
+          </a:bodyPr>
+          <a:lstStyle/>
+          <a:p>
+            <a:pPr>
+              <a:spcAft>
+                <a:spcPts val="400"/>
+              </a:spcAft>
+            </a:pPr>
+            <a:r>
+              <a:rPr sz="1000" b="0">
+                <a:solidFill>
+                  <a:srgbClr val="6B7280"/>
+                </a:solidFill>
+                <a:latin typeface="Arial"/>
+              </a:rPr>
+              <a:t>40</a:t>
+            </a:r>
+          </a:p>
+        </p:txBody>
+      </p:sp>
+      <p:sp>
+        <p:nvSpPr>
+          <p:cNvPr id="4" name="Rectangle 3"/>
+          <p:cNvSpPr/>
+          <p:nvPr/>
+        </p:nvSpPr>
+        <p:spPr>
+          <a:xfrm>
+            <a:off x="548640" y="1280160"/>
+            <a:ext cx="5486400" cy="1234440"/>
+          </a:xfrm>
+          <a:prstGeom prst="rect">
+            <a:avLst/>
+          </a:prstGeom>
+          <a:solidFill>
+            <a:srgbClr val="D6EEF8"/>
+          </a:solidFill>
+          <a:ln w="6350">
+            <a:solidFill>
+              <a:srgbClr val="D6EEF8"/>
+            </a:solidFill>
+          </a:ln>
+          <a:effectLst/>
+        </p:spPr>
+        <p:style>
+          <a:lnRef idx="1">
+            <a:schemeClr val="accent1"/>
+          </a:lnRef>
+          <a:fillRef idx="3">
+            <a:schemeClr val="accent1"/>
+          </a:fillRef>
+          <a:effectRef idx="2">
+            <a:schemeClr val="accent1"/>
+          </a:effectRef>
+          <a:fontRef idx="minor">
+            <a:schemeClr val="lt1"/>
+          </a:fontRef>
+        </p:style>
+        <p:txBody>
+          <a:bodyPr rtlCol="0" anchor="ctr"/>
+          <a:lstStyle/>
+          <a:p>
+            <a:pPr algn="ctr"/>
+          </a:p>
+        </p:txBody>
+      </p:sp>
+      <p:sp>
+        <p:nvSpPr>
+          <p:cNvPr id="5" name="TextBox 4"/>
+          <p:cNvSpPr txBox="1"/>
+          <p:nvPr/>
+        </p:nvSpPr>
+        <p:spPr>
+          <a:xfrm>
+            <a:off x="777240" y="1463039"/>
+            <a:ext cx="5029200" cy="365760"/>
+          </a:xfrm>
+          <a:prstGeom prst="rect">
+            <a:avLst/>
+          </a:prstGeom>
+          <a:noFill/>
+        </p:spPr>
+        <p:txBody>
+          <a:bodyPr wrap="square" lIns="0" rIns="0" tIns="0" bIns="0" anchor="t">
+            <a:spAutoFit/>
+          </a:bodyPr>
+          <a:lstStyle/>
+          <a:p>
+            <a:pPr>
+              <a:spcAft>
+                <a:spcPts val="400"/>
+              </a:spcAft>
+            </a:pPr>
+            <a:r>
+              <a:rPr sz="1500" b="1">
+                <a:solidFill>
+                  <a:srgbClr val="1F2937"/>
+                </a:solidFill>
+                <a:latin typeface="Arial"/>
+              </a:rPr>
+              <a:t>Эмпирический риск</a:t>
+            </a:r>
+          </a:p>
+        </p:txBody>
+      </p:sp>
+      <p:sp>
+        <p:nvSpPr>
+          <p:cNvPr id="6" name="TextBox 5"/>
+          <p:cNvSpPr txBox="1"/>
+          <p:nvPr/>
+        </p:nvSpPr>
+        <p:spPr>
+          <a:xfrm>
+            <a:off x="777240" y="1847088"/>
+            <a:ext cx="5029200" cy="548640"/>
+          </a:xfrm>
+          <a:prstGeom prst="rect">
+            <a:avLst/>
+          </a:prstGeom>
+          <a:noFill/>
+        </p:spPr>
+        <p:txBody>
+          <a:bodyPr wrap="square" lIns="0" rIns="0" tIns="0" bIns="0" anchor="t">
+            <a:spAutoFit/>
+          </a:bodyPr>
+          <a:lstStyle/>
+          <a:p>
+            <a:pPr>
+              <a:spcAft>
+                <a:spcPts val="400"/>
+              </a:spcAft>
+            </a:pPr>
+            <a:r>
+              <a:rPr sz="1300" b="0">
+                <a:solidFill>
+                  <a:srgbClr val="1F2937"/>
+                </a:solidFill>
+                <a:latin typeface="Arial"/>
+              </a:rPr>
+              <a:t>средняя ошибка на обучении ≈ ожидаемая ошибка; тест из 1 000 объектов — точность ±1–2 п. п.</a:t>
+            </a:r>
+          </a:p>
+        </p:txBody>
+      </p:sp>
+      <p:sp>
+        <p:nvSpPr>
+          <p:cNvPr id="7" name="Rectangle 6"/>
+          <p:cNvSpPr/>
+          <p:nvPr/>
+        </p:nvSpPr>
+        <p:spPr>
+          <a:xfrm>
+            <a:off x="6153912" y="1280160"/>
+            <a:ext cx="5486400" cy="1234440"/>
+          </a:xfrm>
+          <a:prstGeom prst="rect">
+            <a:avLst/>
+          </a:prstGeom>
+          <a:solidFill>
+            <a:srgbClr val="F5F7FA"/>
+          </a:solidFill>
+          <a:ln w="6350">
+            <a:solidFill>
+              <a:srgbClr val="D1D5DB"/>
+            </a:solidFill>
+          </a:ln>
+          <a:effectLst/>
+        </p:spPr>
+        <p:style>
+          <a:lnRef idx="1">
+            <a:schemeClr val="accent1"/>
+          </a:lnRef>
+          <a:fillRef idx="3">
+            <a:schemeClr val="accent1"/>
+          </a:fillRef>
+          <a:effectRef idx="2">
+            <a:schemeClr val="accent1"/>
+          </a:effectRef>
+          <a:fontRef idx="minor">
+            <a:schemeClr val="lt1"/>
+          </a:fontRef>
+        </p:style>
+        <p:txBody>
+          <a:bodyPr rtlCol="0" anchor="ctr"/>
+          <a:lstStyle/>
+          <a:p>
+            <a:pPr algn="ctr"/>
+          </a:p>
+        </p:txBody>
+      </p:sp>
+      <p:sp>
+        <p:nvSpPr>
+          <p:cNvPr id="8" name="TextBox 7"/>
+          <p:cNvSpPr txBox="1"/>
+          <p:nvPr/>
+        </p:nvSpPr>
+        <p:spPr>
+          <a:xfrm>
+            <a:off x="6382512" y="1463039"/>
+            <a:ext cx="5029200" cy="365760"/>
+          </a:xfrm>
+          <a:prstGeom prst="rect">
+            <a:avLst/>
+          </a:prstGeom>
+          <a:noFill/>
+        </p:spPr>
+        <p:txBody>
+          <a:bodyPr wrap="square" lIns="0" rIns="0" tIns="0" bIns="0" anchor="t">
+            <a:spAutoFit/>
+          </a:bodyPr>
+          <a:lstStyle/>
+          <a:p>
+            <a:pPr>
+              <a:spcAft>
+                <a:spcPts val="400"/>
+              </a:spcAft>
+            </a:pPr>
+            <a:r>
+              <a:rPr sz="1500" b="1">
+                <a:solidFill>
+                  <a:srgbClr val="1F2937"/>
+                </a:solidFill>
+                <a:latin typeface="Arial"/>
+              </a:rPr>
+              <a:t>SGD и мини-батчи</a:t>
+            </a:r>
+          </a:p>
+        </p:txBody>
+      </p:sp>
+      <p:sp>
+        <p:nvSpPr>
+          <p:cNvPr id="9" name="TextBox 8"/>
+          <p:cNvSpPr txBox="1"/>
+          <p:nvPr/>
+        </p:nvSpPr>
+        <p:spPr>
+          <a:xfrm>
+            <a:off x="6382512" y="1847088"/>
+            <a:ext cx="5029200" cy="548640"/>
+          </a:xfrm>
+          <a:prstGeom prst="rect">
+            <a:avLst/>
+          </a:prstGeom>
+          <a:noFill/>
+        </p:spPr>
+        <p:txBody>
+          <a:bodyPr wrap="square" lIns="0" rIns="0" tIns="0" bIns="0" anchor="t">
+            <a:spAutoFit/>
+          </a:bodyPr>
+          <a:lstStyle/>
+          <a:p>
+            <a:pPr>
+              <a:spcAft>
+                <a:spcPts val="400"/>
+              </a:spcAft>
+            </a:pPr>
+            <a:r>
+              <a:rPr sz="1300" b="0">
+                <a:solidFill>
+                  <a:srgbClr val="6B7280"/>
+                </a:solidFill>
+                <a:latin typeface="Arial"/>
+              </a:rPr>
+              <a:t>градиент по батчу — выборочное среднее: шум ∝ 1/√B</a:t>
+            </a:r>
+          </a:p>
+        </p:txBody>
+      </p:sp>
+      <p:sp>
+        <p:nvSpPr>
+          <p:cNvPr id="10" name="Rectangle 9"/>
+          <p:cNvSpPr/>
+          <p:nvPr/>
+        </p:nvSpPr>
+        <p:spPr>
+          <a:xfrm>
+            <a:off x="548640" y="2651760"/>
+            <a:ext cx="5486400" cy="1234440"/>
+          </a:xfrm>
+          <a:prstGeom prst="rect">
+            <a:avLst/>
+          </a:prstGeom>
+          <a:solidFill>
+            <a:srgbClr val="F5F7FA"/>
+          </a:solidFill>
+          <a:ln w="6350">
+            <a:solidFill>
+              <a:srgbClr val="D1D5DB"/>
+            </a:solidFill>
+          </a:ln>
+          <a:effectLst/>
+        </p:spPr>
+        <p:style>
+          <a:lnRef idx="1">
+            <a:schemeClr val="accent1"/>
+          </a:lnRef>
+          <a:fillRef idx="3">
+            <a:schemeClr val="accent1"/>
+          </a:fillRef>
+          <a:effectRef idx="2">
+            <a:schemeClr val="accent1"/>
+          </a:effectRef>
+          <a:fontRef idx="minor">
+            <a:schemeClr val="lt1"/>
+          </a:fontRef>
+        </p:style>
+        <p:txBody>
+          <a:bodyPr rtlCol="0" anchor="ctr"/>
+          <a:lstStyle/>
+          <a:p>
+            <a:pPr algn="ctr"/>
+          </a:p>
+        </p:txBody>
+      </p:sp>
+      <p:sp>
+        <p:nvSpPr>
+          <p:cNvPr id="11" name="TextBox 10"/>
+          <p:cNvSpPr txBox="1"/>
+          <p:nvPr/>
+        </p:nvSpPr>
+        <p:spPr>
+          <a:xfrm>
+            <a:off x="777240" y="2834640"/>
+            <a:ext cx="5029200" cy="365760"/>
+          </a:xfrm>
+          <a:prstGeom prst="rect">
+            <a:avLst/>
+          </a:prstGeom>
+          <a:noFill/>
+        </p:spPr>
+        <p:txBody>
+          <a:bodyPr wrap="square" lIns="0" rIns="0" tIns="0" bIns="0" anchor="t">
+            <a:spAutoFit/>
+          </a:bodyPr>
+          <a:lstStyle/>
+          <a:p>
+            <a:pPr>
+              <a:spcAft>
+                <a:spcPts val="400"/>
+              </a:spcAft>
+            </a:pPr>
+            <a:r>
+              <a:rPr sz="1500" b="1">
+                <a:solidFill>
+                  <a:srgbClr val="1F2937"/>
+                </a:solidFill>
+                <a:latin typeface="Arial"/>
+              </a:rPr>
+              <a:t>Бутстреп метрик</a:t>
+            </a:r>
+          </a:p>
+        </p:txBody>
+      </p:sp>
+      <p:sp>
+        <p:nvSpPr>
+          <p:cNvPr id="12" name="TextBox 11"/>
+          <p:cNvSpPr txBox="1"/>
+          <p:nvPr/>
+        </p:nvSpPr>
+        <p:spPr>
+          <a:xfrm>
+            <a:off x="777240" y="3218688"/>
+            <a:ext cx="5029200" cy="548640"/>
+          </a:xfrm>
+          <a:prstGeom prst="rect">
+            <a:avLst/>
+          </a:prstGeom>
+          <a:noFill/>
+        </p:spPr>
+        <p:txBody>
+          <a:bodyPr wrap="square" lIns="0" rIns="0" tIns="0" bIns="0" anchor="t">
+            <a:spAutoFit/>
+          </a:bodyPr>
+          <a:lstStyle/>
+          <a:p>
+            <a:pPr>
+              <a:spcAft>
+                <a:spcPts val="400"/>
+              </a:spcAft>
+            </a:pPr>
+            <a:r>
+              <a:rPr sz="1300" b="0">
+                <a:solidFill>
+                  <a:srgbClr val="6B7280"/>
+                </a:solidFill>
+                <a:latin typeface="Arial"/>
+              </a:rPr>
+              <a:t>погрешность ROC-AUC и F1 на тесте; бэггинг и out-of-bag в случайном лесе</a:t>
+            </a:r>
+          </a:p>
+        </p:txBody>
+      </p:sp>
+      <p:sp>
+        <p:nvSpPr>
+          <p:cNvPr id="13" name="Rectangle 12"/>
+          <p:cNvSpPr/>
+          <p:nvPr/>
+        </p:nvSpPr>
+        <p:spPr>
+          <a:xfrm>
+            <a:off x="6153912" y="2651760"/>
+            <a:ext cx="5486400" cy="1234440"/>
+          </a:xfrm>
+          <a:prstGeom prst="rect">
+            <a:avLst/>
+          </a:prstGeom>
+          <a:solidFill>
+            <a:srgbClr val="D6EEF8"/>
+          </a:solidFill>
+          <a:ln w="6350">
+            <a:solidFill>
+              <a:srgbClr val="D6EEF8"/>
+            </a:solidFill>
+          </a:ln>
+          <a:effectLst/>
+        </p:spPr>
+        <p:style>
+          <a:lnRef idx="1">
+            <a:schemeClr val="accent1"/>
+          </a:lnRef>
+          <a:fillRef idx="3">
+            <a:schemeClr val="accent1"/>
+          </a:fillRef>
+          <a:effectRef idx="2">
+            <a:schemeClr val="accent1"/>
+          </a:effectRef>
+          <a:fontRef idx="minor">
+            <a:schemeClr val="lt1"/>
+          </a:fontRef>
+        </p:style>
+        <p:txBody>
+          <a:bodyPr rtlCol="0" anchor="ctr"/>
+          <a:lstStyle/>
+          <a:p>
+            <a:pPr algn="ctr"/>
+          </a:p>
+        </p:txBody>
+      </p:sp>
+      <p:sp>
+        <p:nvSpPr>
+          <p:cNvPr id="14" name="TextBox 13"/>
+          <p:cNvSpPr txBox="1"/>
+          <p:nvPr/>
+        </p:nvSpPr>
+        <p:spPr>
+          <a:xfrm>
+            <a:off x="6382512" y="2834640"/>
+            <a:ext cx="5029200" cy="365760"/>
+          </a:xfrm>
+          <a:prstGeom prst="rect">
+            <a:avLst/>
+          </a:prstGeom>
+          <a:noFill/>
+        </p:spPr>
+        <p:txBody>
+          <a:bodyPr wrap="square" lIns="0" rIns="0" tIns="0" bIns="0" anchor="t">
+            <a:spAutoFit/>
+          </a:bodyPr>
+          <a:lstStyle/>
+          <a:p>
+            <a:pPr>
+              <a:spcAft>
+                <a:spcPts val="400"/>
+              </a:spcAft>
+            </a:pPr>
+            <a:r>
+              <a:rPr sz="1500" b="1">
+                <a:solidFill>
+                  <a:srgbClr val="1F2937"/>
+                </a:solidFill>
+                <a:latin typeface="Arial"/>
+              </a:rPr>
+              <a:t>Ансамбли, бэггинг</a:t>
+            </a:r>
+          </a:p>
+        </p:txBody>
+      </p:sp>
+      <p:sp>
+        <p:nvSpPr>
+          <p:cNvPr id="15" name="TextBox 14"/>
+          <p:cNvSpPr txBox="1"/>
+          <p:nvPr/>
+        </p:nvSpPr>
+        <p:spPr>
+          <a:xfrm>
+            <a:off x="6382512" y="3218688"/>
+            <a:ext cx="5029200" cy="548640"/>
+          </a:xfrm>
+          <a:prstGeom prst="rect">
+            <a:avLst/>
+          </a:prstGeom>
+          <a:noFill/>
+        </p:spPr>
+        <p:txBody>
+          <a:bodyPr wrap="square" lIns="0" rIns="0" tIns="0" bIns="0" anchor="t">
+            <a:spAutoFit/>
+          </a:bodyPr>
+          <a:lstStyle/>
+          <a:p>
+            <a:pPr>
+              <a:spcAft>
+                <a:spcPts val="400"/>
+              </a:spcAft>
+            </a:pPr>
+            <a:r>
+              <a:rPr sz="1300" b="0">
+                <a:solidFill>
+                  <a:srgbClr val="1F2937"/>
+                </a:solidFill>
+                <a:latin typeface="Arial"/>
+              </a:rPr>
+              <a:t>среднее слабо коррелированных моделей — меньше дисперсия</a:t>
+            </a:r>
+          </a:p>
+        </p:txBody>
+      </p:sp>
+      <p:sp>
+        <p:nvSpPr>
+          <p:cNvPr id="16" name="Rectangle 15"/>
+          <p:cNvSpPr/>
+          <p:nvPr/>
+        </p:nvSpPr>
+        <p:spPr>
+          <a:xfrm>
+            <a:off x="548640" y="4023360"/>
+            <a:ext cx="5486400" cy="1234440"/>
+          </a:xfrm>
+          <a:prstGeom prst="rect">
+            <a:avLst/>
+          </a:prstGeom>
+          <a:solidFill>
+            <a:srgbClr val="D6EEF8"/>
+          </a:solidFill>
+          <a:ln w="6350">
+            <a:solidFill>
+              <a:srgbClr val="D6EEF8"/>
+            </a:solidFill>
+          </a:ln>
+          <a:effectLst/>
+        </p:spPr>
+        <p:style>
+          <a:lnRef idx="1">
+            <a:schemeClr val="accent1"/>
+          </a:lnRef>
+          <a:fillRef idx="3">
+            <a:schemeClr val="accent1"/>
+          </a:fillRef>
+          <a:effectRef idx="2">
+            <a:schemeClr val="accent1"/>
+          </a:effectRef>
+          <a:fontRef idx="minor">
+            <a:schemeClr val="lt1"/>
+          </a:fontRef>
+        </p:style>
+        <p:txBody>
+          <a:bodyPr rtlCol="0" anchor="ctr"/>
+          <a:lstStyle/>
+          <a:p>
+            <a:pPr algn="ctr"/>
+          </a:p>
+        </p:txBody>
+      </p:sp>
+      <p:sp>
+        <p:nvSpPr>
+          <p:cNvPr id="17" name="TextBox 16"/>
+          <p:cNvSpPr txBox="1"/>
+          <p:nvPr/>
+        </p:nvSpPr>
+        <p:spPr>
+          <a:xfrm>
+            <a:off x="777240" y="4206240"/>
+            <a:ext cx="5029200" cy="365760"/>
+          </a:xfrm>
+          <a:prstGeom prst="rect">
+            <a:avLst/>
+          </a:prstGeom>
+          <a:noFill/>
+        </p:spPr>
+        <p:txBody>
+          <a:bodyPr wrap="square" lIns="0" rIns="0" tIns="0" bIns="0" anchor="t">
+            <a:spAutoFit/>
+          </a:bodyPr>
+          <a:lstStyle/>
+          <a:p>
+            <a:pPr>
+              <a:spcAft>
+                <a:spcPts val="400"/>
+              </a:spcAft>
+            </a:pPr>
+            <a:r>
+              <a:rPr sz="1500" b="1">
+                <a:solidFill>
+                  <a:srgbClr val="1F2937"/>
+                </a:solidFill>
+                <a:latin typeface="Arial"/>
+              </a:rPr>
+              <a:t>Монте-Карло</a:t>
+            </a:r>
+          </a:p>
+        </p:txBody>
+      </p:sp>
+      <p:sp>
+        <p:nvSpPr>
+          <p:cNvPr id="18" name="TextBox 17"/>
+          <p:cNvSpPr txBox="1"/>
+          <p:nvPr/>
+        </p:nvSpPr>
+        <p:spPr>
+          <a:xfrm>
+            <a:off x="777240" y="4590288"/>
+            <a:ext cx="5029200" cy="548640"/>
+          </a:xfrm>
+          <a:prstGeom prst="rect">
+            <a:avLst/>
+          </a:prstGeom>
+          <a:noFill/>
+        </p:spPr>
+        <p:txBody>
+          <a:bodyPr wrap="square" lIns="0" rIns="0" tIns="0" bIns="0" anchor="t">
+            <a:spAutoFit/>
+          </a:bodyPr>
+          <a:lstStyle/>
+          <a:p>
+            <a:pPr>
+              <a:spcAft>
+                <a:spcPts val="400"/>
+              </a:spcAft>
+            </a:pPr>
+            <a:r>
+              <a:rPr sz="1300" b="0">
+                <a:solidFill>
+                  <a:srgbClr val="1F2937"/>
+                </a:solidFill>
+                <a:latin typeface="Arial"/>
+              </a:rPr>
+              <a:t>ELBO в VAE, награда в RL, байесовские апостериорные</a:t>
+            </a:r>
+          </a:p>
+        </p:txBody>
+      </p:sp>
+      <p:sp>
+        <p:nvSpPr>
+          <p:cNvPr id="19" name="Rectangle 18"/>
+          <p:cNvSpPr/>
+          <p:nvPr/>
+        </p:nvSpPr>
+        <p:spPr>
+          <a:xfrm>
+            <a:off x="6153912" y="4023360"/>
+            <a:ext cx="5486400" cy="1234440"/>
+          </a:xfrm>
+          <a:prstGeom prst="rect">
+            <a:avLst/>
+          </a:prstGeom>
+          <a:solidFill>
+            <a:srgbClr val="F5F7FA"/>
+          </a:solidFill>
+          <a:ln w="6350">
+            <a:solidFill>
+              <a:srgbClr val="D1D5DB"/>
+            </a:solidFill>
+          </a:ln>
+          <a:effectLst/>
+        </p:spPr>
+        <p:style>
+          <a:lnRef idx="1">
+            <a:schemeClr val="accent1"/>
+          </a:lnRef>
+          <a:fillRef idx="3">
+            <a:schemeClr val="accent1"/>
+          </a:fillRef>
+          <a:effectRef idx="2">
+            <a:schemeClr val="accent1"/>
+          </a:effectRef>
+          <a:fontRef idx="minor">
+            <a:schemeClr val="lt1"/>
+          </a:fontRef>
+        </p:style>
+        <p:txBody>
+          <a:bodyPr rtlCol="0" anchor="ctr"/>
+          <a:lstStyle/>
+          <a:p>
+            <a:pPr algn="ctr"/>
+          </a:p>
+        </p:txBody>
+      </p:sp>
+      <p:sp>
+        <p:nvSpPr>
+          <p:cNvPr id="20" name="TextBox 19"/>
+          <p:cNvSpPr txBox="1"/>
+          <p:nvPr/>
+        </p:nvSpPr>
+        <p:spPr>
+          <a:xfrm>
+            <a:off x="6382512" y="4206240"/>
+            <a:ext cx="5029200" cy="365760"/>
+          </a:xfrm>
+          <a:prstGeom prst="rect">
+            <a:avLst/>
+          </a:prstGeom>
+          <a:noFill/>
+        </p:spPr>
+        <p:txBody>
+          <a:bodyPr wrap="square" lIns="0" rIns="0" tIns="0" bIns="0" anchor="t">
+            <a:spAutoFit/>
+          </a:bodyPr>
+          <a:lstStyle/>
+          <a:p>
+            <a:pPr>
+              <a:spcAft>
+                <a:spcPts val="400"/>
+              </a:spcAft>
+            </a:pPr>
+            <a:r>
+              <a:rPr sz="1500" b="1">
+                <a:solidFill>
+                  <a:srgbClr val="1F2937"/>
+                </a:solidFill>
+                <a:latin typeface="Arial"/>
+              </a:rPr>
+              <a:t>Инициализация весов</a:t>
+            </a:r>
+          </a:p>
+        </p:txBody>
+      </p:sp>
+      <p:sp>
+        <p:nvSpPr>
+          <p:cNvPr id="21" name="TextBox 20"/>
+          <p:cNvSpPr txBox="1"/>
+          <p:nvPr/>
+        </p:nvSpPr>
+        <p:spPr>
+          <a:xfrm>
+            <a:off x="6382512" y="4590288"/>
+            <a:ext cx="5029200" cy="548640"/>
+          </a:xfrm>
+          <a:prstGeom prst="rect">
+            <a:avLst/>
+          </a:prstGeom>
+          <a:noFill/>
+        </p:spPr>
+        <p:txBody>
+          <a:bodyPr wrap="square" lIns="0" rIns="0" tIns="0" bIns="0" anchor="t">
+            <a:spAutoFit/>
+          </a:bodyPr>
+          <a:lstStyle/>
+          <a:p>
+            <a:pPr>
+              <a:spcAft>
+                <a:spcPts val="400"/>
+              </a:spcAft>
+            </a:pPr>
+            <a:r>
+              <a:rPr sz="1300" b="0">
+                <a:solidFill>
+                  <a:srgbClr val="6B7280"/>
+                </a:solidFill>
+                <a:latin typeface="Arial"/>
+              </a:rPr>
+              <a:t>предактивация Σ wᵢxᵢ почти нормальна → схемы Ксавье и Хе</a:t>
+            </a:r>
+          </a:p>
+        </p:txBody>
+      </p:sp>
+    </p:spTree>
+  </p:cSld>
+  <p:clrMapOvr>
+    <a:masterClrMapping/>
+  </p:clrMapOvr>
+</p:sld>
+</file>
+
+<file path=ppt/slides/slide41.xml><?xml version="1.0" encoding="utf-8"?>
+<p:sld xmlns:a="http://schemas.openxmlformats.org/drawingml/2006/main" xmlns:p="http://schemas.openxmlformats.org/presentationml/2006/main" xmlns:r="http://schemas.openxmlformats.org/officeDocument/2006/relationships">
+  <p:cSld>
+    <p:spTree>
+      <p:nvGrpSpPr>
+        <p:cNvPr id="1" name=""/>
+        <p:cNvGrpSpPr/>
+        <p:nvPr/>
+      </p:nvGrpSpPr>
+      <p:grpSpPr/>
+      <p:sp>
+        <p:nvSpPr>
+          <p:cNvPr id="2" name="Title 1"/>
+          <p:cNvSpPr>
+            <a:spLocks noGrp="1"/>
+          </p:cNvSpPr>
+          <p:nvPr>
+            <p:ph type="title" idx="101"/>
+          </p:nvPr>
+        </p:nvSpPr>
+        <p:spPr/>
+        <p:txBody>
+          <a:bodyPr/>
+          <a:lstStyle/>
+          <a:p>
+            <a:r>
+              <a:rPr sz="2600" b="1">
+                <a:solidFill>
+                  <a:srgbClr val="1F2937"/>
+                </a:solidFill>
+                <a:latin typeface="Arial"/>
+              </a:rPr>
+              <a:t>Сквозной пример: какая модель лучше?</a:t>
+            </a:r>
+          </a:p>
+        </p:txBody>
+      </p:sp>
+      <p:sp>
+        <p:nvSpPr>
+          <p:cNvPr id="3" name="TextBox 2"/>
+          <p:cNvSpPr txBox="1"/>
+          <p:nvPr/>
+        </p:nvSpPr>
+        <p:spPr>
+          <a:xfrm>
+            <a:off x="11292840" y="6400800"/>
+            <a:ext cx="457200" cy="274320"/>
+          </a:xfrm>
+          <a:prstGeom prst="rect">
+            <a:avLst/>
+          </a:prstGeom>
+          <a:noFill/>
+        </p:spPr>
+        <p:txBody>
+          <a:bodyPr wrap="square" lIns="0" rIns="0" tIns="0" bIns="0" anchor="t">
+            <a:spAutoFit/>
+          </a:bodyPr>
+          <a:lstStyle/>
+          <a:p>
+            <a:pPr>
+              <a:spcAft>
+                <a:spcPts val="400"/>
+              </a:spcAft>
+            </a:pPr>
+            <a:r>
+              <a:rPr sz="1000" b="0">
+                <a:solidFill>
+                  <a:srgbClr val="6B7280"/>
+                </a:solidFill>
+                <a:latin typeface="Arial"/>
+              </a:rPr>
+              <a:t>41</a:t>
+            </a:r>
+          </a:p>
+        </p:txBody>
+      </p:sp>
+      <p:sp>
+        <p:nvSpPr>
+          <p:cNvPr id="4" name="TextBox 3"/>
+          <p:cNvSpPr txBox="1"/>
+          <p:nvPr/>
+        </p:nvSpPr>
+        <p:spPr>
+          <a:xfrm>
+            <a:off x="548640" y="1280160"/>
+            <a:ext cx="11094415" cy="457200"/>
+          </a:xfrm>
+          <a:prstGeom prst="rect">
+            <a:avLst/>
+          </a:prstGeom>
+          <a:noFill/>
+        </p:spPr>
+        <p:txBody>
+          <a:bodyPr wrap="square" lIns="0" rIns="0" tIns="0" bIns="0" anchor="t">
+            <a:spAutoFit/>
+          </a:bodyPr>
+          <a:lstStyle/>
+          <a:p>
+            <a:pPr>
+              <a:spcAft>
+                <a:spcPts val="400"/>
+              </a:spcAft>
+            </a:pPr>
+            <a:r>
+              <a:rPr sz="1700" b="1">
+                <a:solidFill>
+                  <a:srgbClr val="1F2937"/>
+                </a:solidFill>
+                <a:latin typeface="Arial"/>
+              </a:rPr>
+              <a:t>Тест из 2 000 объектов: модель A — точность 91,2 %, модель B — 90,6 %.</a:t>
+            </a:r>
+          </a:p>
+        </p:txBody>
+      </p:sp>
+      <p:sp>
+        <p:nvSpPr>
+          <p:cNvPr id="5" name="Rectangle 4"/>
+          <p:cNvSpPr/>
+          <p:nvPr/>
+        </p:nvSpPr>
+        <p:spPr>
+          <a:xfrm>
+            <a:off x="548640" y="1920240"/>
+            <a:ext cx="3566160" cy="2286000"/>
+          </a:xfrm>
+          <a:prstGeom prst="rect">
+            <a:avLst/>
+          </a:prstGeom>
+          <a:solidFill>
+            <a:srgbClr val="D6EEF8"/>
+          </a:solidFill>
+          <a:ln w="6350">
+            <a:solidFill>
+              <a:srgbClr val="D6EEF8"/>
+            </a:solidFill>
+          </a:ln>
+          <a:effectLst/>
+        </p:spPr>
+        <p:style>
+          <a:lnRef idx="1">
+            <a:schemeClr val="accent1"/>
+          </a:lnRef>
+          <a:fillRef idx="3">
+            <a:schemeClr val="accent1"/>
+          </a:fillRef>
+          <a:effectRef idx="2">
+            <a:schemeClr val="accent1"/>
+          </a:effectRef>
+          <a:fontRef idx="minor">
+            <a:schemeClr val="lt1"/>
+          </a:fontRef>
+        </p:style>
+        <p:txBody>
+          <a:bodyPr rtlCol="0" anchor="ctr"/>
+          <a:lstStyle/>
+          <a:p>
+            <a:pPr algn="ctr"/>
+          </a:p>
+        </p:txBody>
+      </p:sp>
+      <p:sp>
+        <p:nvSpPr>
+          <p:cNvPr id="6" name="TextBox 5"/>
+          <p:cNvSpPr txBox="1"/>
+          <p:nvPr/>
+        </p:nvSpPr>
+        <p:spPr>
+          <a:xfrm>
+            <a:off x="777240" y="2103120"/>
+            <a:ext cx="3108960" cy="365760"/>
+          </a:xfrm>
+          <a:prstGeom prst="rect">
+            <a:avLst/>
+          </a:prstGeom>
+          <a:noFill/>
+        </p:spPr>
+        <p:txBody>
+          <a:bodyPr wrap="square" lIns="0" rIns="0" tIns="0" bIns="0" anchor="t">
+            <a:spAutoFit/>
+          </a:bodyPr>
+          <a:lstStyle/>
+          <a:p>
+            <a:pPr>
+              <a:spcAft>
+                <a:spcPts val="400"/>
+              </a:spcAft>
+            </a:pPr>
+            <a:r>
+              <a:rPr sz="1500" b="1">
+                <a:solidFill>
+                  <a:srgbClr val="1F2937"/>
+                </a:solidFill>
+                <a:latin typeface="Arial"/>
+              </a:rPr>
+              <a:t>SE точности</a:t>
+            </a:r>
+          </a:p>
+        </p:txBody>
+      </p:sp>
+      <p:sp>
+        <p:nvSpPr>
+          <p:cNvPr id="7" name="TextBox 6"/>
+          <p:cNvSpPr txBox="1"/>
+          <p:nvPr/>
+        </p:nvSpPr>
+        <p:spPr>
+          <a:xfrm>
+            <a:off x="777240" y="2487168"/>
+            <a:ext cx="3108960" cy="1600200"/>
+          </a:xfrm>
+          <a:prstGeom prst="rect">
+            <a:avLst/>
+          </a:prstGeom>
+          <a:noFill/>
+        </p:spPr>
+        <p:txBody>
+          <a:bodyPr wrap="square" lIns="0" rIns="0" tIns="0" bIns="0" anchor="t">
+            <a:spAutoFit/>
+          </a:bodyPr>
+          <a:lstStyle/>
+          <a:p>
+            <a:pPr>
+              <a:spcAft>
+                <a:spcPts val="400"/>
+              </a:spcAft>
+            </a:pPr>
+            <a:r>
+              <a:rPr sz="1400" b="0">
+                <a:solidFill>
+                  <a:srgbClr val="1F2937"/>
+                </a:solidFill>
+                <a:latin typeface="Arial"/>
+              </a:rPr>
+              <a:t>√(0,91·0,09/2000) ≈ 0,64 п. п.</a:t>
+            </a:r>
+          </a:p>
+          <a:p>
+            <a:pPr>
+              <a:spcAft>
+                <a:spcPts val="400"/>
+              </a:spcAft>
+            </a:pPr>
+            <a:r>
+              <a:rPr sz="1400" b="0">
+                <a:solidFill>
+                  <a:srgbClr val="1F2937"/>
+                </a:solidFill>
+                <a:latin typeface="Arial"/>
+              </a:rPr>
+              <a:t/>
+            </a:r>
+          </a:p>
+          <a:p>
+            <a:pPr>
+              <a:spcAft>
+                <a:spcPts val="400"/>
+              </a:spcAft>
+            </a:pPr>
+            <a:r>
+              <a:rPr sz="1400" b="0">
+                <a:solidFill>
+                  <a:srgbClr val="1F2937"/>
+                </a:solidFill>
+                <a:latin typeface="Arial"/>
+              </a:rPr>
+              <a:t>Интервал A: 91,2 ± 1,25 %</a:t>
+            </a:r>
+          </a:p>
+        </p:txBody>
+      </p:sp>
+      <p:sp>
+        <p:nvSpPr>
+          <p:cNvPr id="8" name="Rectangle 7"/>
+          <p:cNvSpPr/>
+          <p:nvPr/>
+        </p:nvSpPr>
+        <p:spPr>
+          <a:xfrm>
+            <a:off x="4297679" y="1920240"/>
+            <a:ext cx="3566160" cy="2286000"/>
+          </a:xfrm>
+          <a:prstGeom prst="rect">
+            <a:avLst/>
+          </a:prstGeom>
+          <a:solidFill>
+            <a:srgbClr val="FDE9D3"/>
+          </a:solidFill>
+          <a:ln w="6350">
+            <a:solidFill>
+              <a:srgbClr val="FDE9D3"/>
+            </a:solidFill>
+          </a:ln>
+          <a:effectLst/>
+        </p:spPr>
+        <p:style>
+          <a:lnRef idx="1">
+            <a:schemeClr val="accent1"/>
+          </a:lnRef>
+          <a:fillRef idx="3">
+            <a:schemeClr val="accent1"/>
+          </a:fillRef>
+          <a:effectRef idx="2">
+            <a:schemeClr val="accent1"/>
+          </a:effectRef>
+          <a:fontRef idx="minor">
+            <a:schemeClr val="lt1"/>
+          </a:fontRef>
+        </p:style>
+        <p:txBody>
+          <a:bodyPr rtlCol="0" anchor="ctr"/>
+          <a:lstStyle/>
+          <a:p>
+            <a:pPr algn="ctr"/>
+          </a:p>
+        </p:txBody>
+      </p:sp>
+      <p:sp>
+        <p:nvSpPr>
+          <p:cNvPr id="9" name="TextBox 8"/>
+          <p:cNvSpPr txBox="1"/>
+          <p:nvPr/>
+        </p:nvSpPr>
+        <p:spPr>
+          <a:xfrm>
+            <a:off x="4526279" y="2103120"/>
+            <a:ext cx="3108960" cy="365760"/>
+          </a:xfrm>
+          <a:prstGeom prst="rect">
+            <a:avLst/>
+          </a:prstGeom>
+          <a:noFill/>
+        </p:spPr>
+        <p:txBody>
+          <a:bodyPr wrap="square" lIns="0" rIns="0" tIns="0" bIns="0" anchor="t">
+            <a:spAutoFit/>
+          </a:bodyPr>
+          <a:lstStyle/>
+          <a:p>
+            <a:pPr>
+              <a:spcAft>
+                <a:spcPts val="400"/>
+              </a:spcAft>
+            </a:pPr>
+            <a:r>
+              <a:rPr sz="1500" b="1">
+                <a:solidFill>
+                  <a:srgbClr val="1F2937"/>
+                </a:solidFill>
+                <a:latin typeface="Arial"/>
+              </a:rPr>
+              <a:t>Разница 0,6 п. п.</a:t>
+            </a:r>
+          </a:p>
+        </p:txBody>
+      </p:sp>
+      <p:sp>
+        <p:nvSpPr>
+          <p:cNvPr id="10" name="TextBox 9"/>
+          <p:cNvSpPr txBox="1"/>
+          <p:nvPr/>
+        </p:nvSpPr>
+        <p:spPr>
+          <a:xfrm>
+            <a:off x="4526279" y="2487168"/>
+            <a:ext cx="3108960" cy="1600200"/>
+          </a:xfrm>
+          <a:prstGeom prst="rect">
+            <a:avLst/>
+          </a:prstGeom>
+          <a:noFill/>
+        </p:spPr>
+        <p:txBody>
+          <a:bodyPr wrap="square" lIns="0" rIns="0" tIns="0" bIns="0" anchor="t">
+            <a:spAutoFit/>
+          </a:bodyPr>
+          <a:lstStyle/>
+          <a:p>
+            <a:pPr>
+              <a:spcAft>
+                <a:spcPts val="400"/>
+              </a:spcAft>
+            </a:pPr>
+            <a:r>
+              <a:rPr sz="1400" b="0">
+                <a:solidFill>
+                  <a:srgbClr val="6B7280"/>
+                </a:solidFill>
+                <a:latin typeface="Arial"/>
+              </a:rPr>
+              <a:t>меньше одной SE: по такому тесту сказать, что A лучше, нельзя</a:t>
+            </a:r>
+          </a:p>
+        </p:txBody>
+      </p:sp>
+      <p:sp>
+        <p:nvSpPr>
+          <p:cNvPr id="11" name="Rectangle 10"/>
+          <p:cNvSpPr/>
+          <p:nvPr/>
+        </p:nvSpPr>
+        <p:spPr>
+          <a:xfrm>
+            <a:off x="8046719" y="1920240"/>
+            <a:ext cx="3593592" cy="2286000"/>
+          </a:xfrm>
+          <a:prstGeom prst="rect">
+            <a:avLst/>
+          </a:prstGeom>
+          <a:solidFill>
+            <a:srgbClr val="F5F7FA"/>
+          </a:solidFill>
+          <a:ln w="6350">
+            <a:solidFill>
+              <a:srgbClr val="D1D5DB"/>
+            </a:solidFill>
+          </a:ln>
+          <a:effectLst/>
+        </p:spPr>
+        <p:style>
+          <a:lnRef idx="1">
+            <a:schemeClr val="accent1"/>
+          </a:lnRef>
+          <a:fillRef idx="3">
+            <a:schemeClr val="accent1"/>
+          </a:fillRef>
+          <a:effectRef idx="2">
+            <a:schemeClr val="accent1"/>
+          </a:effectRef>
+          <a:fontRef idx="minor">
+            <a:schemeClr val="lt1"/>
+          </a:fontRef>
+        </p:style>
+        <p:txBody>
+          <a:bodyPr rtlCol="0" anchor="ctr"/>
+          <a:lstStyle/>
+          <a:p>
+            <a:pPr algn="ctr"/>
+          </a:p>
+        </p:txBody>
+      </p:sp>
+      <p:sp>
+        <p:nvSpPr>
+          <p:cNvPr id="12" name="TextBox 11"/>
+          <p:cNvSpPr txBox="1"/>
+          <p:nvPr/>
+        </p:nvSpPr>
+        <p:spPr>
+          <a:xfrm>
+            <a:off x="8275319" y="2103120"/>
+            <a:ext cx="3136392" cy="365760"/>
+          </a:xfrm>
+          <a:prstGeom prst="rect">
+            <a:avLst/>
+          </a:prstGeom>
+          <a:noFill/>
+        </p:spPr>
+        <p:txBody>
+          <a:bodyPr wrap="square" lIns="0" rIns="0" tIns="0" bIns="0" anchor="t">
+            <a:spAutoFit/>
+          </a:bodyPr>
+          <a:lstStyle/>
+          <a:p>
+            <a:pPr>
+              <a:spcAft>
+                <a:spcPts val="400"/>
+              </a:spcAft>
+            </a:pPr>
+            <a:r>
+              <a:rPr sz="1500" b="1">
+                <a:solidFill>
+                  <a:srgbClr val="1F2937"/>
+                </a:solidFill>
+                <a:latin typeface="Arial"/>
+              </a:rPr>
+              <a:t>Что делать</a:t>
+            </a:r>
+          </a:p>
+        </p:txBody>
+      </p:sp>
+      <p:sp>
+        <p:nvSpPr>
+          <p:cNvPr id="13" name="TextBox 12"/>
+          <p:cNvSpPr txBox="1"/>
+          <p:nvPr/>
+        </p:nvSpPr>
+        <p:spPr>
+          <a:xfrm>
+            <a:off x="8275319" y="2487168"/>
+            <a:ext cx="3136392" cy="1600200"/>
+          </a:xfrm>
+          <a:prstGeom prst="rect">
+            <a:avLst/>
+          </a:prstGeom>
+          <a:noFill/>
+        </p:spPr>
+        <p:txBody>
+          <a:bodyPr wrap="square" lIns="0" rIns="0" tIns="0" bIns="0" anchor="t">
+            <a:spAutoFit/>
+          </a:bodyPr>
+          <a:lstStyle/>
+          <a:p>
+            <a:pPr>
+              <a:spcAft>
+                <a:spcPts val="400"/>
+              </a:spcAft>
+            </a:pPr>
+            <a:r>
+              <a:rPr sz="1400" b="0">
+                <a:solidFill>
+                  <a:srgbClr val="6B7280"/>
+                </a:solidFill>
+                <a:latin typeface="Arial"/>
+              </a:rPr>
+              <a:t>больше тестовых данных, парное сравнение на одних объектах, кросс-валидация</a:t>
+            </a:r>
+          </a:p>
+        </p:txBody>
+      </p:sp>
+      <p:sp>
+        <p:nvSpPr>
+          <p:cNvPr id="14" name="Rectangle 13"/>
+          <p:cNvSpPr/>
+          <p:nvPr/>
+        </p:nvSpPr>
+        <p:spPr>
+          <a:xfrm>
+            <a:off x="548640" y="4526280"/>
+            <a:ext cx="11094415" cy="502920"/>
+          </a:xfrm>
+          <a:prstGeom prst="rect">
+            <a:avLst/>
+          </a:prstGeom>
+          <a:solidFill>
+            <a:srgbClr val="D6EEF8"/>
+          </a:solidFill>
+          <a:ln w="6350">
+            <a:solidFill>
+              <a:srgbClr val="D6EEF8"/>
+            </a:solidFill>
+          </a:ln>
+          <a:effectLst/>
+        </p:spPr>
+        <p:style>
+          <a:lnRef idx="1">
+            <a:schemeClr val="accent1"/>
+          </a:lnRef>
+          <a:fillRef idx="3">
+            <a:schemeClr val="accent1"/>
+          </a:fillRef>
+          <a:effectRef idx="2">
+            <a:schemeClr val="accent1"/>
+          </a:effectRef>
+          <a:fontRef idx="minor">
+            <a:schemeClr val="lt1"/>
+          </a:fontRef>
+        </p:style>
+        <p:txBody>
+          <a:bodyPr rtlCol="0" anchor="ctr"/>
+          <a:lstStyle/>
+          <a:p>
+            <a:pPr algn="ctr"/>
+          </a:p>
+        </p:txBody>
+      </p:sp>
+      <p:sp>
+        <p:nvSpPr>
+          <p:cNvPr id="15" name="TextBox 14"/>
+          <p:cNvSpPr txBox="1"/>
+          <p:nvPr/>
+        </p:nvSpPr>
+        <p:spPr>
+          <a:xfrm>
+            <a:off x="777240" y="4526280"/>
+            <a:ext cx="10637215" cy="502920"/>
+          </a:xfrm>
+          <a:prstGeom prst="rect">
+            <a:avLst/>
+          </a:prstGeom>
+          <a:noFill/>
+        </p:spPr>
+        <p:txBody>
+          <a:bodyPr wrap="square" lIns="0" rIns="0" tIns="0" bIns="0" anchor="ctr">
+            <a:spAutoFit/>
+          </a:bodyPr>
+          <a:lstStyle/>
+          <a:p>
+            <a:pPr>
+              <a:spcAft>
+                <a:spcPts val="400"/>
+              </a:spcAft>
+            </a:pPr>
+            <a:r>
+              <a:rPr sz="1500" b="1">
+                <a:solidFill>
+                  <a:srgbClr val="1F2937"/>
+                </a:solidFill>
+                <a:latin typeface="Arial"/>
+              </a:rPr>
+              <a:t>Любая метрика на конечной выборке — случайная величина. Сначала SE, потом выводы.</a:t>
+            </a:r>
+          </a:p>
+        </p:txBody>
+      </p:sp>
+    </p:spTree>
+  </p:cSld>
+  <p:clrMapOvr>
+    <a:masterClrMapping/>
+  </p:clrMapOvr>
+</p:sld>
+</file>
+
+<file path=ppt/slides/slide42.xml><?xml version="1.0" encoding="utf-8"?>
+<p:sld xmlns:a="http://schemas.openxmlformats.org/drawingml/2006/main" xmlns:p="http://schemas.openxmlformats.org/presentationml/2006/main" xmlns:r="http://schemas.openxmlformats.org/officeDocument/2006/relationships">
+  <p:cSld>
+    <p:spTree>
+      <p:nvGrpSpPr>
+        <p:cNvPr id="1" name=""/>
+        <p:cNvGrpSpPr/>
+        <p:nvPr/>
+      </p:nvGrpSpPr>
+      <p:grpSpPr/>
+      <p:sp>
+        <p:nvSpPr>
+          <p:cNvPr id="2" name="Title 1"/>
+          <p:cNvSpPr>
+            <a:spLocks noGrp="1"/>
+          </p:cNvSpPr>
+          <p:nvPr>
+            <p:ph type="title" idx="101"/>
+          </p:nvPr>
+        </p:nvSpPr>
+        <p:spPr/>
+        <p:txBody>
+          <a:bodyPr/>
+          <a:lstStyle/>
+          <a:p>
+            <a:r>
+              <a:rPr sz="2600" b="1">
+                <a:solidFill>
+                  <a:srgbClr val="1F2937"/>
+                </a:solidFill>
+                <a:latin typeface="Arial"/>
+              </a:rPr>
+              <a:t>Итоги</a:t>
+            </a:r>
+          </a:p>
+        </p:txBody>
+      </p:sp>
+      <p:sp>
+        <p:nvSpPr>
+          <p:cNvPr id="3" name="TextBox 2"/>
+          <p:cNvSpPr txBox="1"/>
+          <p:nvPr/>
+        </p:nvSpPr>
+        <p:spPr>
+          <a:xfrm>
+            <a:off x="11292840" y="6400800"/>
+            <a:ext cx="457200" cy="274320"/>
+          </a:xfrm>
+          <a:prstGeom prst="rect">
+            <a:avLst/>
+          </a:prstGeom>
+          <a:noFill/>
+        </p:spPr>
+        <p:txBody>
+          <a:bodyPr wrap="square" lIns="0" rIns="0" tIns="0" bIns="0" anchor="t">
+            <a:spAutoFit/>
+          </a:bodyPr>
+          <a:lstStyle/>
+          <a:p>
+            <a:pPr>
+              <a:spcAft>
+                <a:spcPts val="400"/>
+              </a:spcAft>
+            </a:pPr>
+            <a:r>
+              <a:rPr sz="1000" b="0">
+                <a:solidFill>
+                  <a:srgbClr val="6B7280"/>
+                </a:solidFill>
+                <a:latin typeface="Arial"/>
+              </a:rPr>
+              <a:t>42</a:t>
+            </a:r>
+          </a:p>
+        </p:txBody>
+      </p:sp>
+      <p:sp>
+        <p:nvSpPr>
+          <p:cNvPr id="4" name="Rectangle 3"/>
+          <p:cNvSpPr/>
+          <p:nvPr/>
+        </p:nvSpPr>
+        <p:spPr>
+          <a:xfrm>
+            <a:off x="548640" y="1325880"/>
+            <a:ext cx="109728" cy="457200"/>
+          </a:xfrm>
+          <a:prstGeom prst="rect">
+            <a:avLst/>
+          </a:prstGeom>
+          <a:solidFill>
+            <a:srgbClr val="3B82F6"/>
+          </a:solidFill>
+          <a:ln w="6350">
+            <a:noFill/>
+          </a:ln>
+          <a:effectLst/>
+        </p:spPr>
+        <p:style>
+          <a:lnRef idx="1">
+            <a:schemeClr val="accent1"/>
+          </a:lnRef>
+          <a:fillRef idx="3">
+            <a:schemeClr val="accent1"/>
+          </a:fillRef>
+          <a:effectRef idx="2">
+            <a:schemeClr val="accent1"/>
+          </a:effectRef>
+          <a:fontRef idx="minor">
+            <a:schemeClr val="lt1"/>
+          </a:fontRef>
+        </p:style>
+        <p:txBody>
+          <a:bodyPr rtlCol="0" anchor="ctr"/>
+          <a:lstStyle/>
+          <a:p>
+            <a:pPr algn="ctr"/>
+          </a:p>
+        </p:txBody>
+      </p:sp>
+      <p:sp>
+        <p:nvSpPr>
+          <p:cNvPr id="5" name="TextBox 4"/>
+          <p:cNvSpPr txBox="1"/>
+          <p:nvPr/>
+        </p:nvSpPr>
+        <p:spPr>
+          <a:xfrm>
+            <a:off x="868680" y="1325880"/>
+            <a:ext cx="10728655" cy="457200"/>
+          </a:xfrm>
+          <a:prstGeom prst="rect">
+            <a:avLst/>
+          </a:prstGeom>
+          <a:noFill/>
+        </p:spPr>
+        <p:txBody>
+          <a:bodyPr wrap="square" lIns="0" rIns="0" tIns="0" bIns="0" anchor="ctr">
+            <a:spAutoFit/>
+          </a:bodyPr>
+          <a:lstStyle/>
+          <a:p>
+            <a:pPr>
+              <a:spcAft>
+                <a:spcPts val="400"/>
+              </a:spcAft>
+            </a:pPr>
+            <a:r>
+              <a:rPr sz="1500" b="0">
+                <a:solidFill>
+                  <a:srgbClr val="1F2937"/>
+                </a:solidFill>
+                <a:latin typeface="Arial"/>
+              </a:rPr>
+              <a:t>Статистика — случайная величина; её разброс — стандартная ошибка.</a:t>
+            </a:r>
+          </a:p>
+        </p:txBody>
+      </p:sp>
+      <p:sp>
+        <p:nvSpPr>
+          <p:cNvPr id="6" name="Rectangle 5"/>
+          <p:cNvSpPr/>
+          <p:nvPr/>
+        </p:nvSpPr>
+        <p:spPr>
+          <a:xfrm>
+            <a:off x="548640" y="2011680"/>
+            <a:ext cx="109728" cy="457200"/>
+          </a:xfrm>
+          <a:prstGeom prst="rect">
+            <a:avLst/>
+          </a:prstGeom>
+          <a:solidFill>
+            <a:srgbClr val="3B82F6"/>
+          </a:solidFill>
+          <a:ln w="6350">
+            <a:noFill/>
+          </a:ln>
+          <a:effectLst/>
+        </p:spPr>
+        <p:style>
+          <a:lnRef idx="1">
+            <a:schemeClr val="accent1"/>
+          </a:lnRef>
+          <a:fillRef idx="3">
+            <a:schemeClr val="accent1"/>
+          </a:fillRef>
+          <a:effectRef idx="2">
+            <a:schemeClr val="accent1"/>
+          </a:effectRef>
+          <a:fontRef idx="minor">
+            <a:schemeClr val="lt1"/>
+          </a:fontRef>
+        </p:style>
+        <p:txBody>
+          <a:bodyPr rtlCol="0" anchor="ctr"/>
+          <a:lstStyle/>
+          <a:p>
+            <a:pPr algn="ctr"/>
+          </a:p>
+        </p:txBody>
+      </p:sp>
+      <p:sp>
+        <p:nvSpPr>
+          <p:cNvPr id="7" name="TextBox 6"/>
+          <p:cNvSpPr txBox="1"/>
+          <p:nvPr/>
+        </p:nvSpPr>
+        <p:spPr>
+          <a:xfrm>
+            <a:off x="868680" y="2011680"/>
+            <a:ext cx="10728655" cy="457200"/>
+          </a:xfrm>
+          <a:prstGeom prst="rect">
+            <a:avLst/>
+          </a:prstGeom>
+          <a:noFill/>
+        </p:spPr>
+        <p:txBody>
+          <a:bodyPr wrap="square" lIns="0" rIns="0" tIns="0" bIns="0" anchor="ctr">
+            <a:spAutoFit/>
+          </a:bodyPr>
+          <a:lstStyle/>
+          <a:p>
+            <a:pPr>
+              <a:spcAft>
+                <a:spcPts val="400"/>
+              </a:spcAft>
+            </a:pPr>
+            <a:r>
+              <a:rPr sz="1500" b="0">
+                <a:solidFill>
+                  <a:srgbClr val="1F2937"/>
+                </a:solidFill>
+                <a:latin typeface="Arial"/>
+              </a:rPr>
+              <a:t>ЗБЧ: среднее → EX, частота → вероятность; основа Монте-Карло. Отклонения разбавляются, а не компенсируются.</a:t>
+            </a:r>
+          </a:p>
+        </p:txBody>
+      </p:sp>
+      <p:sp>
+        <p:nvSpPr>
+          <p:cNvPr id="8" name="Rectangle 7"/>
+          <p:cNvSpPr/>
+          <p:nvPr/>
+        </p:nvSpPr>
+        <p:spPr>
+          <a:xfrm>
+            <a:off x="548640" y="2697480"/>
+            <a:ext cx="109728" cy="457200"/>
+          </a:xfrm>
+          <a:prstGeom prst="rect">
+            <a:avLst/>
+          </a:prstGeom>
+          <a:solidFill>
+            <a:srgbClr val="3B82F6"/>
+          </a:solidFill>
+          <a:ln w="6350">
+            <a:noFill/>
+          </a:ln>
+          <a:effectLst/>
+        </p:spPr>
+        <p:style>
+          <a:lnRef idx="1">
+            <a:schemeClr val="accent1"/>
+          </a:lnRef>
+          <a:fillRef idx="3">
+            <a:schemeClr val="accent1"/>
+          </a:fillRef>
+          <a:effectRef idx="2">
+            <a:schemeClr val="accent1"/>
+          </a:effectRef>
+          <a:fontRef idx="minor">
+            <a:schemeClr val="lt1"/>
+          </a:fontRef>
+        </p:style>
+        <p:txBody>
+          <a:bodyPr rtlCol="0" anchor="ctr"/>
+          <a:lstStyle/>
+          <a:p>
+            <a:pPr algn="ctr"/>
+          </a:p>
+        </p:txBody>
+      </p:sp>
+      <p:sp>
+        <p:nvSpPr>
+          <p:cNvPr id="9" name="TextBox 8"/>
+          <p:cNvSpPr txBox="1"/>
+          <p:nvPr/>
+        </p:nvSpPr>
+        <p:spPr>
+          <a:xfrm>
+            <a:off x="868680" y="2697480"/>
+            <a:ext cx="10728655" cy="457200"/>
+          </a:xfrm>
+          <a:prstGeom prst="rect">
+            <a:avLst/>
+          </a:prstGeom>
+          <a:noFill/>
+        </p:spPr>
+        <p:txBody>
+          <a:bodyPr wrap="square" lIns="0" rIns="0" tIns="0" bIns="0" anchor="ctr">
+            <a:spAutoFit/>
+          </a:bodyPr>
+          <a:lstStyle/>
+          <a:p>
+            <a:pPr>
+              <a:spcAft>
+                <a:spcPts val="400"/>
+              </a:spcAft>
+            </a:pPr>
+            <a:r>
+              <a:rPr sz="1500" b="0">
+                <a:solidFill>
+                  <a:srgbClr val="1F2937"/>
+                </a:solidFill>
+                <a:latin typeface="Arial"/>
+              </a:rPr>
+              <a:t>x̄, p̂, s², F̂ₙ — состоятельные оценки; SE ∝ 1/√n; SE любой статистики даёт бутстреп.</a:t>
+            </a:r>
+          </a:p>
+        </p:txBody>
+      </p:sp>
+      <p:sp>
+        <p:nvSpPr>
+          <p:cNvPr id="10" name="Rectangle 9"/>
+          <p:cNvSpPr/>
+          <p:nvPr/>
+        </p:nvSpPr>
+        <p:spPr>
+          <a:xfrm>
+            <a:off x="548640" y="3383280"/>
+            <a:ext cx="109728" cy="457200"/>
+          </a:xfrm>
+          <a:prstGeom prst="rect">
+            <a:avLst/>
+          </a:prstGeom>
+          <a:solidFill>
+            <a:srgbClr val="3B82F6"/>
+          </a:solidFill>
+          <a:ln w="6350">
+            <a:noFill/>
+          </a:ln>
+          <a:effectLst/>
+        </p:spPr>
+        <p:style>
+          <a:lnRef idx="1">
+            <a:schemeClr val="accent1"/>
+          </a:lnRef>
+          <a:fillRef idx="3">
+            <a:schemeClr val="accent1"/>
+          </a:fillRef>
+          <a:effectRef idx="2">
+            <a:schemeClr val="accent1"/>
+          </a:effectRef>
+          <a:fontRef idx="minor">
+            <a:schemeClr val="lt1"/>
+          </a:fontRef>
+        </p:style>
+        <p:txBody>
+          <a:bodyPr rtlCol="0" anchor="ctr"/>
+          <a:lstStyle/>
+          <a:p>
+            <a:pPr algn="ctr"/>
+          </a:p>
+        </p:txBody>
+      </p:sp>
+      <p:sp>
+        <p:nvSpPr>
+          <p:cNvPr id="11" name="TextBox 10"/>
+          <p:cNvSpPr txBox="1"/>
+          <p:nvPr/>
+        </p:nvSpPr>
+        <p:spPr>
+          <a:xfrm>
+            <a:off x="868680" y="3383280"/>
+            <a:ext cx="10728655" cy="457200"/>
+          </a:xfrm>
+          <a:prstGeom prst="rect">
+            <a:avLst/>
+          </a:prstGeom>
+          <a:noFill/>
+        </p:spPr>
+        <p:txBody>
+          <a:bodyPr wrap="square" lIns="0" rIns="0" tIns="0" bIns="0" anchor="ctr">
+            <a:spAutoFit/>
+          </a:bodyPr>
+          <a:lstStyle/>
+          <a:p>
+            <a:pPr>
+              <a:spcAft>
+                <a:spcPts val="400"/>
+              </a:spcAft>
+            </a:pPr>
+            <a:r>
+              <a:rPr sz="1500" b="0">
+                <a:solidFill>
+                  <a:srgbClr val="1F2937"/>
+                </a:solidFill>
+                <a:latin typeface="Arial"/>
+              </a:rPr>
+              <a:t>ЦПТ: сумма многих независимых слагаемых ≈ N(nμ, nσ²); Муавр — Лаплас с поправкой ±0,5.</a:t>
+            </a:r>
+          </a:p>
+        </p:txBody>
+      </p:sp>
+      <p:sp>
+        <p:nvSpPr>
+          <p:cNvPr id="12" name="Rectangle 11"/>
+          <p:cNvSpPr/>
+          <p:nvPr/>
+        </p:nvSpPr>
+        <p:spPr>
+          <a:xfrm>
+            <a:off x="548640" y="4069080"/>
+            <a:ext cx="109728" cy="457200"/>
+          </a:xfrm>
+          <a:prstGeom prst="rect">
+            <a:avLst/>
+          </a:prstGeom>
+          <a:solidFill>
+            <a:srgbClr val="3B82F6"/>
+          </a:solidFill>
+          <a:ln w="6350">
+            <a:noFill/>
+          </a:ln>
+          <a:effectLst/>
+        </p:spPr>
+        <p:style>
+          <a:lnRef idx="1">
+            <a:schemeClr val="accent1"/>
+          </a:lnRef>
+          <a:fillRef idx="3">
+            <a:schemeClr val="accent1"/>
+          </a:fillRef>
+          <a:effectRef idx="2">
+            <a:schemeClr val="accent1"/>
+          </a:effectRef>
+          <a:fontRef idx="minor">
+            <a:schemeClr val="lt1"/>
+          </a:fontRef>
+        </p:style>
+        <p:txBody>
+          <a:bodyPr rtlCol="0" anchor="ctr"/>
+          <a:lstStyle/>
+          <a:p>
+            <a:pPr algn="ctr"/>
+          </a:p>
+        </p:txBody>
+      </p:sp>
+      <p:sp>
+        <p:nvSpPr>
+          <p:cNvPr id="13" name="TextBox 12"/>
+          <p:cNvSpPr txBox="1"/>
+          <p:nvPr/>
+        </p:nvSpPr>
+        <p:spPr>
+          <a:xfrm>
+            <a:off x="868680" y="4069080"/>
+            <a:ext cx="10728655" cy="457200"/>
+          </a:xfrm>
+          <a:prstGeom prst="rect">
+            <a:avLst/>
+          </a:prstGeom>
+          <a:noFill/>
+        </p:spPr>
+        <p:txBody>
+          <a:bodyPr wrap="square" lIns="0" rIns="0" tIns="0" bIns="0" anchor="ctr">
+            <a:spAutoFit/>
+          </a:bodyPr>
+          <a:lstStyle/>
+          <a:p>
+            <a:pPr>
+              <a:spcAft>
+                <a:spcPts val="400"/>
+              </a:spcAft>
+            </a:pPr>
+            <a:r>
+              <a:rPr sz="1500" b="0">
+                <a:solidFill>
+                  <a:srgbClr val="1F2937"/>
+                </a:solidFill>
+                <a:latin typeface="Arial"/>
+              </a:rPr>
+              <a:t>Интервал x̄ ± 1,96·s/√n; объём n ≥ (zσ/ε)²; ±3 п. п. — около 1 000 человек.</a:t>
+            </a:r>
+          </a:p>
+        </p:txBody>
+      </p:sp>
+      <p:sp>
+        <p:nvSpPr>
+          <p:cNvPr id="14" name="Rectangle 13"/>
+          <p:cNvSpPr/>
+          <p:nvPr/>
+        </p:nvSpPr>
+        <p:spPr>
+          <a:xfrm>
+            <a:off x="548640" y="4754880"/>
+            <a:ext cx="109728" cy="457200"/>
+          </a:xfrm>
+          <a:prstGeom prst="rect">
+            <a:avLst/>
+          </a:prstGeom>
+          <a:solidFill>
+            <a:srgbClr val="3B82F6"/>
+          </a:solidFill>
+          <a:ln w="6350">
+            <a:noFill/>
+          </a:ln>
+          <a:effectLst/>
+        </p:spPr>
+        <p:style>
+          <a:lnRef idx="1">
+            <a:schemeClr val="accent1"/>
+          </a:lnRef>
+          <a:fillRef idx="3">
+            <a:schemeClr val="accent1"/>
+          </a:fillRef>
+          <a:effectRef idx="2">
+            <a:schemeClr val="accent1"/>
+          </a:effectRef>
+          <a:fontRef idx="minor">
+            <a:schemeClr val="lt1"/>
+          </a:fontRef>
+        </p:style>
+        <p:txBody>
+          <a:bodyPr rtlCol="0" anchor="ctr"/>
+          <a:lstStyle/>
+          <a:p>
+            <a:pPr algn="ctr"/>
+          </a:p>
+        </p:txBody>
+      </p:sp>
+      <p:sp>
+        <p:nvSpPr>
+          <p:cNvPr id="15" name="TextBox 14"/>
+          <p:cNvSpPr txBox="1"/>
+          <p:nvPr/>
+        </p:nvSpPr>
+        <p:spPr>
+          <a:xfrm>
+            <a:off x="868680" y="4754880"/>
+            <a:ext cx="10728655" cy="457200"/>
+          </a:xfrm>
+          <a:prstGeom prst="rect">
+            <a:avLst/>
+          </a:prstGeom>
+          <a:noFill/>
+        </p:spPr>
+        <p:txBody>
+          <a:bodyPr wrap="square" lIns="0" rIns="0" tIns="0" bIns="0" anchor="ctr">
+            <a:spAutoFit/>
+          </a:bodyPr>
+          <a:lstStyle/>
+          <a:p>
+            <a:pPr>
+              <a:spcAft>
+                <a:spcPts val="400"/>
+              </a:spcAft>
+            </a:pPr>
+            <a:r>
+              <a:rPr sz="1500" b="0">
+                <a:solidFill>
+                  <a:srgbClr val="1F2937"/>
+                </a:solidFill>
+                <a:latin typeface="Arial"/>
+              </a:rPr>
+              <a:t>Малые выборки дают крайние значения; зависимость и тяжёлые хвосты ломают формулы.</a:t>
+            </a:r>
+          </a:p>
+        </p:txBody>
+      </p:sp>
+    </p:spTree>
+  </p:cSld>
+  <p:clrMapOvr>
+    <a:masterClrMapping/>
+  </p:clrMapOvr>
+</p:sld>
+</file>
+
+<file path=ppt/slides/slide43.xml><?xml version="1.0" encoding="utf-8"?>
+<p:sld xmlns:a="http://schemas.openxmlformats.org/drawingml/2006/main" xmlns:p="http://schemas.openxmlformats.org/presentationml/2006/main" xmlns:r="http://schemas.openxmlformats.org/officeDocument/2006/relationships">
+  <p:cSld>
+    <p:spTree>
+      <p:nvGrpSpPr>
+        <p:cNvPr id="1" name=""/>
+        <p:cNvGrpSpPr/>
+        <p:nvPr/>
+      </p:nvGrpSpPr>
+      <p:grpSpPr/>
+      <p:sp>
+        <p:nvSpPr>
+          <p:cNvPr id="2" name="Title 1"/>
+          <p:cNvSpPr>
+            <a:spLocks noGrp="1"/>
+          </p:cNvSpPr>
+          <p:nvPr>
+            <p:ph type="title" idx="101"/>
+          </p:nvPr>
+        </p:nvSpPr>
+        <p:spPr/>
+        <p:txBody>
+          <a:bodyPr/>
+          <a:lstStyle/>
+          <a:p>
+            <a:r>
+              <a:rPr sz="2600" b="1">
+                <a:solidFill>
+                  <a:srgbClr val="1F2937"/>
+                </a:solidFill>
+                <a:latin typeface="Arial"/>
+              </a:rPr>
+              <a:t>Литература</a:t>
+            </a:r>
+          </a:p>
+        </p:txBody>
+      </p:sp>
+      <p:sp>
+        <p:nvSpPr>
+          <p:cNvPr id="3" name="TextBox 2"/>
+          <p:cNvSpPr txBox="1"/>
+          <p:nvPr/>
+        </p:nvSpPr>
+        <p:spPr>
+          <a:xfrm>
+            <a:off x="11292840" y="6400800"/>
+            <a:ext cx="457200" cy="274320"/>
+          </a:xfrm>
+          <a:prstGeom prst="rect">
+            <a:avLst/>
+          </a:prstGeom>
+          <a:noFill/>
+        </p:spPr>
+        <p:txBody>
+          <a:bodyPr wrap="square" lIns="0" rIns="0" tIns="0" bIns="0" anchor="t">
+            <a:spAutoFit/>
+          </a:bodyPr>
+          <a:lstStyle/>
+          <a:p>
+            <a:pPr>
+              <a:spcAft>
+                <a:spcPts val="400"/>
+              </a:spcAft>
+            </a:pPr>
+            <a:r>
+              <a:rPr sz="1000" b="0">
+                <a:solidFill>
+                  <a:srgbClr val="6B7280"/>
+                </a:solidFill>
+                <a:latin typeface="Arial"/>
+              </a:rPr>
+              <a:t>43</a:t>
+            </a:r>
+          </a:p>
+        </p:txBody>
+      </p:sp>
+      <p:sp>
+        <p:nvSpPr>
+          <p:cNvPr id="4" name="TextBox 3"/>
+          <p:cNvSpPr txBox="1"/>
+          <p:nvPr/>
+        </p:nvSpPr>
+        <p:spPr>
+          <a:xfrm>
+            <a:off x="548640" y="1371600"/>
+            <a:ext cx="11094415" cy="3291840"/>
+          </a:xfrm>
+          <a:prstGeom prst="rect">
+            <a:avLst/>
+          </a:prstGeom>
+          <a:noFill/>
+        </p:spPr>
+        <p:txBody>
+          <a:bodyPr wrap="square" lIns="0" rIns="0" tIns="0" bIns="0" anchor="t">
+            <a:spAutoFit/>
+          </a:bodyPr>
+          <a:lstStyle/>
+          <a:p>
+            <a:pPr>
+              <a:spcAft>
+                <a:spcPts val="1000"/>
+              </a:spcAft>
+            </a:pPr>
+            <a:r>
+              <a:rPr sz="1700" b="0">
+                <a:solidFill>
+                  <a:srgbClr val="1F2937"/>
+                </a:solidFill>
+                <a:latin typeface="Arial"/>
+              </a:rPr>
+              <a:t>Гмурман В. Е. Теория вероятностей и математическая статистика — гл. 4, 9, 12, 15–16</a:t>
+            </a:r>
+          </a:p>
+          <a:p>
+            <a:pPr>
+              <a:spcAft>
+                <a:spcPts val="1000"/>
+              </a:spcAft>
+            </a:pPr>
+            <a:r>
+              <a:rPr sz="1700" b="0">
+                <a:solidFill>
+                  <a:srgbClr val="1F2937"/>
+                </a:solidFill>
+                <a:latin typeface="Arial"/>
+              </a:rPr>
+              <a:t>Мёрфи К. П. Вероятностное машинное обучение: введение — разд. 2.8, 4.7</a:t>
+            </a:r>
+          </a:p>
+          <a:p>
+            <a:pPr>
+              <a:spcAft>
+                <a:spcPts val="1000"/>
+              </a:spcAft>
+            </a:pPr>
+            <a:r>
+              <a:rPr sz="1700" b="0">
+                <a:solidFill>
+                  <a:srgbClr val="1F2937"/>
+                </a:solidFill>
+                <a:latin typeface="Arial"/>
+              </a:rPr>
+              <a:t>Дайзенрот М. П. и др. Математика для машинного обучения — разд. 6.4, 6.5, 8.2</a:t>
+            </a:r>
+          </a:p>
+          <a:p>
+            <a:pPr>
+              <a:spcAft>
+                <a:spcPts val="1000"/>
+              </a:spcAft>
+            </a:pPr>
+            <a:r>
+              <a:rPr sz="1700" b="0">
+                <a:solidFill>
+                  <a:srgbClr val="1F2937"/>
+                </a:solidFill>
+                <a:latin typeface="Arial"/>
+              </a:rPr>
+              <a:t>Николенко С. и др. Глубокое обучение — SGD и мини-батчи, инициализация весов</a:t>
+            </a:r>
+          </a:p>
+          <a:p>
+            <a:pPr>
+              <a:spcAft>
+                <a:spcPts val="1000"/>
+              </a:spcAft>
+            </a:pPr>
+            <a:r>
+              <a:rPr sz="1700" b="0">
+                <a:solidFill>
+                  <a:srgbClr val="1F2937"/>
+                </a:solidFill>
+                <a:latin typeface="Arial"/>
+              </a:rPr>
+              <a:t>Савелова Т. И. Метод Монте-Карло</a:t>
+            </a:r>
+          </a:p>
+          <a:p>
+            <a:pPr>
+              <a:spcAft>
+                <a:spcPts val="1000"/>
+              </a:spcAft>
+            </a:pPr>
+            <a:r>
+              <a:rPr sz="1700" b="0">
+                <a:solidFill>
+                  <a:srgbClr val="1F2937"/>
+                </a:solidFill>
+                <a:latin typeface="Arial"/>
+              </a:rPr>
+              <a:t>Efron B., Tibshirani R. An Introduction to the Bootstrap, 1993</a:t>
+            </a:r>
+          </a:p>
+          <a:p>
+            <a:pPr>
+              <a:spcAft>
+                <a:spcPts val="1000"/>
+              </a:spcAft>
+            </a:pPr>
+            <a:r>
+              <a:rPr sz="1700" b="0">
+                <a:solidFill>
+                  <a:srgbClr val="1F2937"/>
+                </a:solidFill>
+                <a:latin typeface="Arial"/>
+              </a:rPr>
+              <a:t>Wainer H. The Most Dangerous Equation // American Scientist, 2007</a:t>
+            </a:r>
+          </a:p>
+        </p:txBody>
+      </p:sp>
+      <p:sp>
+        <p:nvSpPr>
+          <p:cNvPr id="5" name="TextBox 4"/>
+          <p:cNvSpPr txBox="1"/>
+          <p:nvPr/>
+        </p:nvSpPr>
+        <p:spPr>
+          <a:xfrm>
+            <a:off x="548640" y="5120640"/>
+            <a:ext cx="11094415" cy="365760"/>
+          </a:xfrm>
+          <a:prstGeom prst="rect">
+            <a:avLst/>
+          </a:prstGeom>
+          <a:noFill/>
+        </p:spPr>
+        <p:txBody>
+          <a:bodyPr wrap="square" lIns="0" rIns="0" tIns="0" bIns="0" anchor="t">
+            <a:spAutoFit/>
+          </a:bodyPr>
+          <a:lstStyle/>
+          <a:p>
+            <a:pPr>
+              <a:spcAft>
+                <a:spcPts val="400"/>
+              </a:spcAft>
+            </a:pPr>
+            <a:r>
+              <a:rPr sz="1500" b="0">
+                <a:solidFill>
+                  <a:srgbClr val="6B7280"/>
+                </a:solidFill>
+                <a:latin typeface="Arial"/>
+              </a:rPr>
+              <a:t>Конспект с полными формулировками и доказательствами: 05_lln-clt-itmo.md</a:t>
             </a:r>
           </a:p>
         </p:txBody>
